--- a/slides/datasets-in-10-minutes-afqmc.pptx
+++ b/slides/datasets-in-10-minutes-afqmc.pptx
@@ -24,7 +24,6 @@
     <p:sldId id="272" r:id="rId22"/>
     <p:sldId id="273" r:id="rId23"/>
     <p:sldId id="274" r:id="rId24"/>
-    <p:sldId id="275" r:id="rId25"/>
     <p:sldId id="276" r:id="rId26"/>
     <p:sldId id="277" r:id="rId27"/>
     <p:sldId id="278" r:id="rId28"/>
@@ -45,7 +44,6 @@
     <p:sldId id="293" r:id="rId43"/>
     <p:sldId id="294" r:id="rId44"/>
     <p:sldId id="295" r:id="rId45"/>
-    <p:sldId id="296" r:id="rId46"/>
   </p:sldIdLst>
   <p:sldSz cx="9144000" cy="5143500" type="screen16x9"/>
   <p:notesSz cx="6858000" cy="9144000"/>
@@ -10936,7 +10934,7 @@
                 <a:ea typeface="Noto Sans CJK JP"/>
                 <a:cs typeface="Noto Sans"/>
               </a:rPr>
-              <a:t>CLEVAでの利用と入手方法</a:t>
+              <a:t>入手方法と利用条件</a:t>
             </a:r>
           </a:p>
         </p:txBody>
@@ -10984,7 +10982,7 @@
                 <a:ea typeface="Noto Sans CJK JP"/>
                 <a:cs typeface="Noto Sans"/>
               </a:rPr>
-              <a:t>4. CLEVAでの利用と入手方法</a:t>
+              <a:t>4. 入手方法と利用条件</a:t>
             </a:r>
           </a:p>
         </p:txBody>
@@ -11265,14 +11263,97 @@
                 <a:ea typeface="Noto Sans CJK JP"/>
                 <a:cs typeface="Noto Sans"/>
               </a:rPr>
-              <a:t>CLEVAでは、二つの質問が同じ意味かを選ぶ</a:t>
-            </a:r>
-          </a:p>
-        </p:txBody>
-      </p:sp>
-      <p:sp>
-        <p:nvSpPr>
-          <p:cNvPr id="3" name="Title 2"/>
+              <a:t>公式データの入手先と、利用条件</a:t>
+            </a:r>
+          </a:p>
+        </p:txBody>
+      </p:sp>
+      <p:sp>
+        <p:nvSpPr>
+          <p:cNvPr id="3" name="Text Placeholder 2"/>
+          <p:cNvSpPr>
+            <a:spLocks noGrp="1"/>
+          </p:cNvSpPr>
+          <p:nvPr>
+            <p:ph type="body" idx="1"/>
+          </p:nvPr>
+        </p:nvSpPr>
+        <p:spPr>
+          <a:xfrm>
+            <a:off x="594360" y="1463040"/>
+            <a:ext cx="7955279" cy="3044952"/>
+          </a:xfrm>
+        </p:spPr>
+        <p:txBody>
+          <a:bodyPr wrap="square" tIns="91440" bIns="91440">
+            <a:noAutofit/>
+          </a:bodyPr>
+          <a:lstStyle/>
+          <a:p>
+            <a:pPr marL="457200" indent="-355600">
+              <a:lnSpc>
+                <a:spcPts val="2379"/>
+              </a:lnSpc>
+              <a:spcAft>
+                <a:spcPts val="700"/>
+              </a:spcAft>
+              <a:buSzPct val="66500"/>
+              <a:buFont typeface="Noto Sans CJK JP"/>
+              <a:buChar char="●"/>
+              <a:defRPr sz="2000" b="0">
+                <a:solidFill>
+                  <a:srgbClr val="303437"/>
+                </a:solidFill>
+                <a:latin typeface="Noto Sans"/>
+              </a:defRPr>
+            </a:pPr>
+            <a:r>
+              <a:rPr sz="2000" b="0" lang="ja-JP" altLang="en-US">
+                <a:solidFill>
+                  <a:srgbClr val="303437"/>
+                </a:solidFill>
+                <a:latin typeface="Noto Sans"/>
+                <a:ea typeface="Noto Sans CJK JP"/>
+                <a:cs typeface="Noto Sans"/>
+              </a:rPr>
+              <a:t>CLUEの公式リポジトリが、AFQMCの公開ZIPへのリンクを示す。学習用・開発用・テスト用のJSONファイルを入手できる。</a:t>
+            </a:r>
+          </a:p>
+          <a:p>
+            <a:pPr marL="457200" indent="-355600">
+              <a:lnSpc>
+                <a:spcPts val="2379"/>
+              </a:lnSpc>
+              <a:spcAft>
+                <a:spcPts val="700"/>
+              </a:spcAft>
+              <a:buSzPct val="66500"/>
+              <a:buFont typeface="Noto Sans CJK JP"/>
+              <a:buChar char="●"/>
+              <a:defRPr sz="2000" b="0">
+                <a:solidFill>
+                  <a:srgbClr val="303437"/>
+                </a:solidFill>
+                <a:latin typeface="Noto Sans"/>
+              </a:defRPr>
+            </a:pPr>
+            <a:r>
+              <a:rPr sz="2000" b="0" lang="ja-JP" altLang="en-US">
+                <a:solidFill>
+                  <a:srgbClr val="303437"/>
+                </a:solidFill>
+                <a:latin typeface="Noto Sans"/>
+                <a:ea typeface="Noto Sans CJK JP"/>
+                <a:cs typeface="Noto Sans"/>
+              </a:rPr>
+              <a:t>付属モデルコードのApacheライセンスとは別に、AFQMCデータ全体の利用許諾は明示されていない。再利用の条件は配布元への確認が必要。</a:t>
+            </a:r>
+          </a:p>
+        </p:txBody>
+      </p:sp>
+      <p:sp>
+        <p:nvSpPr>
+          <p:cNvPr id="4" name="Title 3"/>
           <p:cNvSpPr>
             <a:spLocks noGrp="1"/>
           </p:cNvSpPr>
@@ -11313,21 +11394,21 @@
                 <a:ea typeface="Noto Sans CJK JP"/>
                 <a:cs typeface="Noto Sans"/>
               </a:rPr>
-              <a:t>4. CLEVAでの利用と入手方法</a:t>
-            </a:r>
-          </a:p>
-        </p:txBody>
-      </p:sp>
-      <p:sp>
-        <p:nvSpPr>
-          <p:cNvPr id="4" name="TextBox 3"/>
+              <a:t>4. 入手方法と利用条件</a:t>
+            </a:r>
+          </a:p>
+        </p:txBody>
+      </p:sp>
+      <p:sp>
+        <p:nvSpPr>
+          <p:cNvPr id="5" name="sources"/>
           <p:cNvSpPr txBox="1"/>
           <p:nvPr/>
         </p:nvSpPr>
         <p:spPr>
           <a:xfrm>
-            <a:off x="548640" y="1417320"/>
-            <a:ext cx="3383280" cy="228600"/>
+            <a:off x="502920" y="4700016"/>
+            <a:ext cx="8183879" cy="530352"/>
           </a:xfrm>
           <a:prstGeom prst="rect">
             <a:avLst/>
@@ -11342,24 +11423,24 @@
           <a:p>
             <a:pPr algn="l">
               <a:lnSpc>
-                <a:spcPts val="1404"/>
-              </a:lnSpc>
-              <a:spcBef>
-                <a:spcPts val="0"/>
-              </a:spcBef>
-              <a:spcAft>
-                <a:spcPts val="0"/>
-              </a:spcAft>
-              <a:buNone/>
-              <a:defRPr sz="1200" b="0">
-                <a:solidFill>
-                  <a:srgbClr val="303437"/>
-                </a:solidFill>
-                <a:latin typeface="Noto Sans"/>
-              </a:defRPr>
-            </a:pPr>
-            <a:r>
-              <a:rPr sz="1200" b="0" lang="ja-JP" altLang="en-US">
+                <a:spcPts val="940"/>
+              </a:lnSpc>
+              <a:spcBef>
+                <a:spcPts val="0"/>
+              </a:spcBef>
+              <a:spcAft>
+                <a:spcPts val="140"/>
+              </a:spcAft>
+              <a:buNone/>
+              <a:defRPr sz="810" b="0">
+                <a:solidFill>
+                  <a:srgbClr val="303437"/>
+                </a:solidFill>
+                <a:latin typeface="Noto Sans"/>
+              </a:defRPr>
+            </a:pPr>
+            <a:r>
+              <a:rPr sz="810" b="0" lang="ja-JP" altLang="en-US">
                 <a:solidFill>
                   <a:srgbClr val="626669"/>
                 </a:solidFill>
@@ -11367,53 +11448,10 @@
                 <a:ea typeface="Noto Sans CJK JP"/>
                 <a:cs typeface="Noto Sans"/>
               </a:rPr>
-              <a:t>公開されている中国語の設問</a:t>
-            </a:r>
-          </a:p>
-        </p:txBody>
-      </p:sp>
-      <p:sp>
-        <p:nvSpPr>
-          <p:cNvPr id="5" name="TextBox 4"/>
-          <p:cNvSpPr txBox="1"/>
-          <p:nvPr/>
-        </p:nvSpPr>
-        <p:spPr>
-          <a:xfrm>
-            <a:off x="4160520" y="1417320"/>
-            <a:ext cx="4389120" cy="228600"/>
-          </a:xfrm>
-          <a:prstGeom prst="rect">
-            <a:avLst/>
-          </a:prstGeom>
-          <a:noFill/>
-        </p:spPr>
-        <p:txBody>
-          <a:bodyPr wrap="square" lIns="0" rIns="0" tIns="0" bIns="0">
-            <a:noAutofit/>
-          </a:bodyPr>
-          <a:lstStyle/>
-          <a:p>
-            <a:pPr algn="l">
-              <a:lnSpc>
-                <a:spcPts val="1404"/>
-              </a:lnSpc>
-              <a:spcBef>
-                <a:spcPts val="0"/>
-              </a:spcBef>
-              <a:spcAft>
-                <a:spcPts val="0"/>
-              </a:spcAft>
-              <a:buNone/>
-              <a:defRPr sz="1200" b="0">
-                <a:solidFill>
-                  <a:srgbClr val="303437"/>
-                </a:solidFill>
-                <a:latin typeface="Noto Sans"/>
-              </a:defRPr>
-            </a:pPr>
-            <a:r>
-              <a:rPr sz="1200" b="0" lang="ja-JP" altLang="en-US">
+              <a:t>[1] CLUE team (n.d.). CLUE: AFQMC. GitHub.</a:t>
+            </a:r>
+            <a:r>
+              <a:rPr sz="810" b="0" lang="ja-JP" altLang="en-US">
                 <a:solidFill>
                   <a:srgbClr val="626669"/>
                 </a:solidFill>
@@ -11421,625 +11459,8 @@
                 <a:ea typeface="Noto Sans CJK JP"/>
                 <a:cs typeface="Noto Sans"/>
               </a:rPr>
-              <a:t>日本語訳</a:t>
-            </a:r>
-          </a:p>
-        </p:txBody>
-      </p:sp>
-      <p:sp>
-        <p:nvSpPr>
-          <p:cNvPr id="6" name="quote-frame"/>
-          <p:cNvSpPr/>
-          <p:nvPr/>
-        </p:nvSpPr>
-        <p:spPr>
-          <a:xfrm>
-            <a:off x="548640" y="1664208"/>
-            <a:ext cx="3383280" cy="2082800"/>
-          </a:xfrm>
-          <a:prstGeom prst="rect">
-            <a:avLst/>
-          </a:prstGeom>
-          <a:solidFill>
-            <a:srgbClr val="EBEDEB"/>
-          </a:solidFill>
-          <a:ln>
-            <a:noFill/>
-          </a:ln>
-          <a:effectLst/>
-        </p:spPr>
-        <p:style>
-          <a:lnRef idx="1">
-            <a:schemeClr val="accent1"/>
-          </a:lnRef>
-          <a:fillRef idx="3">
-            <a:schemeClr val="accent1"/>
-          </a:fillRef>
-          <a:effectRef idx="0">
-            <a:schemeClr val="accent1"/>
-          </a:effectRef>
-          <a:fontRef idx="minor">
-            <a:schemeClr val="lt1"/>
-          </a:fontRef>
-        </p:style>
-        <p:txBody>
-          <a:bodyPr rtlCol="0" anchor="t" wrap="square" lIns="177800" rIns="177800" tIns="68241" bIns="127000">
-            <a:noAutofit/>
-          </a:bodyPr>
-          <a:lstStyle/>
-          <a:p>
-            <a:pPr algn="l">
-              <a:lnSpc>
-                <a:spcPts val="1904"/>
-              </a:lnSpc>
-              <a:spcBef>
-                <a:spcPts val="0"/>
-              </a:spcBef>
-              <a:spcAft>
-                <a:spcPts val="0"/>
-              </a:spcAft>
-              <a:buNone/>
-              <a:defRPr sz="1600" b="0">
-                <a:solidFill>
-                  <a:srgbClr val="303437"/>
-                </a:solidFill>
-                <a:latin typeface="Noto Sans"/>
-              </a:defRPr>
-            </a:pPr>
-            <a:r>
-              <a:rPr sz="1600" b="0" lang="ja-JP" altLang="en-US">
-                <a:solidFill>
-                  <a:srgbClr val="303437"/>
-                </a:solidFill>
-                <a:latin typeface="Noto Sans"/>
-                <a:ea typeface="Noto Sans CJK JP"/>
-                <a:cs typeface="Noto Sans"/>
-              </a:rPr>
-              <a:t>下面这两个问题是否表达了相同的意思？</a:t>
-            </a:r>
-          </a:p>
-          <a:p>
-            <a:pPr algn="l">
-              <a:lnSpc>
-                <a:spcPts val="1904"/>
-              </a:lnSpc>
-              <a:spcBef>
-                <a:spcPts val="0"/>
-              </a:spcBef>
-              <a:spcAft>
-                <a:spcPts val="0"/>
-              </a:spcAft>
-              <a:buNone/>
-              <a:defRPr sz="1600" b="0">
-                <a:solidFill>
-                  <a:srgbClr val="303437"/>
-                </a:solidFill>
-                <a:latin typeface="Noto Sans"/>
-              </a:defRPr>
-            </a:pPr>
-            <a:r>
-              <a:rPr sz="1600" b="0" lang="ja-JP" altLang="en-US">
-                <a:solidFill>
-                  <a:srgbClr val="303437"/>
-                </a:solidFill>
-                <a:latin typeface="Noto Sans"/>
-                <a:ea typeface="Noto Sans CJK JP"/>
-                <a:cs typeface="Noto Sans"/>
-              </a:rPr>
-              <a:t/>
-            </a:r>
-          </a:p>
-          <a:p>
-            <a:pPr algn="l">
-              <a:lnSpc>
-                <a:spcPts val="1904"/>
-              </a:lnSpc>
-              <a:spcBef>
-                <a:spcPts val="0"/>
-              </a:spcBef>
-              <a:spcAft>
-                <a:spcPts val="0"/>
-              </a:spcAft>
-              <a:buNone/>
-              <a:defRPr sz="1600" b="0">
-                <a:solidFill>
-                  <a:srgbClr val="303437"/>
-                </a:solidFill>
-                <a:latin typeface="Noto Sans"/>
-              </a:defRPr>
-            </a:pPr>
-            <a:r>
-              <a:rPr sz="1600" b="0" lang="ja-JP" altLang="en-US">
-                <a:solidFill>
-                  <a:srgbClr val="303437"/>
-                </a:solidFill>
-                <a:latin typeface="Noto Sans"/>
-                <a:ea typeface="Noto Sans CJK JP"/>
-                <a:cs typeface="Noto Sans"/>
-              </a:rPr>
-              <a:t>1：商家怎么开通花呗支付</a:t>
-            </a:r>
-          </a:p>
-          <a:p>
-            <a:pPr algn="l">
-              <a:lnSpc>
-                <a:spcPts val="1904"/>
-              </a:lnSpc>
-              <a:spcBef>
-                <a:spcPts val="0"/>
-              </a:spcBef>
-              <a:spcAft>
-                <a:spcPts val="0"/>
-              </a:spcAft>
-              <a:buNone/>
-              <a:defRPr sz="1600" b="0">
-                <a:solidFill>
-                  <a:srgbClr val="303437"/>
-                </a:solidFill>
-                <a:latin typeface="Noto Sans"/>
-              </a:defRPr>
-            </a:pPr>
-            <a:r>
-              <a:rPr sz="1600" b="0" lang="ja-JP" altLang="en-US">
-                <a:solidFill>
-                  <a:srgbClr val="303437"/>
-                </a:solidFill>
-                <a:latin typeface="Noto Sans"/>
-                <a:ea typeface="Noto Sans CJK JP"/>
-                <a:cs typeface="Noto Sans"/>
-              </a:rPr>
-              <a:t>2：为什么无法开通花呗</a:t>
-            </a:r>
-          </a:p>
-          <a:p>
-            <a:pPr algn="l">
-              <a:lnSpc>
-                <a:spcPts val="1904"/>
-              </a:lnSpc>
-              <a:spcBef>
-                <a:spcPts val="0"/>
-              </a:spcBef>
-              <a:spcAft>
-                <a:spcPts val="0"/>
-              </a:spcAft>
-              <a:buNone/>
-              <a:defRPr sz="1600" b="0">
-                <a:solidFill>
-                  <a:srgbClr val="303437"/>
-                </a:solidFill>
-                <a:latin typeface="Noto Sans"/>
-              </a:defRPr>
-            </a:pPr>
-            <a:r>
-              <a:rPr sz="1600" b="0" lang="ja-JP" altLang="en-US">
-                <a:solidFill>
-                  <a:srgbClr val="303437"/>
-                </a:solidFill>
-                <a:latin typeface="Noto Sans"/>
-                <a:ea typeface="Noto Sans CJK JP"/>
-                <a:cs typeface="Noto Sans"/>
-              </a:rPr>
-              <a:t>A. 不是</a:t>
-            </a:r>
-          </a:p>
-          <a:p>
-            <a:pPr algn="l">
-              <a:lnSpc>
-                <a:spcPts val="1904"/>
-              </a:lnSpc>
-              <a:spcBef>
-                <a:spcPts val="0"/>
-              </a:spcBef>
-              <a:spcAft>
-                <a:spcPts val="0"/>
-              </a:spcAft>
-              <a:buNone/>
-              <a:defRPr sz="1600" b="0">
-                <a:solidFill>
-                  <a:srgbClr val="303437"/>
-                </a:solidFill>
-                <a:latin typeface="Noto Sans"/>
-              </a:defRPr>
-            </a:pPr>
-            <a:r>
-              <a:rPr sz="1600" b="0" lang="ja-JP" altLang="en-US">
-                <a:solidFill>
-                  <a:srgbClr val="303437"/>
-                </a:solidFill>
-                <a:latin typeface="Noto Sans"/>
-                <a:ea typeface="Noto Sans CJK JP"/>
-                <a:cs typeface="Noto Sans"/>
-              </a:rPr>
-              <a:t>B. 是</a:t>
-            </a:r>
-          </a:p>
-          <a:p>
-            <a:pPr algn="l">
-              <a:lnSpc>
-                <a:spcPts val="1904"/>
-              </a:lnSpc>
-              <a:spcBef>
-                <a:spcPts val="0"/>
-              </a:spcBef>
-              <a:spcAft>
-                <a:spcPts val="0"/>
-              </a:spcAft>
-              <a:buNone/>
-              <a:defRPr sz="1600" b="0">
-                <a:solidFill>
-                  <a:srgbClr val="303437"/>
-                </a:solidFill>
-                <a:latin typeface="Noto Sans"/>
-              </a:defRPr>
-            </a:pPr>
-            <a:r>
-              <a:rPr sz="1600" b="0" lang="ja-JP" altLang="en-US">
-                <a:solidFill>
-                  <a:srgbClr val="303437"/>
-                </a:solidFill>
-                <a:latin typeface="Noto Sans"/>
-                <a:ea typeface="Noto Sans CJK JP"/>
-                <a:cs typeface="Noto Sans"/>
-              </a:rPr>
-              <a:t>答：</a:t>
-            </a:r>
-          </a:p>
-        </p:txBody>
-      </p:sp>
-      <p:sp>
-        <p:nvSpPr>
-          <p:cNvPr id="7" name="quote-frame"/>
-          <p:cNvSpPr/>
-          <p:nvPr/>
-        </p:nvSpPr>
-        <p:spPr>
-          <a:xfrm>
-            <a:off x="4160520" y="1664208"/>
-            <a:ext cx="4389120" cy="2319866"/>
-          </a:xfrm>
-          <a:prstGeom prst="rect">
-            <a:avLst/>
-          </a:prstGeom>
-          <a:solidFill>
-            <a:srgbClr val="EBEDEB"/>
-          </a:solidFill>
-          <a:ln>
-            <a:noFill/>
-          </a:ln>
-          <a:effectLst/>
-        </p:spPr>
-        <p:style>
-          <a:lnRef idx="1">
-            <a:schemeClr val="accent1"/>
-          </a:lnRef>
-          <a:fillRef idx="3">
-            <a:schemeClr val="accent1"/>
-          </a:fillRef>
-          <a:effectRef idx="0">
-            <a:schemeClr val="accent1"/>
-          </a:effectRef>
-          <a:fontRef idx="minor">
-            <a:schemeClr val="lt1"/>
-          </a:fontRef>
-        </p:style>
-        <p:txBody>
-          <a:bodyPr rtlCol="0" anchor="t" wrap="square" lIns="177800" rIns="177800" tIns="68241" bIns="127000">
-            <a:noAutofit/>
-          </a:bodyPr>
-          <a:lstStyle/>
-          <a:p>
-            <a:pPr algn="l">
-              <a:lnSpc>
-                <a:spcPts val="1904"/>
-              </a:lnSpc>
-              <a:spcBef>
-                <a:spcPts val="0"/>
-              </a:spcBef>
-              <a:spcAft>
-                <a:spcPts val="0"/>
-              </a:spcAft>
-              <a:buNone/>
-              <a:defRPr sz="1600" b="0">
-                <a:solidFill>
-                  <a:srgbClr val="303437"/>
-                </a:solidFill>
-                <a:latin typeface="Noto Sans"/>
-              </a:defRPr>
-            </a:pPr>
-            <a:r>
-              <a:rPr sz="1600" b="0" lang="ja-JP" altLang="en-US">
-                <a:solidFill>
-                  <a:srgbClr val="303437"/>
-                </a:solidFill>
-                <a:latin typeface="Noto Sans"/>
-                <a:ea typeface="Noto Sans CJK JP"/>
-                <a:cs typeface="Noto Sans"/>
-              </a:rPr>
-              <a:t>次の二つの質問は、同じ意味を表していますか？</a:t>
-            </a:r>
-          </a:p>
-          <a:p>
-            <a:pPr algn="l">
-              <a:lnSpc>
-                <a:spcPts val="1904"/>
-              </a:lnSpc>
-              <a:spcBef>
-                <a:spcPts val="0"/>
-              </a:spcBef>
-              <a:spcAft>
-                <a:spcPts val="0"/>
-              </a:spcAft>
-              <a:buNone/>
-              <a:defRPr sz="1600" b="0">
-                <a:solidFill>
-                  <a:srgbClr val="303437"/>
-                </a:solidFill>
-                <a:latin typeface="Noto Sans"/>
-              </a:defRPr>
-            </a:pPr>
-            <a:r>
-              <a:rPr sz="1600" b="0" lang="ja-JP" altLang="en-US">
-                <a:solidFill>
-                  <a:srgbClr val="303437"/>
-                </a:solidFill>
-                <a:latin typeface="Noto Sans"/>
-                <a:ea typeface="Noto Sans CJK JP"/>
-                <a:cs typeface="Noto Sans"/>
-              </a:rPr>
-              <a:t/>
-            </a:r>
-          </a:p>
-          <a:p>
-            <a:pPr algn="l">
-              <a:lnSpc>
-                <a:spcPts val="1904"/>
-              </a:lnSpc>
-              <a:spcBef>
-                <a:spcPts val="0"/>
-              </a:spcBef>
-              <a:spcAft>
-                <a:spcPts val="0"/>
-              </a:spcAft>
-              <a:buNone/>
-              <a:defRPr sz="1600" b="0">
-                <a:solidFill>
-                  <a:srgbClr val="303437"/>
-                </a:solidFill>
-                <a:latin typeface="Noto Sans"/>
-              </a:defRPr>
-            </a:pPr>
-            <a:r>
-              <a:rPr sz="1600" b="0" lang="ja-JP" altLang="en-US">
-                <a:solidFill>
-                  <a:srgbClr val="303437"/>
-                </a:solidFill>
-                <a:latin typeface="Noto Sans"/>
-                <a:ea typeface="Noto Sans CJK JP"/>
-                <a:cs typeface="Noto Sans"/>
-              </a:rPr>
-              <a:t>1：店舗側はどうすれば花呗決済を利用できるようになりますか。</a:t>
-            </a:r>
-          </a:p>
-          <a:p>
-            <a:pPr algn="l">
-              <a:lnSpc>
-                <a:spcPts val="1904"/>
-              </a:lnSpc>
-              <a:spcBef>
-                <a:spcPts val="0"/>
-              </a:spcBef>
-              <a:spcAft>
-                <a:spcPts val="0"/>
-              </a:spcAft>
-              <a:buNone/>
-              <a:defRPr sz="1600" b="0">
-                <a:solidFill>
-                  <a:srgbClr val="303437"/>
-                </a:solidFill>
-                <a:latin typeface="Noto Sans"/>
-              </a:defRPr>
-            </a:pPr>
-            <a:r>
-              <a:rPr sz="1600" b="0" lang="ja-JP" altLang="en-US">
-                <a:solidFill>
-                  <a:srgbClr val="303437"/>
-                </a:solidFill>
-                <a:latin typeface="Noto Sans"/>
-                <a:ea typeface="Noto Sans CJK JP"/>
-                <a:cs typeface="Noto Sans"/>
-              </a:rPr>
-              <a:t>2：なぜ花呗を利用開始できないのですか。</a:t>
-            </a:r>
-          </a:p>
-          <a:p>
-            <a:pPr algn="l">
-              <a:lnSpc>
-                <a:spcPts val="1904"/>
-              </a:lnSpc>
-              <a:spcBef>
-                <a:spcPts val="0"/>
-              </a:spcBef>
-              <a:spcAft>
-                <a:spcPts val="0"/>
-              </a:spcAft>
-              <a:buNone/>
-              <a:defRPr sz="1600" b="0">
-                <a:solidFill>
-                  <a:srgbClr val="303437"/>
-                </a:solidFill>
-                <a:latin typeface="Noto Sans"/>
-              </a:defRPr>
-            </a:pPr>
-            <a:r>
-              <a:rPr sz="1600" b="0" lang="ja-JP" altLang="en-US">
-                <a:solidFill>
-                  <a:srgbClr val="303437"/>
-                </a:solidFill>
-                <a:latin typeface="Noto Sans"/>
-                <a:ea typeface="Noto Sans CJK JP"/>
-                <a:cs typeface="Noto Sans"/>
-              </a:rPr>
-              <a:t>A. いいえ</a:t>
-            </a:r>
-          </a:p>
-          <a:p>
-            <a:pPr algn="l">
-              <a:lnSpc>
-                <a:spcPts val="1904"/>
-              </a:lnSpc>
-              <a:spcBef>
-                <a:spcPts val="0"/>
-              </a:spcBef>
-              <a:spcAft>
-                <a:spcPts val="0"/>
-              </a:spcAft>
-              <a:buNone/>
-              <a:defRPr sz="1600" b="0">
-                <a:solidFill>
-                  <a:srgbClr val="303437"/>
-                </a:solidFill>
-                <a:latin typeface="Noto Sans"/>
-              </a:defRPr>
-            </a:pPr>
-            <a:r>
-              <a:rPr sz="1600" b="0" lang="ja-JP" altLang="en-US">
-                <a:solidFill>
-                  <a:srgbClr val="303437"/>
-                </a:solidFill>
-                <a:latin typeface="Noto Sans"/>
-                <a:ea typeface="Noto Sans CJK JP"/>
-                <a:cs typeface="Noto Sans"/>
-              </a:rPr>
-              <a:t>B. はい</a:t>
-            </a:r>
-          </a:p>
-          <a:p>
-            <a:pPr algn="l">
-              <a:lnSpc>
-                <a:spcPts val="1904"/>
-              </a:lnSpc>
-              <a:spcBef>
-                <a:spcPts val="0"/>
-              </a:spcBef>
-              <a:spcAft>
-                <a:spcPts val="0"/>
-              </a:spcAft>
-              <a:buNone/>
-              <a:defRPr sz="1600" b="0">
-                <a:solidFill>
-                  <a:srgbClr val="303437"/>
-                </a:solidFill>
-                <a:latin typeface="Noto Sans"/>
-              </a:defRPr>
-            </a:pPr>
-            <a:r>
-              <a:rPr sz="1600" b="0" lang="ja-JP" altLang="en-US">
-                <a:solidFill>
-                  <a:srgbClr val="303437"/>
-                </a:solidFill>
-                <a:latin typeface="Noto Sans"/>
-                <a:ea typeface="Noto Sans CJK JP"/>
-                <a:cs typeface="Noto Sans"/>
-              </a:rPr>
-              <a:t>答え：</a:t>
-            </a:r>
-          </a:p>
-        </p:txBody>
-      </p:sp>
-      <p:sp>
-        <p:nvSpPr>
-          <p:cNvPr id="8" name="answer"/>
-          <p:cNvSpPr txBox="1"/>
-          <p:nvPr/>
-        </p:nvSpPr>
-        <p:spPr>
-          <a:xfrm>
-            <a:off x="585216" y="4112091"/>
-            <a:ext cx="7955279" cy="365760"/>
-          </a:xfrm>
-          <a:prstGeom prst="rect">
-            <a:avLst/>
-          </a:prstGeom>
-          <a:noFill/>
-        </p:spPr>
-        <p:txBody>
-          <a:bodyPr wrap="square" lIns="0" rIns="0" tIns="0" bIns="0">
-            <a:noAutofit/>
-          </a:bodyPr>
-          <a:lstStyle/>
-          <a:p>
-            <a:pPr algn="l">
-              <a:lnSpc>
-                <a:spcPts val="2457"/>
-              </a:lnSpc>
-              <a:spcBef>
-                <a:spcPts val="0"/>
-              </a:spcBef>
-              <a:spcAft>
-                <a:spcPts val="0"/>
-              </a:spcAft>
-              <a:buNone/>
-              <a:defRPr sz="2100" b="0">
-                <a:solidFill>
-                  <a:srgbClr val="303437"/>
-                </a:solidFill>
-                <a:latin typeface="Noto Sans"/>
-              </a:defRPr>
-            </a:pPr>
-            <a:r>
-              <a:rPr sz="2100" b="1" lang="ja-JP" altLang="en-US">
-                <a:solidFill>
-                  <a:srgbClr val="B13731"/>
-                </a:solidFill>
-                <a:latin typeface="Noto Sans"/>
-                <a:ea typeface="Noto Sans CJK JP"/>
-                <a:cs typeface="Noto Sans"/>
-              </a:rPr>
-              <a:t>正解：A（同じ意味ではない）</a:t>
-            </a:r>
-          </a:p>
-        </p:txBody>
-      </p:sp>
-      <p:sp>
-        <p:nvSpPr>
-          <p:cNvPr id="9" name="sources"/>
-          <p:cNvSpPr txBox="1"/>
-          <p:nvPr/>
-        </p:nvSpPr>
-        <p:spPr>
-          <a:xfrm>
-            <a:off x="502920" y="4700016"/>
-            <a:ext cx="8183879" cy="530352"/>
-          </a:xfrm>
-          <a:prstGeom prst="rect">
-            <a:avLst/>
-          </a:prstGeom>
-          <a:noFill/>
-        </p:spPr>
-        <p:txBody>
-          <a:bodyPr wrap="square" lIns="0" rIns="0" tIns="0" bIns="0">
-            <a:noAutofit/>
-          </a:bodyPr>
-          <a:lstStyle/>
-          <a:p>
-            <a:pPr algn="l">
-              <a:lnSpc>
-                <a:spcPts val="940"/>
-              </a:lnSpc>
-              <a:spcBef>
-                <a:spcPts val="0"/>
-              </a:spcBef>
-              <a:spcAft>
-                <a:spcPts val="140"/>
-              </a:spcAft>
-              <a:buNone/>
-              <a:defRPr sz="810" b="0">
-                <a:solidFill>
-                  <a:srgbClr val="303437"/>
-                </a:solidFill>
-                <a:latin typeface="Noto Sans"/>
-              </a:defRPr>
-            </a:pPr>
+              <a:t>  </a:t>
+            </a:r>
             <a:r>
               <a:rPr sz="810" b="0" lang="ja-JP" altLang="en-US">
                 <a:solidFill>
@@ -12048,34 +11469,9 @@
                 <a:latin typeface="Noto Sans"/>
                 <a:ea typeface="Noto Sans CJK JP"/>
                 <a:cs typeface="Noto Sans"/>
-              </a:rPr>
-              <a:t>[1] Stanford CRFM (n.d.). CLEVAParaphraseIdentificationScenario. HELM.</a:t>
-            </a:r>
-          </a:p>
-          <a:p>
-            <a:pPr>
-              <a:lnSpc>
-                <a:spcPts val="940"/>
-              </a:lnSpc>
-              <a:buNone/>
-              <a:defRPr sz="810" b="0">
-                <a:solidFill>
-                  <a:srgbClr val="303437"/>
-                </a:solidFill>
-                <a:latin typeface="Noto Sans"/>
-              </a:defRPr>
-            </a:pPr>
-            <a:r>
-              <a:rPr sz="810" b="0" lang="ja-JP" altLang="en-US">
-                <a:solidFill>
-                  <a:srgbClr val="626669"/>
-                </a:solidFill>
-                <a:latin typeface="Noto Sans"/>
-                <a:ea typeface="Noto Sans CJK JP"/>
-                <a:cs typeface="Noto Sans"/>
                 <a:hlinkClick r:id="rId2"/>
               </a:rPr>
-              <a:t>https://github.com/stanford-crfm/helm/blob/v0.4.0/src/helm/benchmark/scenarios/cleva_scenario.py</a:t>
+              <a:t>https://github.com/CLUEbenchmark/CLUE</a:t>
             </a:r>
           </a:p>
         </p:txBody>
@@ -12141,127 +11537,14 @@
                 <a:ea typeface="Noto Sans CJK JP"/>
                 <a:cs typeface="Noto Sans"/>
               </a:rPr>
-              <a:t>公式データの入手先と、利用条件</a:t>
-            </a:r>
-          </a:p>
-        </p:txBody>
-      </p:sp>
-      <p:sp>
-        <p:nvSpPr>
-          <p:cNvPr id="3" name="Text Placeholder 2"/>
-          <p:cNvSpPr>
-            <a:spLocks noGrp="1"/>
-          </p:cNvSpPr>
-          <p:nvPr>
-            <p:ph type="body" idx="1"/>
-          </p:nvPr>
-        </p:nvSpPr>
-        <p:spPr>
-          <a:xfrm>
-            <a:off x="594360" y="1463040"/>
-            <a:ext cx="7955279" cy="3044952"/>
-          </a:xfrm>
-        </p:spPr>
-        <p:txBody>
-          <a:bodyPr wrap="square" tIns="91440" bIns="91440">
-            <a:noAutofit/>
-          </a:bodyPr>
-          <a:lstStyle/>
-          <a:p>
-            <a:pPr marL="457200" indent="-355600">
-              <a:lnSpc>
-                <a:spcPts val="2379"/>
-              </a:lnSpc>
-              <a:spcAft>
-                <a:spcPts val="700"/>
-              </a:spcAft>
-              <a:buSzPct val="66500"/>
-              <a:buFont typeface="Noto Sans CJK JP"/>
-              <a:buChar char="●"/>
-              <a:defRPr sz="2000" b="0">
-                <a:solidFill>
-                  <a:srgbClr val="303437"/>
-                </a:solidFill>
-                <a:latin typeface="Noto Sans"/>
-              </a:defRPr>
-            </a:pPr>
-            <a:r>
-              <a:rPr sz="2000" b="0" lang="ja-JP" altLang="en-US">
-                <a:solidFill>
-                  <a:srgbClr val="303437"/>
-                </a:solidFill>
-                <a:latin typeface="Noto Sans"/>
-                <a:ea typeface="Noto Sans CJK JP"/>
-                <a:cs typeface="Noto Sans"/>
-              </a:rPr>
-              <a:t>CLUEの公式リポジトリが、AFQMCの公開ZIPへのリンクを示す。学習用・開発用・テスト用のJSONファイルを入手できる。</a:t>
-            </a:r>
-          </a:p>
-          <a:p>
-            <a:pPr marL="457200" indent="-355600">
-              <a:lnSpc>
-                <a:spcPts val="2379"/>
-              </a:lnSpc>
-              <a:spcAft>
-                <a:spcPts val="700"/>
-              </a:spcAft>
-              <a:buSzPct val="66500"/>
-              <a:buFont typeface="Noto Sans CJK JP"/>
-              <a:buChar char="●"/>
-              <a:defRPr sz="2000" b="0">
-                <a:solidFill>
-                  <a:srgbClr val="303437"/>
-                </a:solidFill>
-                <a:latin typeface="Noto Sans"/>
-              </a:defRPr>
-            </a:pPr>
-            <a:r>
-              <a:rPr sz="2000" b="0" lang="ja-JP" altLang="en-US">
-                <a:solidFill>
-                  <a:srgbClr val="303437"/>
-                </a:solidFill>
-                <a:latin typeface="Noto Sans"/>
-                <a:ea typeface="Noto Sans CJK JP"/>
-                <a:cs typeface="Noto Sans"/>
-              </a:rPr>
-              <a:t>付属モデルコードのApacheライセンスとは別に、AFQMCデータ全体の利用許諾は明示されていない。再利用の条件は配布元への確認が必要。</a:t>
-            </a:r>
-          </a:p>
-          <a:p>
-            <a:pPr marL="457200" indent="-355600">
-              <a:lnSpc>
-                <a:spcPts val="2379"/>
-              </a:lnSpc>
-              <a:spcAft>
-                <a:spcPts val="0"/>
-              </a:spcAft>
-              <a:buSzPct val="66500"/>
-              <a:buFont typeface="Noto Sans CJK JP"/>
-              <a:buChar char="●"/>
-              <a:defRPr sz="2000" b="0">
-                <a:solidFill>
-                  <a:srgbClr val="303437"/>
-                </a:solidFill>
-                <a:latin typeface="Noto Sans"/>
-              </a:defRPr>
-            </a:pPr>
-            <a:r>
-              <a:rPr sz="2000" b="0" lang="ja-JP" altLang="en-US">
-                <a:solidFill>
-                  <a:srgbClr val="303437"/>
-                </a:solidFill>
-                <a:latin typeface="Noto Sans"/>
-                <a:ea typeface="Noto Sans CJK JP"/>
-                <a:cs typeface="Noto Sans"/>
-              </a:rPr>
-              <a:t>CLEVAでは金融質問の意味照合に利用している。全問題や抽出範囲の詳細は、公開説明からは確認できない。</a:t>
-            </a:r>
-          </a:p>
-        </p:txBody>
-      </p:sp>
-      <p:sp>
-        <p:nvSpPr>
-          <p:cNvPr id="4" name="Title 3"/>
+              <a:t>JSONから、二つの質問とラベルを読む</a:t>
+            </a:r>
+          </a:p>
+        </p:txBody>
+      </p:sp>
+      <p:sp>
+        <p:nvSpPr>
+          <p:cNvPr id="3" name="Title 2"/>
           <p:cNvSpPr>
             <a:spLocks noGrp="1"/>
           </p:cNvSpPr>
@@ -12302,21 +11585,248 @@
                 <a:ea typeface="Noto Sans CJK JP"/>
                 <a:cs typeface="Noto Sans"/>
               </a:rPr>
-              <a:t>4. CLEVAでの利用と入手方法</a:t>
-            </a:r>
-          </a:p>
-        </p:txBody>
-      </p:sp>
-      <p:sp>
-        <p:nvSpPr>
-          <p:cNvPr id="5" name="sources"/>
+              <a:t>4. 入手方法と利用条件</a:t>
+            </a:r>
+          </a:p>
+        </p:txBody>
+      </p:sp>
+      <p:sp>
+        <p:nvSpPr>
+          <p:cNvPr id="4" name="code-frame"/>
+          <p:cNvSpPr/>
+          <p:nvPr/>
+        </p:nvSpPr>
+        <p:spPr>
+          <a:xfrm>
+            <a:off x="548640" y="1508760"/>
+            <a:ext cx="8046720" cy="1710266"/>
+          </a:xfrm>
+          <a:prstGeom prst="rect">
+            <a:avLst/>
+          </a:prstGeom>
+          <a:solidFill>
+            <a:srgbClr val="EBEDEB"/>
+          </a:solidFill>
+          <a:ln>
+            <a:noFill/>
+          </a:ln>
+          <a:effectLst/>
+        </p:spPr>
+        <p:style>
+          <a:lnRef idx="1">
+            <a:schemeClr val="accent1"/>
+          </a:lnRef>
+          <a:fillRef idx="3">
+            <a:schemeClr val="accent1"/>
+          </a:fillRef>
+          <a:effectRef idx="0">
+            <a:schemeClr val="accent1"/>
+          </a:effectRef>
+          <a:fontRef idx="minor">
+            <a:schemeClr val="lt1"/>
+          </a:fontRef>
+        </p:style>
+        <p:txBody>
+          <a:bodyPr rtlCol="0" anchor="t" wrap="none" lIns="152400" rIns="152400" tIns="60536" bIns="127000"/>
+          <a:lstStyle/>
+          <a:p>
+            <a:pPr algn="l">
+              <a:lnSpc>
+                <a:spcPts val="2000"/>
+              </a:lnSpc>
+              <a:spcBef>
+                <a:spcPts val="0"/>
+              </a:spcBef>
+              <a:spcAft>
+                <a:spcPts val="0"/>
+              </a:spcAft>
+              <a:buNone/>
+              <a:defRPr sz="1600" b="0">
+                <a:solidFill>
+                  <a:srgbClr val="303437"/>
+                </a:solidFill>
+                <a:latin typeface="Noto Sans"/>
+              </a:defRPr>
+            </a:pPr>
+            <a:r>
+              <a:rPr sz="1600" b="0" lang="ja-JP" altLang="en-US">
+                <a:solidFill>
+                  <a:srgbClr val="303437"/>
+                </a:solidFill>
+                <a:latin typeface="Liberation Mono"/>
+                <a:ea typeface="Noto Sans CJK JP"/>
+                <a:cs typeface="Liberation Mono"/>
+              </a:rPr>
+              <a:t>import json</a:t>
+            </a:r>
+          </a:p>
+          <a:p>
+            <a:pPr algn="l">
+              <a:lnSpc>
+                <a:spcPts val="2000"/>
+              </a:lnSpc>
+              <a:spcBef>
+                <a:spcPts val="0"/>
+              </a:spcBef>
+              <a:spcAft>
+                <a:spcPts val="0"/>
+              </a:spcAft>
+              <a:buNone/>
+              <a:defRPr sz="1600" b="0">
+                <a:solidFill>
+                  <a:srgbClr val="303437"/>
+                </a:solidFill>
+                <a:latin typeface="Noto Sans"/>
+              </a:defRPr>
+            </a:pPr>
+            <a:r>
+              <a:rPr sz="1600" b="0" lang="ja-JP" altLang="en-US">
+                <a:solidFill>
+                  <a:srgbClr val="303437"/>
+                </a:solidFill>
+                <a:latin typeface="Liberation Mono"/>
+                <a:ea typeface="Noto Sans CJK JP"/>
+                <a:cs typeface="Liberation Mono"/>
+              </a:rPr>
+              <a:t>with open('train.json', encoding='utf-8') as f:</a:t>
+            </a:r>
+          </a:p>
+          <a:p>
+            <a:pPr algn="l">
+              <a:lnSpc>
+                <a:spcPts val="2000"/>
+              </a:lnSpc>
+              <a:spcBef>
+                <a:spcPts val="0"/>
+              </a:spcBef>
+              <a:spcAft>
+                <a:spcPts val="0"/>
+              </a:spcAft>
+              <a:buNone/>
+              <a:defRPr sz="1600" b="0">
+                <a:solidFill>
+                  <a:srgbClr val="303437"/>
+                </a:solidFill>
+                <a:latin typeface="Noto Sans"/>
+              </a:defRPr>
+            </a:pPr>
+            <a:r>
+              <a:rPr sz="1600" b="0" lang="ja-JP" altLang="en-US">
+                <a:solidFill>
+                  <a:srgbClr val="303437"/>
+                </a:solidFill>
+                <a:latin typeface="Liberation Mono"/>
+                <a:ea typeface="Noto Sans CJK JP"/>
+                <a:cs typeface="Liberation Mono"/>
+              </a:rPr>
+              <a:t>    pair = json.loads(next(f))</a:t>
+            </a:r>
+          </a:p>
+          <a:p>
+            <a:pPr algn="l">
+              <a:lnSpc>
+                <a:spcPts val="2000"/>
+              </a:lnSpc>
+              <a:spcBef>
+                <a:spcPts val="0"/>
+              </a:spcBef>
+              <a:spcAft>
+                <a:spcPts val="0"/>
+              </a:spcAft>
+              <a:buNone/>
+              <a:defRPr sz="1600" b="0">
+                <a:solidFill>
+                  <a:srgbClr val="303437"/>
+                </a:solidFill>
+                <a:latin typeface="Noto Sans"/>
+              </a:defRPr>
+            </a:pPr>
+            <a:r>
+              <a:rPr sz="1600" b="0" lang="ja-JP" altLang="en-US">
+                <a:solidFill>
+                  <a:srgbClr val="303437"/>
+                </a:solidFill>
+                <a:latin typeface="Liberation Mono"/>
+                <a:ea typeface="Noto Sans CJK JP"/>
+                <a:cs typeface="Liberation Mono"/>
+              </a:rPr>
+              <a:t>print(pair['sentence1'])</a:t>
+            </a:r>
+          </a:p>
+          <a:p>
+            <a:pPr algn="l">
+              <a:lnSpc>
+                <a:spcPts val="2000"/>
+              </a:lnSpc>
+              <a:spcBef>
+                <a:spcPts val="0"/>
+              </a:spcBef>
+              <a:spcAft>
+                <a:spcPts val="0"/>
+              </a:spcAft>
+              <a:buNone/>
+              <a:defRPr sz="1600" b="0">
+                <a:solidFill>
+                  <a:srgbClr val="303437"/>
+                </a:solidFill>
+                <a:latin typeface="Noto Sans"/>
+              </a:defRPr>
+            </a:pPr>
+            <a:r>
+              <a:rPr sz="1600" b="0" lang="ja-JP" altLang="en-US">
+                <a:solidFill>
+                  <a:srgbClr val="303437"/>
+                </a:solidFill>
+                <a:latin typeface="Liberation Mono"/>
+                <a:ea typeface="Noto Sans CJK JP"/>
+                <a:cs typeface="Liberation Mono"/>
+              </a:rPr>
+              <a:t>print(pair['sentence2'])</a:t>
+            </a:r>
+          </a:p>
+          <a:p>
+            <a:pPr algn="l">
+              <a:lnSpc>
+                <a:spcPts val="2000"/>
+              </a:lnSpc>
+              <a:spcBef>
+                <a:spcPts val="0"/>
+              </a:spcBef>
+              <a:spcAft>
+                <a:spcPts val="0"/>
+              </a:spcAft>
+              <a:buNone/>
+              <a:defRPr sz="1600" b="0">
+                <a:solidFill>
+                  <a:srgbClr val="303437"/>
+                </a:solidFill>
+                <a:latin typeface="Noto Sans"/>
+              </a:defRPr>
+            </a:pPr>
+            <a:r>
+              <a:rPr sz="1600" b="0" lang="ja-JP" altLang="en-US">
+                <a:solidFill>
+                  <a:srgbClr val="303437"/>
+                </a:solidFill>
+                <a:latin typeface="Liberation Mono"/>
+                <a:ea typeface="Noto Sans CJK JP"/>
+                <a:cs typeface="Liberation Mono"/>
+              </a:rPr>
+              <a:t>print(pair['label'])</a:t>
+            </a:r>
+          </a:p>
+        </p:txBody>
+      </p:sp>
+      <p:sp>
+        <p:nvSpPr>
+          <p:cNvPr id="5" name="TextBox 4"/>
           <p:cNvSpPr txBox="1"/>
           <p:nvPr/>
         </p:nvSpPr>
         <p:spPr>
           <a:xfrm>
-            <a:off x="502920" y="4700016"/>
-            <a:ext cx="8183879" cy="530352"/>
+            <a:off x="594360" y="3420195"/>
+            <a:ext cx="7955279" cy="777240"/>
           </a:xfrm>
           <a:prstGeom prst="rect">
             <a:avLst/>
@@ -12331,6 +11841,60 @@
           <a:p>
             <a:pPr algn="l">
               <a:lnSpc>
+                <a:spcPts val="2222"/>
+              </a:lnSpc>
+              <a:spcBef>
+                <a:spcPts val="0"/>
+              </a:spcBef>
+              <a:spcAft>
+                <a:spcPts val="0"/>
+              </a:spcAft>
+              <a:buNone/>
+              <a:defRPr sz="1900" b="0">
+                <a:solidFill>
+                  <a:srgbClr val="303437"/>
+                </a:solidFill>
+                <a:latin typeface="Noto Sans"/>
+              </a:defRPr>
+            </a:pPr>
+            <a:r>
+              <a:rPr sz="1900" b="0" lang="ja-JP" altLang="en-US">
+                <a:solidFill>
+                  <a:srgbClr val="303437"/>
+                </a:solidFill>
+                <a:latin typeface="Noto Sans"/>
+                <a:ea typeface="Noto Sans CJK JP"/>
+                <a:cs typeface="Noto Sans"/>
+              </a:rPr>
+              <a:t>1行が1組の質問。sentence1・sentence2が本文、labelが0または1。</a:t>
+            </a:r>
+          </a:p>
+        </p:txBody>
+      </p:sp>
+      <p:sp>
+        <p:nvSpPr>
+          <p:cNvPr id="6" name="sources"/>
+          <p:cNvSpPr txBox="1"/>
+          <p:nvPr/>
+        </p:nvSpPr>
+        <p:spPr>
+          <a:xfrm>
+            <a:off x="502920" y="4700016"/>
+            <a:ext cx="8183879" cy="530352"/>
+          </a:xfrm>
+          <a:prstGeom prst="rect">
+            <a:avLst/>
+          </a:prstGeom>
+          <a:noFill/>
+        </p:spPr>
+        <p:txBody>
+          <a:bodyPr wrap="square" lIns="0" rIns="0" tIns="0" bIns="0">
+            <a:noAutofit/>
+          </a:bodyPr>
+          <a:lstStyle/>
+          <a:p>
+            <a:pPr algn="l">
+              <a:lnSpc>
                 <a:spcPts val="940"/>
               </a:lnSpc>
               <a:spcBef>
@@ -12356,7 +11920,7 @@
                 <a:ea typeface="Noto Sans CJK JP"/>
                 <a:cs typeface="Noto Sans"/>
               </a:rPr>
-              <a:t>[1] CLUE team (n.d.). CLUE: AFQMC. GitHub.</a:t>
+              <a:t>[1] Ant Financial / CLUE team (n.d.). AFQMC public data archive.</a:t>
             </a:r>
             <a:r>
               <a:rPr sz="810" b="0" lang="ja-JP" altLang="en-US">
@@ -12379,58 +11943,7 @@
                 <a:cs typeface="Noto Sans"/>
                 <a:hlinkClick r:id="rId2"/>
               </a:rPr>
-              <a:t>https://github.com/CLUEbenchmark/CLUE</a:t>
-            </a:r>
-          </a:p>
-          <a:p>
-            <a:pPr>
-              <a:lnSpc>
-                <a:spcPts val="940"/>
-              </a:lnSpc>
-              <a:spcAft>
-                <a:spcPts val="140"/>
-              </a:spcAft>
-              <a:buNone/>
-              <a:defRPr sz="810" b="0">
-                <a:solidFill>
-                  <a:srgbClr val="303437"/>
-                </a:solidFill>
-                <a:latin typeface="Noto Sans"/>
-              </a:defRPr>
-            </a:pPr>
-            <a:r>
-              <a:rPr sz="810" b="0" lang="ja-JP" altLang="en-US">
-                <a:solidFill>
-                  <a:srgbClr val="626669"/>
-                </a:solidFill>
-                <a:latin typeface="Noto Sans"/>
-                <a:ea typeface="Noto Sans CJK JP"/>
-                <a:cs typeface="Noto Sans"/>
-              </a:rPr>
-              <a:t>[2] Li et al. (2023). CLEVA: Chinese Language Models EVAluation Platform. EMNLP System Demonstrations.</a:t>
-            </a:r>
-            <a:r>
-              <a:rPr sz="810" b="0" lang="ja-JP" altLang="en-US">
-                <a:solidFill>
-                  <a:srgbClr val="626669"/>
-                </a:solidFill>
-                <a:latin typeface="Noto Sans"/>
-                <a:ea typeface="Noto Sans CJK JP"/>
-                <a:cs typeface="Noto Sans"/>
-              </a:rPr>
-              <a:t>  </a:t>
-            </a:r>
-            <a:r>
-              <a:rPr sz="810" b="0" lang="ja-JP" altLang="en-US">
-                <a:solidFill>
-                  <a:srgbClr val="626669"/>
-                </a:solidFill>
-                <a:latin typeface="Noto Sans"/>
-                <a:ea typeface="Noto Sans CJK JP"/>
-                <a:cs typeface="Noto Sans"/>
-                <a:hlinkClick r:id="rId3"/>
-              </a:rPr>
-              <a:t>https://aclanthology.org/2023.emnlp-demo.17/</a:t>
+              <a:t>https://storage.googleapis.com/cluebenchmark/tasks/afqmc_public.zip</a:t>
             </a:r>
           </a:p>
         </p:txBody>
@@ -12496,14 +12009,127 @@
                 <a:ea typeface="Noto Sans CJK JP"/>
                 <a:cs typeface="Noto Sans"/>
               </a:rPr>
-              <a:t>JSONから、二つの質問とラベルを読む</a:t>
-            </a:r>
-          </a:p>
-        </p:txBody>
-      </p:sp>
-      <p:sp>
-        <p:nvSpPr>
-          <p:cNvPr id="3" name="Title 2"/>
+              <a:t>尋ねている対象・操作・条件から、意味を比べる</a:t>
+            </a:r>
+          </a:p>
+        </p:txBody>
+      </p:sp>
+      <p:sp>
+        <p:nvSpPr>
+          <p:cNvPr id="3" name="Text Placeholder 2"/>
+          <p:cNvSpPr>
+            <a:spLocks noGrp="1"/>
+          </p:cNvSpPr>
+          <p:nvPr>
+            <p:ph type="body" idx="1"/>
+          </p:nvPr>
+        </p:nvSpPr>
+        <p:spPr>
+          <a:xfrm>
+            <a:off x="594360" y="1463040"/>
+            <a:ext cx="7955279" cy="3044952"/>
+          </a:xfrm>
+        </p:spPr>
+        <p:txBody>
+          <a:bodyPr wrap="square" tIns="91440" bIns="91440">
+            <a:noAutofit/>
+          </a:bodyPr>
+          <a:lstStyle/>
+          <a:p>
+            <a:pPr marL="457200" indent="-355600">
+              <a:lnSpc>
+                <a:spcPts val="2499"/>
+              </a:lnSpc>
+              <a:spcAft>
+                <a:spcPts val="700"/>
+              </a:spcAft>
+              <a:buSzPct val="63333"/>
+              <a:buFont typeface="Noto Sans CJK JP"/>
+              <a:buChar char="●"/>
+              <a:defRPr sz="2100" b="0">
+                <a:solidFill>
+                  <a:srgbClr val="303437"/>
+                </a:solidFill>
+                <a:latin typeface="Noto Sans"/>
+              </a:defRPr>
+            </a:pPr>
+            <a:r>
+              <a:rPr sz="2100" b="0" lang="ja-JP" altLang="en-US">
+                <a:solidFill>
+                  <a:srgbClr val="303437"/>
+                </a:solidFill>
+                <a:latin typeface="Noto Sans"/>
+                <a:ea typeface="Noto Sans CJK JP"/>
+                <a:cs typeface="Noto Sans"/>
+              </a:rPr>
+              <a:t>AFQMCは、金融サービスに関する二つの質問が、似た意味かどうかを判定するデータセット。</a:t>
+            </a:r>
+          </a:p>
+          <a:p>
+            <a:pPr marL="457200" indent="-355600">
+              <a:lnSpc>
+                <a:spcPts val="2499"/>
+              </a:lnSpc>
+              <a:spcAft>
+                <a:spcPts val="700"/>
+              </a:spcAft>
+              <a:buSzPct val="63333"/>
+              <a:buFont typeface="Noto Sans CJK JP"/>
+              <a:buChar char="●"/>
+              <a:defRPr sz="2100" b="0">
+                <a:solidFill>
+                  <a:srgbClr val="303437"/>
+                </a:solidFill>
+                <a:latin typeface="Noto Sans"/>
+              </a:defRPr>
+            </a:pPr>
+            <a:r>
+              <a:rPr sz="2100" b="0" lang="ja-JP" altLang="en-US">
+                <a:solidFill>
+                  <a:srgbClr val="303437"/>
+                </a:solidFill>
+                <a:latin typeface="Noto Sans"/>
+                <a:ea typeface="Noto Sans CJK JP"/>
+                <a:cs typeface="Noto Sans"/>
+              </a:rPr>
+              <a:t>同じサービス名を使う質問でも、何をしたいのか、何を知りたいのかは異なる。対象・操作・条件に注目すると、語の重なりだけでは捉えにくい違いが見えてくる。</a:t>
+            </a:r>
+          </a:p>
+          <a:p>
+            <a:pPr marL="457200" indent="-355600">
+              <a:lnSpc>
+                <a:spcPts val="2499"/>
+              </a:lnSpc>
+              <a:spcAft>
+                <a:spcPts val="0"/>
+              </a:spcAft>
+              <a:buSzPct val="63333"/>
+              <a:buFont typeface="Noto Sans CJK JP"/>
+              <a:buChar char="●"/>
+              <a:defRPr sz="2100" b="0">
+                <a:solidFill>
+                  <a:srgbClr val="303437"/>
+                </a:solidFill>
+                <a:latin typeface="Noto Sans"/>
+              </a:defRPr>
+            </a:pPr>
+            <a:r>
+              <a:rPr sz="2100" b="0" lang="ja-JP" altLang="en-US">
+                <a:solidFill>
+                  <a:srgbClr val="303437"/>
+                </a:solidFill>
+                <a:latin typeface="Noto Sans"/>
+                <a:ea typeface="Noto Sans CJK JP"/>
+                <a:cs typeface="Noto Sans"/>
+              </a:rPr>
+              <a:t>学習・開発の正解ラベルを使って、モデルを学習・評価できる。</a:t>
+            </a:r>
+          </a:p>
+        </p:txBody>
+      </p:sp>
+      <p:sp>
+        <p:nvSpPr>
+          <p:cNvPr id="4" name="Title 3"/>
           <p:cNvSpPr>
             <a:spLocks noGrp="1"/>
           </p:cNvSpPr>
@@ -12544,248 +12170,21 @@
                 <a:ea typeface="Noto Sans CJK JP"/>
                 <a:cs typeface="Noto Sans"/>
               </a:rPr>
-              <a:t>4. CLEVAでの利用と入手方法</a:t>
-            </a:r>
-          </a:p>
-        </p:txBody>
-      </p:sp>
-      <p:sp>
-        <p:nvSpPr>
-          <p:cNvPr id="4" name="code-frame"/>
-          <p:cNvSpPr/>
-          <p:nvPr/>
-        </p:nvSpPr>
-        <p:spPr>
-          <a:xfrm>
-            <a:off x="548640" y="1508760"/>
-            <a:ext cx="8046720" cy="1710266"/>
-          </a:xfrm>
-          <a:prstGeom prst="rect">
-            <a:avLst/>
-          </a:prstGeom>
-          <a:solidFill>
-            <a:srgbClr val="EBEDEB"/>
-          </a:solidFill>
-          <a:ln>
-            <a:noFill/>
-          </a:ln>
-          <a:effectLst/>
-        </p:spPr>
-        <p:style>
-          <a:lnRef idx="1">
-            <a:schemeClr val="accent1"/>
-          </a:lnRef>
-          <a:fillRef idx="3">
-            <a:schemeClr val="accent1"/>
-          </a:fillRef>
-          <a:effectRef idx="0">
-            <a:schemeClr val="accent1"/>
-          </a:effectRef>
-          <a:fontRef idx="minor">
-            <a:schemeClr val="lt1"/>
-          </a:fontRef>
-        </p:style>
-        <p:txBody>
-          <a:bodyPr rtlCol="0" anchor="t" wrap="none" lIns="152400" rIns="152400" tIns="60536" bIns="127000"/>
-          <a:lstStyle/>
-          <a:p>
-            <a:pPr algn="l">
-              <a:lnSpc>
-                <a:spcPts val="2000"/>
-              </a:lnSpc>
-              <a:spcBef>
-                <a:spcPts val="0"/>
-              </a:spcBef>
-              <a:spcAft>
-                <a:spcPts val="0"/>
-              </a:spcAft>
-              <a:buNone/>
-              <a:defRPr sz="1600" b="0">
-                <a:solidFill>
-                  <a:srgbClr val="303437"/>
-                </a:solidFill>
-                <a:latin typeface="Noto Sans"/>
-              </a:defRPr>
-            </a:pPr>
-            <a:r>
-              <a:rPr sz="1600" b="0" lang="ja-JP" altLang="en-US">
-                <a:solidFill>
-                  <a:srgbClr val="303437"/>
-                </a:solidFill>
-                <a:latin typeface="Liberation Mono"/>
-                <a:ea typeface="Noto Sans CJK JP"/>
-                <a:cs typeface="Liberation Mono"/>
-              </a:rPr>
-              <a:t>import json</a:t>
-            </a:r>
-          </a:p>
-          <a:p>
-            <a:pPr algn="l">
-              <a:lnSpc>
-                <a:spcPts val="2000"/>
-              </a:lnSpc>
-              <a:spcBef>
-                <a:spcPts val="0"/>
-              </a:spcBef>
-              <a:spcAft>
-                <a:spcPts val="0"/>
-              </a:spcAft>
-              <a:buNone/>
-              <a:defRPr sz="1600" b="0">
-                <a:solidFill>
-                  <a:srgbClr val="303437"/>
-                </a:solidFill>
-                <a:latin typeface="Noto Sans"/>
-              </a:defRPr>
-            </a:pPr>
-            <a:r>
-              <a:rPr sz="1600" b="0" lang="ja-JP" altLang="en-US">
-                <a:solidFill>
-                  <a:srgbClr val="303437"/>
-                </a:solidFill>
-                <a:latin typeface="Liberation Mono"/>
-                <a:ea typeface="Noto Sans CJK JP"/>
-                <a:cs typeface="Liberation Mono"/>
-              </a:rPr>
-              <a:t>with open('train.json', encoding='utf-8') as f:</a:t>
-            </a:r>
-          </a:p>
-          <a:p>
-            <a:pPr algn="l">
-              <a:lnSpc>
-                <a:spcPts val="2000"/>
-              </a:lnSpc>
-              <a:spcBef>
-                <a:spcPts val="0"/>
-              </a:spcBef>
-              <a:spcAft>
-                <a:spcPts val="0"/>
-              </a:spcAft>
-              <a:buNone/>
-              <a:defRPr sz="1600" b="0">
-                <a:solidFill>
-                  <a:srgbClr val="303437"/>
-                </a:solidFill>
-                <a:latin typeface="Noto Sans"/>
-              </a:defRPr>
-            </a:pPr>
-            <a:r>
-              <a:rPr sz="1600" b="0" lang="ja-JP" altLang="en-US">
-                <a:solidFill>
-                  <a:srgbClr val="303437"/>
-                </a:solidFill>
-                <a:latin typeface="Liberation Mono"/>
-                <a:ea typeface="Noto Sans CJK JP"/>
-                <a:cs typeface="Liberation Mono"/>
-              </a:rPr>
-              <a:t>    pair = json.loads(next(f))</a:t>
-            </a:r>
-          </a:p>
-          <a:p>
-            <a:pPr algn="l">
-              <a:lnSpc>
-                <a:spcPts val="2000"/>
-              </a:lnSpc>
-              <a:spcBef>
-                <a:spcPts val="0"/>
-              </a:spcBef>
-              <a:spcAft>
-                <a:spcPts val="0"/>
-              </a:spcAft>
-              <a:buNone/>
-              <a:defRPr sz="1600" b="0">
-                <a:solidFill>
-                  <a:srgbClr val="303437"/>
-                </a:solidFill>
-                <a:latin typeface="Noto Sans"/>
-              </a:defRPr>
-            </a:pPr>
-            <a:r>
-              <a:rPr sz="1600" b="0" lang="ja-JP" altLang="en-US">
-                <a:solidFill>
-                  <a:srgbClr val="303437"/>
-                </a:solidFill>
-                <a:latin typeface="Liberation Mono"/>
-                <a:ea typeface="Noto Sans CJK JP"/>
-                <a:cs typeface="Liberation Mono"/>
-              </a:rPr>
-              <a:t>print(pair['sentence1'])</a:t>
-            </a:r>
-          </a:p>
-          <a:p>
-            <a:pPr algn="l">
-              <a:lnSpc>
-                <a:spcPts val="2000"/>
-              </a:lnSpc>
-              <a:spcBef>
-                <a:spcPts val="0"/>
-              </a:spcBef>
-              <a:spcAft>
-                <a:spcPts val="0"/>
-              </a:spcAft>
-              <a:buNone/>
-              <a:defRPr sz="1600" b="0">
-                <a:solidFill>
-                  <a:srgbClr val="303437"/>
-                </a:solidFill>
-                <a:latin typeface="Noto Sans"/>
-              </a:defRPr>
-            </a:pPr>
-            <a:r>
-              <a:rPr sz="1600" b="0" lang="ja-JP" altLang="en-US">
-                <a:solidFill>
-                  <a:srgbClr val="303437"/>
-                </a:solidFill>
-                <a:latin typeface="Liberation Mono"/>
-                <a:ea typeface="Noto Sans CJK JP"/>
-                <a:cs typeface="Liberation Mono"/>
-              </a:rPr>
-              <a:t>print(pair['sentence2'])</a:t>
-            </a:r>
-          </a:p>
-          <a:p>
-            <a:pPr algn="l">
-              <a:lnSpc>
-                <a:spcPts val="2000"/>
-              </a:lnSpc>
-              <a:spcBef>
-                <a:spcPts val="0"/>
-              </a:spcBef>
-              <a:spcAft>
-                <a:spcPts val="0"/>
-              </a:spcAft>
-              <a:buNone/>
-              <a:defRPr sz="1600" b="0">
-                <a:solidFill>
-                  <a:srgbClr val="303437"/>
-                </a:solidFill>
-                <a:latin typeface="Noto Sans"/>
-              </a:defRPr>
-            </a:pPr>
-            <a:r>
-              <a:rPr sz="1600" b="0" lang="ja-JP" altLang="en-US">
-                <a:solidFill>
-                  <a:srgbClr val="303437"/>
-                </a:solidFill>
-                <a:latin typeface="Liberation Mono"/>
-                <a:ea typeface="Noto Sans CJK JP"/>
-                <a:cs typeface="Liberation Mono"/>
-              </a:rPr>
-              <a:t>print(pair['label'])</a:t>
-            </a:r>
-          </a:p>
-        </p:txBody>
-      </p:sp>
-      <p:sp>
-        <p:nvSpPr>
-          <p:cNvPr id="5" name="TextBox 4"/>
+              <a:t>4. 入手方法と利用条件</a:t>
+            </a:r>
+          </a:p>
+        </p:txBody>
+      </p:sp>
+      <p:sp>
+        <p:nvSpPr>
+          <p:cNvPr id="5" name="sources"/>
           <p:cNvSpPr txBox="1"/>
           <p:nvPr/>
         </p:nvSpPr>
         <p:spPr>
           <a:xfrm>
-            <a:off x="594360" y="3420195"/>
-            <a:ext cx="7955279" cy="777240"/>
+            <a:off x="502920" y="4700016"/>
+            <a:ext cx="8183879" cy="530352"/>
           </a:xfrm>
           <a:prstGeom prst="rect">
             <a:avLst/>
@@ -12800,60 +12199,6 @@
           <a:p>
             <a:pPr algn="l">
               <a:lnSpc>
-                <a:spcPts val="2222"/>
-              </a:lnSpc>
-              <a:spcBef>
-                <a:spcPts val="0"/>
-              </a:spcBef>
-              <a:spcAft>
-                <a:spcPts val="0"/>
-              </a:spcAft>
-              <a:buNone/>
-              <a:defRPr sz="1900" b="0">
-                <a:solidFill>
-                  <a:srgbClr val="303437"/>
-                </a:solidFill>
-                <a:latin typeface="Noto Sans"/>
-              </a:defRPr>
-            </a:pPr>
-            <a:r>
-              <a:rPr sz="1900" b="0" lang="ja-JP" altLang="en-US">
-                <a:solidFill>
-                  <a:srgbClr val="303437"/>
-                </a:solidFill>
-                <a:latin typeface="Noto Sans"/>
-                <a:ea typeface="Noto Sans CJK JP"/>
-                <a:cs typeface="Noto Sans"/>
-              </a:rPr>
-              <a:t>1行が1組の質問。sentence1・sentence2が本文、labelが0または1。</a:t>
-            </a:r>
-          </a:p>
-        </p:txBody>
-      </p:sp>
-      <p:sp>
-        <p:nvSpPr>
-          <p:cNvPr id="6" name="sources"/>
-          <p:cNvSpPr txBox="1"/>
-          <p:nvPr/>
-        </p:nvSpPr>
-        <p:spPr>
-          <a:xfrm>
-            <a:off x="502920" y="4700016"/>
-            <a:ext cx="8183879" cy="530352"/>
-          </a:xfrm>
-          <a:prstGeom prst="rect">
-            <a:avLst/>
-          </a:prstGeom>
-          <a:noFill/>
-        </p:spPr>
-        <p:txBody>
-          <a:bodyPr wrap="square" lIns="0" rIns="0" tIns="0" bIns="0">
-            <a:noAutofit/>
-          </a:bodyPr>
-          <a:lstStyle/>
-          <a:p>
-            <a:pPr algn="l">
-              <a:lnSpc>
                 <a:spcPts val="940"/>
               </a:lnSpc>
               <a:spcBef>
@@ -12879,7 +12224,7 @@
                 <a:ea typeface="Noto Sans CJK JP"/>
                 <a:cs typeface="Noto Sans"/>
               </a:rPr>
-              <a:t>[1] Ant Financial / CLUE team (n.d.). AFQMC public data archive.</a:t>
+              <a:t>[1] Xu et al. (2020). CLUE: A Chinese Language Understanding Evaluation Benchmark. COLING.</a:t>
             </a:r>
             <a:r>
               <a:rPr sz="810" b="0" lang="ja-JP" altLang="en-US">
@@ -12902,7 +12247,7 @@
                 <a:cs typeface="Noto Sans"/>
                 <a:hlinkClick r:id="rId2"/>
               </a:rPr>
-              <a:t>https://storage.googleapis.com/cluebenchmark/tasks/afqmc_public.zip</a:t>
+              <a:t>https://aclanthology.org/2020.coling-main.419/</a:t>
             </a:r>
           </a:p>
         </p:txBody>
@@ -12937,158 +12282,45 @@
         </p:nvSpPr>
         <p:spPr>
           <a:xfrm>
-            <a:off x="468172" y="650138"/>
-            <a:ext cx="8206740" cy="616305"/>
-          </a:xfrm>
-        </p:spPr>
-        <p:txBody>
-          <a:bodyPr wrap="square" lIns="0" rIns="0" tIns="0" bIns="0">
+            <a:off x="548640" y="2484835"/>
+            <a:ext cx="8046720" cy="686816"/>
+          </a:xfrm>
+        </p:spPr>
+        <p:txBody>
+          <a:bodyPr wrap="square" lIns="0" rIns="0" tIns="0" bIns="101600" anchor="ctr">
             <a:noAutofit/>
           </a:bodyPr>
           <a:lstStyle/>
           <a:p>
-            <a:pPr algn="l">
+            <a:pPr algn="ctr">
               <a:lnSpc>
                 <a:spcPct val="110000"/>
               </a:lnSpc>
               <a:buNone/>
-              <a:defRPr sz="2800" b="0">
-                <a:solidFill>
-                  <a:srgbClr val="303437"/>
-                </a:solidFill>
-                <a:latin typeface="Noto Sans"/>
-              </a:defRPr>
-            </a:pPr>
-            <a:r>
-              <a:rPr sz="2800" b="1" lang="ja-JP" altLang="en-US">
-                <a:solidFill>
-                  <a:srgbClr val="303437"/>
-                </a:solidFill>
-                <a:latin typeface="Noto Sans"/>
-                <a:ea typeface="Noto Sans CJK JP"/>
-                <a:cs typeface="Noto Sans"/>
-              </a:rPr>
-              <a:t>尋ねている対象・操作・条件から、意味を比べる</a:t>
-            </a:r>
-          </a:p>
-        </p:txBody>
-      </p:sp>
-      <p:sp>
-        <p:nvSpPr>
-          <p:cNvPr id="3" name="Text Placeholder 2"/>
-          <p:cNvSpPr>
-            <a:spLocks noGrp="1"/>
-          </p:cNvSpPr>
-          <p:nvPr>
-            <p:ph type="body" idx="1"/>
-          </p:nvPr>
-        </p:nvSpPr>
-        <p:spPr>
-          <a:xfrm>
-            <a:off x="594360" y="1463040"/>
-            <a:ext cx="7955279" cy="3044952"/>
-          </a:xfrm>
-        </p:spPr>
-        <p:txBody>
-          <a:bodyPr wrap="square" tIns="91440" bIns="91440">
-            <a:noAutofit/>
-          </a:bodyPr>
-          <a:lstStyle/>
-          <a:p>
-            <a:pPr marL="457200" indent="-355600">
-              <a:lnSpc>
-                <a:spcPts val="2499"/>
-              </a:lnSpc>
-              <a:spcAft>
-                <a:spcPts val="700"/>
-              </a:spcAft>
-              <a:buSzPct val="63333"/>
-              <a:buFont typeface="Noto Sans CJK JP"/>
-              <a:buChar char="●"/>
-              <a:defRPr sz="2100" b="0">
-                <a:solidFill>
-                  <a:srgbClr val="303437"/>
-                </a:solidFill>
-                <a:latin typeface="Noto Sans"/>
-              </a:defRPr>
-            </a:pPr>
-            <a:r>
-              <a:rPr sz="2100" b="0" lang="ja-JP" altLang="en-US">
-                <a:solidFill>
-                  <a:srgbClr val="303437"/>
-                </a:solidFill>
-                <a:latin typeface="Noto Sans"/>
-                <a:ea typeface="Noto Sans CJK JP"/>
-                <a:cs typeface="Noto Sans"/>
-              </a:rPr>
-              <a:t>AFQMCは、金融サービスに関する二つの質問が、似た意味かどうかを判定するデータセット。</a:t>
-            </a:r>
-          </a:p>
-          <a:p>
-            <a:pPr marL="457200" indent="-355600">
-              <a:lnSpc>
-                <a:spcPts val="2499"/>
-              </a:lnSpc>
-              <a:spcAft>
-                <a:spcPts val="700"/>
-              </a:spcAft>
-              <a:buSzPct val="63333"/>
-              <a:buFont typeface="Noto Sans CJK JP"/>
-              <a:buChar char="●"/>
-              <a:defRPr sz="2100" b="0">
-                <a:solidFill>
-                  <a:srgbClr val="303437"/>
-                </a:solidFill>
-                <a:latin typeface="Noto Sans"/>
-              </a:defRPr>
-            </a:pPr>
-            <a:r>
-              <a:rPr sz="2100" b="0" lang="ja-JP" altLang="en-US">
-                <a:solidFill>
-                  <a:srgbClr val="303437"/>
-                </a:solidFill>
-                <a:latin typeface="Noto Sans"/>
-                <a:ea typeface="Noto Sans CJK JP"/>
-                <a:cs typeface="Noto Sans"/>
-              </a:rPr>
-              <a:t>同じサービス名を使う質問でも、何をしたいのか、何を知りたいのかは異なる。対象・操作・条件に注目すると、語の重なりだけでは捉えにくい違いが見えてくる。</a:t>
-            </a:r>
-          </a:p>
-          <a:p>
-            <a:pPr marL="457200" indent="-355600">
-              <a:lnSpc>
-                <a:spcPts val="2499"/>
-              </a:lnSpc>
-              <a:spcAft>
-                <a:spcPts val="0"/>
-              </a:spcAft>
-              <a:buSzPct val="63333"/>
-              <a:buFont typeface="Noto Sans CJK JP"/>
-              <a:buChar char="●"/>
-              <a:defRPr sz="2100" b="0">
-                <a:solidFill>
-                  <a:srgbClr val="303437"/>
-                </a:solidFill>
-                <a:latin typeface="Noto Sans"/>
-              </a:defRPr>
-            </a:pPr>
-            <a:r>
-              <a:rPr sz="2100" b="0" lang="ja-JP" altLang="en-US">
-                <a:solidFill>
-                  <a:srgbClr val="303437"/>
-                </a:solidFill>
-                <a:latin typeface="Noto Sans"/>
-                <a:ea typeface="Noto Sans CJK JP"/>
-                <a:cs typeface="Noto Sans"/>
-              </a:rPr>
-              <a:t>学習・開発の正解ラベルを使ってモデルを学習・評価できる。CLUEで中国語理解の評価に使われ、CLEVAでは選択式の意味照合にも利用されている。</a:t>
-            </a:r>
-          </a:p>
-        </p:txBody>
-      </p:sp>
-      <p:sp>
-        <p:nvSpPr>
-          <p:cNvPr id="4" name="Title 3"/>
+              <a:defRPr sz="3600" b="0">
+                <a:solidFill>
+                  <a:srgbClr val="303437"/>
+                </a:solidFill>
+                <a:latin typeface="Noto Sans"/>
+              </a:defRPr>
+            </a:pPr>
+            <a:r>
+              <a:rPr sz="3600" b="1" lang="ja-JP" altLang="en-US">
+                <a:solidFill>
+                  <a:srgbClr val="303437"/>
+                </a:solidFill>
+                <a:latin typeface="Noto Sans"/>
+                <a:ea typeface="Noto Sans CJK JP"/>
+                <a:cs typeface="Noto Sans"/>
+              </a:rPr>
+              <a:t>Appendix</a:t>
+            </a:r>
+          </a:p>
+        </p:txBody>
+      </p:sp>
+      <p:sp>
+        <p:nvSpPr>
+          <p:cNvPr id="3" name="Title 2"/>
           <p:cNvSpPr>
             <a:spLocks noGrp="1"/>
           </p:cNvSpPr>
@@ -13129,84 +12361,7 @@
                 <a:ea typeface="Noto Sans CJK JP"/>
                 <a:cs typeface="Noto Sans"/>
               </a:rPr>
-              <a:t>4. CLEVAでの利用と入手方法</a:t>
-            </a:r>
-          </a:p>
-        </p:txBody>
-      </p:sp>
-      <p:sp>
-        <p:nvSpPr>
-          <p:cNvPr id="5" name="sources"/>
-          <p:cNvSpPr txBox="1"/>
-          <p:nvPr/>
-        </p:nvSpPr>
-        <p:spPr>
-          <a:xfrm>
-            <a:off x="502920" y="4700016"/>
-            <a:ext cx="8183879" cy="530352"/>
-          </a:xfrm>
-          <a:prstGeom prst="rect">
-            <a:avLst/>
-          </a:prstGeom>
-          <a:noFill/>
-        </p:spPr>
-        <p:txBody>
-          <a:bodyPr wrap="square" lIns="0" rIns="0" tIns="0" bIns="0">
-            <a:noAutofit/>
-          </a:bodyPr>
-          <a:lstStyle/>
-          <a:p>
-            <a:pPr algn="l">
-              <a:lnSpc>
-                <a:spcPts val="940"/>
-              </a:lnSpc>
-              <a:spcBef>
-                <a:spcPts val="0"/>
-              </a:spcBef>
-              <a:spcAft>
-                <a:spcPts val="140"/>
-              </a:spcAft>
-              <a:buNone/>
-              <a:defRPr sz="810" b="0">
-                <a:solidFill>
-                  <a:srgbClr val="303437"/>
-                </a:solidFill>
-                <a:latin typeface="Noto Sans"/>
-              </a:defRPr>
-            </a:pPr>
-            <a:r>
-              <a:rPr sz="810" b="0" lang="ja-JP" altLang="en-US">
-                <a:solidFill>
-                  <a:srgbClr val="626669"/>
-                </a:solidFill>
-                <a:latin typeface="Noto Sans"/>
-                <a:ea typeface="Noto Sans CJK JP"/>
-                <a:cs typeface="Noto Sans"/>
-              </a:rPr>
-              <a:t>[1] Xu et al. (2020). CLUE: A Chinese Language Understanding Evaluation Benchmark. COLING.</a:t>
-            </a:r>
-            <a:r>
-              <a:rPr sz="810" b="0" lang="ja-JP" altLang="en-US">
-                <a:solidFill>
-                  <a:srgbClr val="626669"/>
-                </a:solidFill>
-                <a:latin typeface="Noto Sans"/>
-                <a:ea typeface="Noto Sans CJK JP"/>
-                <a:cs typeface="Noto Sans"/>
-              </a:rPr>
-              <a:t>  </a:t>
-            </a:r>
-            <a:r>
-              <a:rPr sz="810" b="0" lang="ja-JP" altLang="en-US">
-                <a:solidFill>
-                  <a:srgbClr val="626669"/>
-                </a:solidFill>
-                <a:latin typeface="Noto Sans"/>
-                <a:ea typeface="Noto Sans CJK JP"/>
-                <a:cs typeface="Noto Sans"/>
-                <a:hlinkClick r:id="rId2"/>
-              </a:rPr>
-              <a:t>https://aclanthology.org/2020.coling-main.419/</a:t>
+              <a:t>Appendix</a:t>
             </a:r>
           </a:p>
         </p:txBody>
@@ -13241,45 +12396,128 @@
         </p:nvSpPr>
         <p:spPr>
           <a:xfrm>
-            <a:off x="548640" y="2484835"/>
-            <a:ext cx="8046720" cy="686816"/>
-          </a:xfrm>
-        </p:spPr>
-        <p:txBody>
-          <a:bodyPr wrap="square" lIns="0" rIns="0" tIns="0" bIns="101600" anchor="ctr">
+            <a:off x="468172" y="650138"/>
+            <a:ext cx="8206740" cy="616305"/>
+          </a:xfrm>
+        </p:spPr>
+        <p:txBody>
+          <a:bodyPr wrap="square" lIns="0" rIns="0" tIns="0" bIns="0">
             <a:noAutofit/>
           </a:bodyPr>
           <a:lstStyle/>
           <a:p>
-            <a:pPr algn="ctr">
+            <a:pPr algn="l">
               <a:lnSpc>
                 <a:spcPct val="110000"/>
               </a:lnSpc>
               <a:buNone/>
-              <a:defRPr sz="3600" b="0">
-                <a:solidFill>
-                  <a:srgbClr val="303437"/>
-                </a:solidFill>
-                <a:latin typeface="Noto Sans"/>
-              </a:defRPr>
-            </a:pPr>
-            <a:r>
-              <a:rPr sz="3600" b="1" lang="ja-JP" altLang="en-US">
-                <a:solidFill>
-                  <a:srgbClr val="303437"/>
-                </a:solidFill>
-                <a:latin typeface="Noto Sans"/>
-                <a:ea typeface="Noto Sans CJK JP"/>
-                <a:cs typeface="Noto Sans"/>
-              </a:rPr>
-              <a:t>Appendix</a:t>
-            </a:r>
-          </a:p>
-        </p:txBody>
-      </p:sp>
-      <p:sp>
-        <p:nvSpPr>
-          <p:cNvPr id="3" name="Title 2"/>
+              <a:defRPr sz="2800" b="0">
+                <a:solidFill>
+                  <a:srgbClr val="303437"/>
+                </a:solidFill>
+                <a:latin typeface="Noto Sans"/>
+              </a:defRPr>
+            </a:pPr>
+            <a:r>
+              <a:rPr sz="2800" b="1" lang="ja-JP" altLang="en-US">
+                <a:solidFill>
+                  <a:srgbClr val="303437"/>
+                </a:solidFill>
+                <a:latin typeface="Noto Sans"/>
+                <a:ea typeface="Noto Sans CJK JP"/>
+                <a:cs typeface="Noto Sans"/>
+              </a:rPr>
+              <a:t/>
+            </a:r>
+          </a:p>
+        </p:txBody>
+      </p:sp>
+      <p:sp>
+        <p:nvSpPr>
+          <p:cNvPr id="3" name="Text Placeholder 2"/>
+          <p:cNvSpPr>
+            <a:spLocks noGrp="1"/>
+          </p:cNvSpPr>
+          <p:nvPr>
+            <p:ph type="body" idx="1"/>
+          </p:nvPr>
+        </p:nvSpPr>
+        <p:spPr>
+          <a:xfrm>
+            <a:off x="640080" y="2281121"/>
+            <a:ext cx="7863840" cy="1127760"/>
+          </a:xfrm>
+        </p:spPr>
+        <p:txBody>
+          <a:bodyPr lIns="0" rIns="0" tIns="0" bIns="0">
+            <a:noAutofit/>
+          </a:bodyPr>
+          <a:lstStyle/>
+          <a:p>
+            <a:pPr marL="457200" indent="-457200">
+              <a:lnSpc>
+                <a:spcPts val="3660"/>
+              </a:lnSpc>
+              <a:spcAft>
+                <a:spcPts val="1200"/>
+              </a:spcAft>
+              <a:buSzPct val="100000"/>
+              <a:buFont typeface="Noto Sans CJK JP"/>
+              <a:buAutoNum type="arabicPeriod" startAt="1"/>
+              <a:defRPr sz="3000" b="1">
+                <a:solidFill>
+                  <a:srgbClr val="303437"/>
+                </a:solidFill>
+                <a:latin typeface="Noto Sans"/>
+              </a:defRPr>
+            </a:pPr>
+            <a:r>
+              <a:rPr sz="3000" b="1" lang="ja-JP" altLang="en-US">
+                <a:solidFill>
+                  <a:srgbClr val="303437"/>
+                </a:solidFill>
+                <a:latin typeface="Noto Sans"/>
+                <a:ea typeface="Noto Sans CJK JP"/>
+                <a:cs typeface="Noto Sans"/>
+              </a:rPr>
+              <a:t>追加の金融相談</a:t>
+            </a:r>
+          </a:p>
+          <a:p>
+            <a:pPr marL="457200" indent="-457200">
+              <a:lnSpc>
+                <a:spcPts val="3660"/>
+              </a:lnSpc>
+              <a:spcAft>
+                <a:spcPts val="0"/>
+              </a:spcAft>
+              <a:buSzPct val="100000"/>
+              <a:buFont typeface="Noto Sans CJK JP"/>
+              <a:buAutoNum type="arabicPeriod" startAt="2"/>
+              <a:defRPr sz="3000" b="1">
+                <a:solidFill>
+                  <a:srgbClr val="303437"/>
+                </a:solidFill>
+                <a:latin typeface="Noto Sans"/>
+              </a:defRPr>
+            </a:pPr>
+            <a:r>
+              <a:rPr sz="3000" b="1" lang="ja-JP" altLang="en-US">
+                <a:solidFill>
+                  <a:srgbClr val="303437"/>
+                </a:solidFill>
+                <a:latin typeface="Noto Sans"/>
+                <a:ea typeface="Noto Sans CJK JP"/>
+                <a:cs typeface="Noto Sans"/>
+              </a:rPr>
+              <a:t>モデル比較と参考文献</a:t>
+            </a:r>
+          </a:p>
+        </p:txBody>
+      </p:sp>
+      <p:sp>
+        <p:nvSpPr>
+          <p:cNvPr id="4" name="Title 3"/>
           <p:cNvSpPr>
             <a:spLocks noGrp="1"/>
           </p:cNvSpPr>
@@ -13320,7 +12558,7 @@
                 <a:ea typeface="Noto Sans CJK JP"/>
                 <a:cs typeface="Noto Sans"/>
               </a:rPr>
-              <a:t>Appendix</a:t>
+              <a:t>Appendix: 目次</a:t>
             </a:r>
           </a:p>
         </p:txBody>
@@ -13355,83 +12593,30 @@
         </p:nvSpPr>
         <p:spPr>
           <a:xfrm>
-            <a:off x="468172" y="650138"/>
-            <a:ext cx="8206740" cy="616305"/>
-          </a:xfrm>
-        </p:spPr>
-        <p:txBody>
-          <a:bodyPr wrap="square" lIns="0" rIns="0" tIns="0" bIns="0">
+            <a:off x="548640" y="2506875"/>
+            <a:ext cx="8046720" cy="585216"/>
+          </a:xfrm>
+        </p:spPr>
+        <p:txBody>
+          <a:bodyPr wrap="square" lIns="0" rIns="0" tIns="0" bIns="0" anchor="ctr">
             <a:noAutofit/>
           </a:bodyPr>
           <a:lstStyle/>
           <a:p>
-            <a:pPr algn="l">
+            <a:pPr algn="ctr">
               <a:lnSpc>
                 <a:spcPct val="110000"/>
               </a:lnSpc>
               <a:buNone/>
-              <a:defRPr sz="2800" b="0">
-                <a:solidFill>
-                  <a:srgbClr val="303437"/>
-                </a:solidFill>
-                <a:latin typeface="Noto Sans"/>
-              </a:defRPr>
-            </a:pPr>
-            <a:r>
-              <a:rPr sz="2800" b="1" lang="ja-JP" altLang="en-US">
-                <a:solidFill>
-                  <a:srgbClr val="303437"/>
-                </a:solidFill>
-                <a:latin typeface="Noto Sans"/>
-                <a:ea typeface="Noto Sans CJK JP"/>
-                <a:cs typeface="Noto Sans"/>
-              </a:rPr>
-              <a:t/>
-            </a:r>
-          </a:p>
-        </p:txBody>
-      </p:sp>
-      <p:sp>
-        <p:nvSpPr>
-          <p:cNvPr id="3" name="Text Placeholder 2"/>
-          <p:cNvSpPr>
-            <a:spLocks noGrp="1"/>
-          </p:cNvSpPr>
-          <p:nvPr>
-            <p:ph type="body" idx="1"/>
-          </p:nvPr>
-        </p:nvSpPr>
-        <p:spPr>
-          <a:xfrm>
-            <a:off x="640080" y="2281121"/>
-            <a:ext cx="7863840" cy="1127760"/>
-          </a:xfrm>
-        </p:spPr>
-        <p:txBody>
-          <a:bodyPr lIns="0" rIns="0" tIns="0" bIns="0">
-            <a:noAutofit/>
-          </a:bodyPr>
-          <a:lstStyle/>
-          <a:p>
-            <a:pPr marL="457200" indent="-457200">
-              <a:lnSpc>
-                <a:spcPts val="3660"/>
-              </a:lnSpc>
-              <a:spcAft>
-                <a:spcPts val="1200"/>
-              </a:spcAft>
-              <a:buSzPct val="100000"/>
-              <a:buFont typeface="Noto Sans CJK JP"/>
-              <a:buAutoNum type="arabicPeriod" startAt="1"/>
-              <a:defRPr sz="3000" b="1">
-                <a:solidFill>
-                  <a:srgbClr val="303437"/>
-                </a:solidFill>
-                <a:latin typeface="Noto Sans"/>
-              </a:defRPr>
-            </a:pPr>
-            <a:r>
-              <a:rPr sz="3000" b="1" lang="ja-JP" altLang="en-US">
+              <a:defRPr sz="3600" b="0">
+                <a:solidFill>
+                  <a:srgbClr val="303437"/>
+                </a:solidFill>
+                <a:latin typeface="Noto Sans"/>
+              </a:defRPr>
+            </a:pPr>
+            <a:r>
+              <a:rPr sz="3600" b="1" lang="ja-JP" altLang="en-US">
                 <a:solidFill>
                   <a:srgbClr val="303437"/>
                 </a:solidFill>
@@ -13442,41 +12627,11 @@
               <a:t>追加の金融相談</a:t>
             </a:r>
           </a:p>
-          <a:p>
-            <a:pPr marL="457200" indent="-457200">
-              <a:lnSpc>
-                <a:spcPts val="3660"/>
-              </a:lnSpc>
-              <a:spcAft>
-                <a:spcPts val="0"/>
-              </a:spcAft>
-              <a:buSzPct val="100000"/>
-              <a:buFont typeface="Noto Sans CJK JP"/>
-              <a:buAutoNum type="arabicPeriod" startAt="2"/>
-              <a:defRPr sz="3000" b="1">
-                <a:solidFill>
-                  <a:srgbClr val="303437"/>
-                </a:solidFill>
-                <a:latin typeface="Noto Sans"/>
-              </a:defRPr>
-            </a:pPr>
-            <a:r>
-              <a:rPr sz="3000" b="1" lang="ja-JP" altLang="en-US">
-                <a:solidFill>
-                  <a:srgbClr val="303437"/>
-                </a:solidFill>
-                <a:latin typeface="Noto Sans"/>
-                <a:ea typeface="Noto Sans CJK JP"/>
-                <a:cs typeface="Noto Sans"/>
-              </a:rPr>
-              <a:t>モデル比較と参考文献</a:t>
-            </a:r>
-          </a:p>
-        </p:txBody>
-      </p:sp>
-      <p:sp>
-        <p:nvSpPr>
-          <p:cNvPr id="4" name="Title 3"/>
+        </p:txBody>
+      </p:sp>
+      <p:sp>
+        <p:nvSpPr>
+          <p:cNvPr id="3" name="Title 2"/>
           <p:cNvSpPr>
             <a:spLocks noGrp="1"/>
           </p:cNvSpPr>
@@ -13517,7 +12672,7 @@
                 <a:ea typeface="Noto Sans CJK JP"/>
                 <a:cs typeface="Noto Sans"/>
               </a:rPr>
-              <a:t>Appendix: 目次</a:t>
+              <a:t>Appendix: 1. 追加の金融相談</a:t>
             </a:r>
           </a:p>
         </p:txBody>
@@ -13552,38 +12707,38 @@
         </p:nvSpPr>
         <p:spPr>
           <a:xfrm>
-            <a:off x="548640" y="2506875"/>
-            <a:ext cx="8046720" cy="585216"/>
-          </a:xfrm>
-        </p:spPr>
-        <p:txBody>
-          <a:bodyPr wrap="square" lIns="0" rIns="0" tIns="0" bIns="0" anchor="ctr">
+            <a:off x="468172" y="650138"/>
+            <a:ext cx="8206740" cy="616305"/>
+          </a:xfrm>
+        </p:spPr>
+        <p:txBody>
+          <a:bodyPr wrap="square" lIns="0" rIns="0" tIns="0" bIns="0">
             <a:noAutofit/>
           </a:bodyPr>
           <a:lstStyle/>
           <a:p>
-            <a:pPr algn="ctr">
+            <a:pPr algn="l">
               <a:lnSpc>
                 <a:spcPct val="110000"/>
               </a:lnSpc>
               <a:buNone/>
-              <a:defRPr sz="3600" b="0">
-                <a:solidFill>
-                  <a:srgbClr val="303437"/>
-                </a:solidFill>
-                <a:latin typeface="Noto Sans"/>
-              </a:defRPr>
-            </a:pPr>
-            <a:r>
-              <a:rPr sz="3600" b="1" lang="ja-JP" altLang="en-US">
-                <a:solidFill>
-                  <a:srgbClr val="303437"/>
-                </a:solidFill>
-                <a:latin typeface="Noto Sans"/>
-                <a:ea typeface="Noto Sans CJK JP"/>
-                <a:cs typeface="Noto Sans"/>
-              </a:rPr>
-              <a:t>追加の金融相談</a:t>
+              <a:defRPr sz="2800" b="0">
+                <a:solidFill>
+                  <a:srgbClr val="303437"/>
+                </a:solidFill>
+                <a:latin typeface="Noto Sans"/>
+              </a:defRPr>
+            </a:pPr>
+            <a:r>
+              <a:rPr sz="2800" b="1" lang="ja-JP" altLang="en-US">
+                <a:solidFill>
+                  <a:srgbClr val="303437"/>
+                </a:solidFill>
+                <a:latin typeface="Noto Sans"/>
+                <a:ea typeface="Noto Sans CJK JP"/>
+                <a:cs typeface="Noto Sans"/>
+              </a:rPr>
+              <a:t>実例4：受取側の金額制限</a:t>
             </a:r>
           </a:p>
         </p:txBody>
@@ -13632,6 +12787,455 @@
                 <a:cs typeface="Noto Sans"/>
               </a:rPr>
               <a:t>Appendix: 1. 追加の金融相談</a:t>
+            </a:r>
+          </a:p>
+        </p:txBody>
+      </p:sp>
+      <p:sp>
+        <p:nvSpPr>
+          <p:cNvPr id="4" name="TextBox 3"/>
+          <p:cNvSpPr txBox="1"/>
+          <p:nvPr/>
+        </p:nvSpPr>
+        <p:spPr>
+          <a:xfrm>
+            <a:off x="548640" y="1554480"/>
+            <a:ext cx="3383280" cy="228600"/>
+          </a:xfrm>
+          <a:prstGeom prst="rect">
+            <a:avLst/>
+          </a:prstGeom>
+          <a:noFill/>
+        </p:spPr>
+        <p:txBody>
+          <a:bodyPr wrap="square" lIns="0" rIns="0" tIns="0" bIns="0">
+            <a:noAutofit/>
+          </a:bodyPr>
+          <a:lstStyle/>
+          <a:p>
+            <a:pPr algn="l">
+              <a:lnSpc>
+                <a:spcPts val="1404"/>
+              </a:lnSpc>
+              <a:spcBef>
+                <a:spcPts val="0"/>
+              </a:spcBef>
+              <a:spcAft>
+                <a:spcPts val="0"/>
+              </a:spcAft>
+              <a:buNone/>
+              <a:defRPr sz="1200" b="0">
+                <a:solidFill>
+                  <a:srgbClr val="303437"/>
+                </a:solidFill>
+                <a:latin typeface="Noto Sans"/>
+              </a:defRPr>
+            </a:pPr>
+            <a:r>
+              <a:rPr sz="1200" b="0" lang="ja-JP" altLang="en-US">
+                <a:solidFill>
+                  <a:srgbClr val="626669"/>
+                </a:solidFill>
+                <a:latin typeface="Noto Sans"/>
+                <a:ea typeface="Noto Sans CJK JP"/>
+                <a:cs typeface="Noto Sans"/>
+              </a:rPr>
+              <a:t>中国語原文（2文とも全文）</a:t>
+            </a:r>
+          </a:p>
+        </p:txBody>
+      </p:sp>
+      <p:sp>
+        <p:nvSpPr>
+          <p:cNvPr id="5" name="TextBox 4"/>
+          <p:cNvSpPr txBox="1"/>
+          <p:nvPr/>
+        </p:nvSpPr>
+        <p:spPr>
+          <a:xfrm>
+            <a:off x="4160520" y="1554480"/>
+            <a:ext cx="4389120" cy="228600"/>
+          </a:xfrm>
+          <a:prstGeom prst="rect">
+            <a:avLst/>
+          </a:prstGeom>
+          <a:noFill/>
+        </p:spPr>
+        <p:txBody>
+          <a:bodyPr wrap="square" lIns="0" rIns="0" tIns="0" bIns="0">
+            <a:noAutofit/>
+          </a:bodyPr>
+          <a:lstStyle/>
+          <a:p>
+            <a:pPr algn="l">
+              <a:lnSpc>
+                <a:spcPts val="1404"/>
+              </a:lnSpc>
+              <a:spcBef>
+                <a:spcPts val="0"/>
+              </a:spcBef>
+              <a:spcAft>
+                <a:spcPts val="0"/>
+              </a:spcAft>
+              <a:buNone/>
+              <a:defRPr sz="1200" b="0">
+                <a:solidFill>
+                  <a:srgbClr val="303437"/>
+                </a:solidFill>
+                <a:latin typeface="Noto Sans"/>
+              </a:defRPr>
+            </a:pPr>
+            <a:r>
+              <a:rPr sz="1200" b="0" lang="ja-JP" altLang="en-US">
+                <a:solidFill>
+                  <a:srgbClr val="626669"/>
+                </a:solidFill>
+                <a:latin typeface="Noto Sans"/>
+                <a:ea typeface="Noto Sans CJK JP"/>
+                <a:cs typeface="Noto Sans"/>
+              </a:rPr>
+              <a:t>日本語訳</a:t>
+            </a:r>
+          </a:p>
+        </p:txBody>
+      </p:sp>
+      <p:sp>
+        <p:nvSpPr>
+          <p:cNvPr id="6" name="quote-frame"/>
+          <p:cNvSpPr/>
+          <p:nvPr/>
+        </p:nvSpPr>
+        <p:spPr>
+          <a:xfrm>
+            <a:off x="548640" y="1783080"/>
+            <a:ext cx="3383280" cy="999066"/>
+          </a:xfrm>
+          <a:prstGeom prst="rect">
+            <a:avLst/>
+          </a:prstGeom>
+          <a:solidFill>
+            <a:srgbClr val="EBEDEB"/>
+          </a:solidFill>
+          <a:ln>
+            <a:noFill/>
+          </a:ln>
+          <a:effectLst/>
+        </p:spPr>
+        <p:style>
+          <a:lnRef idx="1">
+            <a:schemeClr val="accent1"/>
+          </a:lnRef>
+          <a:fillRef idx="3">
+            <a:schemeClr val="accent1"/>
+          </a:fillRef>
+          <a:effectRef idx="0">
+            <a:schemeClr val="accent1"/>
+          </a:effectRef>
+          <a:fontRef idx="minor">
+            <a:schemeClr val="lt1"/>
+          </a:fontRef>
+        </p:style>
+        <p:txBody>
+          <a:bodyPr rtlCol="0" anchor="t" wrap="square" lIns="177800" rIns="177800" tIns="68580" bIns="127000">
+            <a:noAutofit/>
+          </a:bodyPr>
+          <a:lstStyle/>
+          <a:p>
+            <a:pPr algn="l">
+              <a:lnSpc>
+                <a:spcPts val="2261"/>
+              </a:lnSpc>
+              <a:spcBef>
+                <a:spcPts val="0"/>
+              </a:spcBef>
+              <a:spcAft>
+                <a:spcPts val="0"/>
+              </a:spcAft>
+              <a:buNone/>
+              <a:defRPr sz="1900" b="0">
+                <a:solidFill>
+                  <a:srgbClr val="303437"/>
+                </a:solidFill>
+                <a:latin typeface="Noto Sans"/>
+              </a:defRPr>
+            </a:pPr>
+            <a:r>
+              <a:rPr sz="1900" b="0" lang="ja-JP" altLang="en-US">
+                <a:solidFill>
+                  <a:srgbClr val="303437"/>
+                </a:solidFill>
+                <a:latin typeface="Noto Sans"/>
+                <a:ea typeface="Noto Sans CJK JP"/>
+                <a:cs typeface="Noto Sans"/>
+              </a:rPr>
+              <a:t>文1：花呗收款额度限制</a:t>
+            </a:r>
+          </a:p>
+          <a:p>
+            <a:pPr algn="l">
+              <a:lnSpc>
+                <a:spcPts val="2261"/>
+              </a:lnSpc>
+              <a:spcBef>
+                <a:spcPts val="0"/>
+              </a:spcBef>
+              <a:spcAft>
+                <a:spcPts val="0"/>
+              </a:spcAft>
+              <a:buNone/>
+              <a:defRPr sz="1900" b="0">
+                <a:solidFill>
+                  <a:srgbClr val="303437"/>
+                </a:solidFill>
+                <a:latin typeface="Noto Sans"/>
+              </a:defRPr>
+            </a:pPr>
+            <a:r>
+              <a:rPr sz="1900" b="0" lang="ja-JP" altLang="en-US">
+                <a:solidFill>
+                  <a:srgbClr val="303437"/>
+                </a:solidFill>
+                <a:latin typeface="Noto Sans"/>
+                <a:ea typeface="Noto Sans CJK JP"/>
+                <a:cs typeface="Noto Sans"/>
+              </a:rPr>
+              <a:t>文2：收钱码，对花呗支付的金额有限制吗</a:t>
+            </a:r>
+          </a:p>
+        </p:txBody>
+      </p:sp>
+      <p:sp>
+        <p:nvSpPr>
+          <p:cNvPr id="7" name="quote-frame"/>
+          <p:cNvSpPr/>
+          <p:nvPr/>
+        </p:nvSpPr>
+        <p:spPr>
+          <a:xfrm>
+            <a:off x="4160520" y="1783080"/>
+            <a:ext cx="4389120" cy="999066"/>
+          </a:xfrm>
+          <a:prstGeom prst="rect">
+            <a:avLst/>
+          </a:prstGeom>
+          <a:solidFill>
+            <a:srgbClr val="EBEDEB"/>
+          </a:solidFill>
+          <a:ln>
+            <a:noFill/>
+          </a:ln>
+          <a:effectLst/>
+        </p:spPr>
+        <p:style>
+          <a:lnRef idx="1">
+            <a:schemeClr val="accent1"/>
+          </a:lnRef>
+          <a:fillRef idx="3">
+            <a:schemeClr val="accent1"/>
+          </a:fillRef>
+          <a:effectRef idx="0">
+            <a:schemeClr val="accent1"/>
+          </a:effectRef>
+          <a:fontRef idx="minor">
+            <a:schemeClr val="lt1"/>
+          </a:fontRef>
+        </p:style>
+        <p:txBody>
+          <a:bodyPr rtlCol="0" anchor="t" wrap="square" lIns="177800" rIns="177800" tIns="68580" bIns="127000">
+            <a:noAutofit/>
+          </a:bodyPr>
+          <a:lstStyle/>
+          <a:p>
+            <a:pPr algn="l">
+              <a:lnSpc>
+                <a:spcPts val="2261"/>
+              </a:lnSpc>
+              <a:spcBef>
+                <a:spcPts val="0"/>
+              </a:spcBef>
+              <a:spcAft>
+                <a:spcPts val="0"/>
+              </a:spcAft>
+              <a:buNone/>
+              <a:defRPr sz="1900" b="0">
+                <a:solidFill>
+                  <a:srgbClr val="303437"/>
+                </a:solidFill>
+                <a:latin typeface="Noto Sans"/>
+              </a:defRPr>
+            </a:pPr>
+            <a:r>
+              <a:rPr sz="1900" b="0" lang="ja-JP" altLang="en-US">
+                <a:solidFill>
+                  <a:srgbClr val="303437"/>
+                </a:solidFill>
+                <a:latin typeface="Noto Sans"/>
+                <a:ea typeface="Noto Sans CJK JP"/>
+                <a:cs typeface="Noto Sans"/>
+              </a:rPr>
+              <a:t>文1：花呗で受け取る金額の制限。</a:t>
+            </a:r>
+          </a:p>
+          <a:p>
+            <a:pPr algn="l">
+              <a:lnSpc>
+                <a:spcPts val="2261"/>
+              </a:lnSpc>
+              <a:spcBef>
+                <a:spcPts val="0"/>
+              </a:spcBef>
+              <a:spcAft>
+                <a:spcPts val="0"/>
+              </a:spcAft>
+              <a:buNone/>
+              <a:defRPr sz="1900" b="0">
+                <a:solidFill>
+                  <a:srgbClr val="303437"/>
+                </a:solidFill>
+                <a:latin typeface="Noto Sans"/>
+              </a:defRPr>
+            </a:pPr>
+            <a:r>
+              <a:rPr sz="1900" b="0" lang="ja-JP" altLang="en-US">
+                <a:solidFill>
+                  <a:srgbClr val="303437"/>
+                </a:solidFill>
+                <a:latin typeface="Noto Sans"/>
+                <a:ea typeface="Noto Sans CJK JP"/>
+                <a:cs typeface="Noto Sans"/>
+              </a:rPr>
+              <a:t>文2：代金受取用コードでは、花呗で支払う金額に制限がありますか。</a:t>
+            </a:r>
+          </a:p>
+        </p:txBody>
+      </p:sp>
+      <p:sp>
+        <p:nvSpPr>
+          <p:cNvPr id="8" name="answer"/>
+          <p:cNvSpPr txBox="1"/>
+          <p:nvPr/>
+        </p:nvSpPr>
+        <p:spPr>
+          <a:xfrm>
+            <a:off x="585216" y="2928452"/>
+            <a:ext cx="7955279" cy="393192"/>
+          </a:xfrm>
+          <a:prstGeom prst="rect">
+            <a:avLst/>
+          </a:prstGeom>
+          <a:noFill/>
+        </p:spPr>
+        <p:txBody>
+          <a:bodyPr wrap="square" lIns="0" rIns="0" tIns="0" bIns="0">
+            <a:noAutofit/>
+          </a:bodyPr>
+          <a:lstStyle/>
+          <a:p>
+            <a:pPr algn="l">
+              <a:lnSpc>
+                <a:spcPts val="2457"/>
+              </a:lnSpc>
+              <a:spcBef>
+                <a:spcPts val="0"/>
+              </a:spcBef>
+              <a:spcAft>
+                <a:spcPts val="0"/>
+              </a:spcAft>
+              <a:buNone/>
+              <a:defRPr sz="2100" b="0">
+                <a:solidFill>
+                  <a:srgbClr val="303437"/>
+                </a:solidFill>
+                <a:latin typeface="Noto Sans"/>
+              </a:defRPr>
+            </a:pPr>
+            <a:r>
+              <a:rPr sz="2100" b="1" lang="ja-JP" altLang="en-US">
+                <a:solidFill>
+                  <a:srgbClr val="B13731"/>
+                </a:solidFill>
+                <a:latin typeface="Noto Sans"/>
+                <a:ea typeface="Noto Sans CJK JP"/>
+                <a:cs typeface="Noto Sans"/>
+              </a:rPr>
+              <a:t>正解：意味が似ている（1）</a:t>
+            </a:r>
+          </a:p>
+        </p:txBody>
+      </p:sp>
+      <p:sp>
+        <p:nvSpPr>
+          <p:cNvPr id="9" name="sources"/>
+          <p:cNvSpPr txBox="1"/>
+          <p:nvPr/>
+        </p:nvSpPr>
+        <p:spPr>
+          <a:xfrm>
+            <a:off x="502920" y="4700016"/>
+            <a:ext cx="8183879" cy="530352"/>
+          </a:xfrm>
+          <a:prstGeom prst="rect">
+            <a:avLst/>
+          </a:prstGeom>
+          <a:noFill/>
+        </p:spPr>
+        <p:txBody>
+          <a:bodyPr wrap="square" lIns="0" rIns="0" tIns="0" bIns="0">
+            <a:noAutofit/>
+          </a:bodyPr>
+          <a:lstStyle/>
+          <a:p>
+            <a:pPr algn="l">
+              <a:lnSpc>
+                <a:spcPts val="940"/>
+              </a:lnSpc>
+              <a:spcBef>
+                <a:spcPts val="0"/>
+              </a:spcBef>
+              <a:spcAft>
+                <a:spcPts val="140"/>
+              </a:spcAft>
+              <a:buNone/>
+              <a:defRPr sz="810" b="0">
+                <a:solidFill>
+                  <a:srgbClr val="303437"/>
+                </a:solidFill>
+                <a:latin typeface="Noto Sans"/>
+              </a:defRPr>
+            </a:pPr>
+            <a:r>
+              <a:rPr sz="810" b="0" lang="ja-JP" altLang="en-US">
+                <a:solidFill>
+                  <a:srgbClr val="626669"/>
+                </a:solidFill>
+                <a:latin typeface="Noto Sans"/>
+                <a:ea typeface="Noto Sans CJK JP"/>
+                <a:cs typeface="Noto Sans"/>
+              </a:rPr>
+              <a:t>[1] Ant Financial / CLUE team (n.d.). AFQMC public data archive.</a:t>
+            </a:r>
+            <a:r>
+              <a:rPr sz="810" b="0" lang="ja-JP" altLang="en-US">
+                <a:solidFill>
+                  <a:srgbClr val="626669"/>
+                </a:solidFill>
+                <a:latin typeface="Noto Sans"/>
+                <a:ea typeface="Noto Sans CJK JP"/>
+                <a:cs typeface="Noto Sans"/>
+              </a:rPr>
+              <a:t>  </a:t>
+            </a:r>
+            <a:r>
+              <a:rPr sz="810" b="0" lang="ja-JP" altLang="en-US">
+                <a:solidFill>
+                  <a:srgbClr val="626669"/>
+                </a:solidFill>
+                <a:latin typeface="Noto Sans"/>
+                <a:ea typeface="Noto Sans CJK JP"/>
+                <a:cs typeface="Noto Sans"/>
+                <a:hlinkClick r:id="rId2"/>
+              </a:rPr>
+              <a:t>https://storage.googleapis.com/cluebenchmark/tasks/afqmc_public.zip</a:t>
             </a:r>
           </a:p>
         </p:txBody>
@@ -13697,7 +13301,7 @@
                 <a:ea typeface="Noto Sans CJK JP"/>
                 <a:cs typeface="Noto Sans"/>
               </a:rPr>
-              <a:t>実例4：受取側の金額制限</a:t>
+              <a:t>実例5：支払い遅延の後、使えるまでの期間</a:t>
             </a:r>
           </a:p>
         </p:txBody>
@@ -13927,7 +13531,7 @@
                 <a:ea typeface="Noto Sans CJK JP"/>
                 <a:cs typeface="Noto Sans"/>
               </a:rPr>
-              <a:t>文1：花呗收款额度限制</a:t>
+              <a:t>文1：之前有逾期账单，，什么时候才能用花呗</a:t>
             </a:r>
           </a:p>
           <a:p>
@@ -13958,7 +13562,7 @@
                 <a:ea typeface="Noto Sans CJK JP"/>
                 <a:cs typeface="Noto Sans"/>
               </a:rPr>
-              <a:t>文2：收钱码，对花呗支付的金额有限制吗</a:t>
+              <a:t>文2：花呗逾期后多久能用</a:t>
             </a:r>
           </a:p>
         </p:txBody>
@@ -13972,7 +13576,7 @@
         <p:spPr>
           <a:xfrm>
             <a:off x="4160520" y="1783080"/>
-            <a:ext cx="4389120" cy="999066"/>
+            <a:ext cx="4389120" cy="1574800"/>
           </a:xfrm>
           <a:prstGeom prst="rect">
             <a:avLst/>
@@ -14032,7 +13636,7 @@
                 <a:ea typeface="Noto Sans CJK JP"/>
                 <a:cs typeface="Noto Sans"/>
               </a:rPr>
-              <a:t>文1：花呗で受け取る金額の制限。</a:t>
+              <a:t>文1：以前、支払いが遅れた請求がありました。いつになれば花呗を使えますか。</a:t>
             </a:r>
           </a:p>
           <a:p>
@@ -14063,7 +13667,7 @@
                 <a:ea typeface="Noto Sans CJK JP"/>
                 <a:cs typeface="Noto Sans"/>
               </a:rPr>
-              <a:t>文2：代金受取用コードでは、花呗で支払う金額に制限がありますか。</a:t>
+              <a:t>文2：花呗で支払いが遅れた後、どのくらいで使えますか。</a:t>
             </a:r>
           </a:p>
         </p:txBody>
@@ -14076,7 +13680,7 @@
         </p:nvSpPr>
         <p:spPr>
           <a:xfrm>
-            <a:off x="585216" y="2928452"/>
+            <a:off x="585216" y="3504185"/>
             <a:ext cx="7955279" cy="393192"/>
           </a:xfrm>
           <a:prstGeom prst="rect">
@@ -14260,7 +13864,7 @@
                 <a:ea typeface="Noto Sans CJK JP"/>
                 <a:cs typeface="Noto Sans"/>
               </a:rPr>
-              <a:t>実例5：支払い遅延の後、使えるまでの期間</a:t>
+              <a:t>実例6：電話番号を変えた後の利用</a:t>
             </a:r>
           </a:p>
         </p:txBody>
@@ -14430,7 +14034,7 @@
         <p:spPr>
           <a:xfrm>
             <a:off x="548640" y="1783080"/>
-            <a:ext cx="3383280" cy="999066"/>
+            <a:ext cx="3383280" cy="1938866"/>
           </a:xfrm>
           <a:prstGeom prst="rect">
             <a:avLst/>
@@ -14465,63 +14069,63 @@
           <a:p>
             <a:pPr algn="l">
               <a:lnSpc>
-                <a:spcPts val="2261"/>
-              </a:lnSpc>
-              <a:spcBef>
-                <a:spcPts val="0"/>
-              </a:spcBef>
-              <a:spcAft>
-                <a:spcPts val="0"/>
-              </a:spcAft>
-              <a:buNone/>
-              <a:defRPr sz="1900" b="0">
-                <a:solidFill>
-                  <a:srgbClr val="303437"/>
-                </a:solidFill>
-                <a:latin typeface="Noto Sans"/>
-              </a:defRPr>
-            </a:pPr>
-            <a:r>
-              <a:rPr sz="1900" b="0" lang="ja-JP" altLang="en-US">
-                <a:solidFill>
-                  <a:srgbClr val="303437"/>
-                </a:solidFill>
-                <a:latin typeface="Noto Sans"/>
-                <a:ea typeface="Noto Sans CJK JP"/>
-                <a:cs typeface="Noto Sans"/>
-              </a:rPr>
-              <a:t>文1：之前有逾期账单，，什么时候才能用花呗</a:t>
+                <a:spcPts val="2023"/>
+              </a:lnSpc>
+              <a:spcBef>
+                <a:spcPts val="0"/>
+              </a:spcBef>
+              <a:spcAft>
+                <a:spcPts val="0"/>
+              </a:spcAft>
+              <a:buNone/>
+              <a:defRPr sz="1700" b="0">
+                <a:solidFill>
+                  <a:srgbClr val="303437"/>
+                </a:solidFill>
+                <a:latin typeface="Noto Sans"/>
+              </a:defRPr>
+            </a:pPr>
+            <a:r>
+              <a:rPr sz="1700" b="0" lang="ja-JP" altLang="en-US">
+                <a:solidFill>
+                  <a:srgbClr val="303437"/>
+                </a:solidFill>
+                <a:latin typeface="Noto Sans"/>
+                <a:ea typeface="Noto Sans CJK JP"/>
+                <a:cs typeface="Noto Sans"/>
+              </a:rPr>
+              <a:t>文1：我开通花呗的手机号坏了，现在换了手机号怎么找回原来的号</a:t>
             </a:r>
           </a:p>
           <a:p>
             <a:pPr algn="l">
               <a:lnSpc>
-                <a:spcPts val="2261"/>
-              </a:lnSpc>
-              <a:spcBef>
-                <a:spcPts val="0"/>
-              </a:spcBef>
-              <a:spcAft>
-                <a:spcPts val="0"/>
-              </a:spcAft>
-              <a:buNone/>
-              <a:defRPr sz="1900" b="0">
-                <a:solidFill>
-                  <a:srgbClr val="303437"/>
-                </a:solidFill>
-                <a:latin typeface="Noto Sans"/>
-              </a:defRPr>
-            </a:pPr>
-            <a:r>
-              <a:rPr sz="1900" b="0" lang="ja-JP" altLang="en-US">
-                <a:solidFill>
-                  <a:srgbClr val="303437"/>
-                </a:solidFill>
-                <a:latin typeface="Noto Sans"/>
-                <a:ea typeface="Noto Sans CJK JP"/>
-                <a:cs typeface="Noto Sans"/>
-              </a:rPr>
-              <a:t>文2：花呗逾期后多久能用</a:t>
+                <a:spcPts val="2023"/>
+              </a:lnSpc>
+              <a:spcBef>
+                <a:spcPts val="0"/>
+              </a:spcBef>
+              <a:spcAft>
+                <a:spcPts val="0"/>
+              </a:spcAft>
+              <a:buNone/>
+              <a:defRPr sz="1700" b="0">
+                <a:solidFill>
+                  <a:srgbClr val="303437"/>
+                </a:solidFill>
+                <a:latin typeface="Noto Sans"/>
+              </a:defRPr>
+            </a:pPr>
+            <a:r>
+              <a:rPr sz="1700" b="0" lang="ja-JP" altLang="en-US">
+                <a:solidFill>
+                  <a:srgbClr val="303437"/>
+                </a:solidFill>
+                <a:latin typeface="Noto Sans"/>
+                <a:ea typeface="Noto Sans CJK JP"/>
+                <a:cs typeface="Noto Sans"/>
+              </a:rPr>
+              <a:t>文2：我以前的号码开通的支付宝，然后号码不用了，现在我开花呗要用不用的号码，能解决么</a:t>
             </a:r>
           </a:p>
         </p:txBody>
@@ -14535,7 +14139,7 @@
         <p:spPr>
           <a:xfrm>
             <a:off x="4160520" y="1783080"/>
-            <a:ext cx="4389120" cy="1574800"/>
+            <a:ext cx="4389120" cy="2201333"/>
           </a:xfrm>
           <a:prstGeom prst="rect">
             <a:avLst/>
@@ -14570,63 +14174,63 @@
           <a:p>
             <a:pPr algn="l">
               <a:lnSpc>
-                <a:spcPts val="2261"/>
-              </a:lnSpc>
-              <a:spcBef>
-                <a:spcPts val="0"/>
-              </a:spcBef>
-              <a:spcAft>
-                <a:spcPts val="0"/>
-              </a:spcAft>
-              <a:buNone/>
-              <a:defRPr sz="1900" b="0">
-                <a:solidFill>
-                  <a:srgbClr val="303437"/>
-                </a:solidFill>
-                <a:latin typeface="Noto Sans"/>
-              </a:defRPr>
-            </a:pPr>
-            <a:r>
-              <a:rPr sz="1900" b="0" lang="ja-JP" altLang="en-US">
-                <a:solidFill>
-                  <a:srgbClr val="303437"/>
-                </a:solidFill>
-                <a:latin typeface="Noto Sans"/>
-                <a:ea typeface="Noto Sans CJK JP"/>
-                <a:cs typeface="Noto Sans"/>
-              </a:rPr>
-              <a:t>文1：以前、支払いが遅れた請求がありました。いつになれば花呗を使えますか。</a:t>
+                <a:spcPts val="2023"/>
+              </a:lnSpc>
+              <a:spcBef>
+                <a:spcPts val="0"/>
+              </a:spcBef>
+              <a:spcAft>
+                <a:spcPts val="0"/>
+              </a:spcAft>
+              <a:buNone/>
+              <a:defRPr sz="1700" b="0">
+                <a:solidFill>
+                  <a:srgbClr val="303437"/>
+                </a:solidFill>
+                <a:latin typeface="Noto Sans"/>
+              </a:defRPr>
+            </a:pPr>
+            <a:r>
+              <a:rPr sz="1700" b="0" lang="ja-JP" altLang="en-US">
+                <a:solidFill>
+                  <a:srgbClr val="303437"/>
+                </a:solidFill>
+                <a:latin typeface="Noto Sans"/>
+                <a:ea typeface="Noto Sans CJK JP"/>
+                <a:cs typeface="Noto Sans"/>
+              </a:rPr>
+              <a:t>文1：花呗を利用開始した携帯電話の番号が使えなくなりました。番号を変えた今、元の番号をどう取り戻せますか。</a:t>
             </a:r>
           </a:p>
           <a:p>
             <a:pPr algn="l">
               <a:lnSpc>
-                <a:spcPts val="2261"/>
-              </a:lnSpc>
-              <a:spcBef>
-                <a:spcPts val="0"/>
-              </a:spcBef>
-              <a:spcAft>
-                <a:spcPts val="0"/>
-              </a:spcAft>
-              <a:buNone/>
-              <a:defRPr sz="1900" b="0">
-                <a:solidFill>
-                  <a:srgbClr val="303437"/>
-                </a:solidFill>
-                <a:latin typeface="Noto Sans"/>
-              </a:defRPr>
-            </a:pPr>
-            <a:r>
-              <a:rPr sz="1900" b="0" lang="ja-JP" altLang="en-US">
-                <a:solidFill>
-                  <a:srgbClr val="303437"/>
-                </a:solidFill>
-                <a:latin typeface="Noto Sans"/>
-                <a:ea typeface="Noto Sans CJK JP"/>
-                <a:cs typeface="Noto Sans"/>
-              </a:rPr>
-              <a:t>文2：花呗で支払いが遅れた後、どのくらいで使えますか。</a:t>
+                <a:spcPts val="2023"/>
+              </a:lnSpc>
+              <a:spcBef>
+                <a:spcPts val="0"/>
+              </a:spcBef>
+              <a:spcAft>
+                <a:spcPts val="0"/>
+              </a:spcAft>
+              <a:buNone/>
+              <a:defRPr sz="1700" b="0">
+                <a:solidFill>
+                  <a:srgbClr val="303437"/>
+                </a:solidFill>
+                <a:latin typeface="Noto Sans"/>
+              </a:defRPr>
+            </a:pPr>
+            <a:r>
+              <a:rPr sz="1700" b="0" lang="ja-JP" altLang="en-US">
+                <a:solidFill>
+                  <a:srgbClr val="303437"/>
+                </a:solidFill>
+                <a:latin typeface="Noto Sans"/>
+                <a:ea typeface="Noto Sans CJK JP"/>
+                <a:cs typeface="Noto Sans"/>
+              </a:rPr>
+              <a:t>文2：以前の電話番号で支付宝を利用開始しましたが、その番号はもう使っていません。今、花呗を利用開始しようとすると、使わなくなった番号が必要になります。解決できますか。</a:t>
             </a:r>
           </a:p>
         </p:txBody>
@@ -14639,7 +14243,7 @@
         </p:nvSpPr>
         <p:spPr>
           <a:xfrm>
-            <a:off x="585216" y="3504185"/>
+            <a:off x="585216" y="4130719"/>
             <a:ext cx="7955279" cy="393192"/>
           </a:xfrm>
           <a:prstGeom prst="rect">
@@ -14823,7 +14427,7 @@
                 <a:ea typeface="Noto Sans CJK JP"/>
                 <a:cs typeface="Noto Sans"/>
               </a:rPr>
-              <a:t>実例6：電話番号を変えた後の利用</a:t>
+              <a:t>実例7：誤って解除した利用許可</a:t>
             </a:r>
           </a:p>
         </p:txBody>
@@ -14993,7 +14597,7 @@
         <p:spPr>
           <a:xfrm>
             <a:off x="548640" y="1783080"/>
-            <a:ext cx="3383280" cy="1938866"/>
+            <a:ext cx="3383280" cy="1286933"/>
           </a:xfrm>
           <a:prstGeom prst="rect">
             <a:avLst/>
@@ -15028,63 +14632,63 @@
           <a:p>
             <a:pPr algn="l">
               <a:lnSpc>
-                <a:spcPts val="2023"/>
-              </a:lnSpc>
-              <a:spcBef>
-                <a:spcPts val="0"/>
-              </a:spcBef>
-              <a:spcAft>
-                <a:spcPts val="0"/>
-              </a:spcAft>
-              <a:buNone/>
-              <a:defRPr sz="1700" b="0">
-                <a:solidFill>
-                  <a:srgbClr val="303437"/>
-                </a:solidFill>
-                <a:latin typeface="Noto Sans"/>
-              </a:defRPr>
-            </a:pPr>
-            <a:r>
-              <a:rPr sz="1700" b="0" lang="ja-JP" altLang="en-US">
-                <a:solidFill>
-                  <a:srgbClr val="303437"/>
-                </a:solidFill>
-                <a:latin typeface="Noto Sans"/>
-                <a:ea typeface="Noto Sans CJK JP"/>
-                <a:cs typeface="Noto Sans"/>
-              </a:rPr>
-              <a:t>文1：我开通花呗的手机号坏了，现在换了手机号怎么找回原来的号</a:t>
+                <a:spcPts val="2261"/>
+              </a:lnSpc>
+              <a:spcBef>
+                <a:spcPts val="0"/>
+              </a:spcBef>
+              <a:spcAft>
+                <a:spcPts val="0"/>
+              </a:spcAft>
+              <a:buNone/>
+              <a:defRPr sz="1900" b="0">
+                <a:solidFill>
+                  <a:srgbClr val="303437"/>
+                </a:solidFill>
+                <a:latin typeface="Noto Sans"/>
+              </a:defRPr>
+            </a:pPr>
+            <a:r>
+              <a:rPr sz="1900" b="0" lang="ja-JP" altLang="en-US">
+                <a:solidFill>
+                  <a:srgbClr val="303437"/>
+                </a:solidFill>
+                <a:latin typeface="Noto Sans"/>
+                <a:ea typeface="Noto Sans CJK JP"/>
+                <a:cs typeface="Noto Sans"/>
+              </a:rPr>
+              <a:t>文1：借呗授权取消了还能再次授权借呗吗</a:t>
             </a:r>
           </a:p>
           <a:p>
             <a:pPr algn="l">
               <a:lnSpc>
-                <a:spcPts val="2023"/>
-              </a:lnSpc>
-              <a:spcBef>
-                <a:spcPts val="0"/>
-              </a:spcBef>
-              <a:spcAft>
-                <a:spcPts val="0"/>
-              </a:spcAft>
-              <a:buNone/>
-              <a:defRPr sz="1700" b="0">
-                <a:solidFill>
-                  <a:srgbClr val="303437"/>
-                </a:solidFill>
-                <a:latin typeface="Noto Sans"/>
-              </a:defRPr>
-            </a:pPr>
-            <a:r>
-              <a:rPr sz="1700" b="0" lang="ja-JP" altLang="en-US">
-                <a:solidFill>
-                  <a:srgbClr val="303437"/>
-                </a:solidFill>
-                <a:latin typeface="Noto Sans"/>
-                <a:ea typeface="Noto Sans CJK JP"/>
-                <a:cs typeface="Noto Sans"/>
-              </a:rPr>
-              <a:t>文2：我以前的号码开通的支付宝，然后号码不用了，现在我开花呗要用不用的号码，能解决么</a:t>
+                <a:spcPts val="2261"/>
+              </a:lnSpc>
+              <a:spcBef>
+                <a:spcPts val="0"/>
+              </a:spcBef>
+              <a:spcAft>
+                <a:spcPts val="0"/>
+              </a:spcAft>
+              <a:buNone/>
+              <a:defRPr sz="1900" b="0">
+                <a:solidFill>
+                  <a:srgbClr val="303437"/>
+                </a:solidFill>
+                <a:latin typeface="Noto Sans"/>
+              </a:defRPr>
+            </a:pPr>
+            <a:r>
+              <a:rPr sz="1900" b="0" lang="ja-JP" altLang="en-US">
+                <a:solidFill>
+                  <a:srgbClr val="303437"/>
+                </a:solidFill>
+                <a:latin typeface="Noto Sans"/>
+                <a:ea typeface="Noto Sans CJK JP"/>
+                <a:cs typeface="Noto Sans"/>
+              </a:rPr>
+              <a:t>文2：借呗授权不小心关闭还能在授权吗</a:t>
             </a:r>
           </a:p>
         </p:txBody>
@@ -15098,7 +14702,7 @@
         <p:spPr>
           <a:xfrm>
             <a:off x="4160520" y="1783080"/>
-            <a:ext cx="4389120" cy="2201333"/>
+            <a:ext cx="4389120" cy="1862666"/>
           </a:xfrm>
           <a:prstGeom prst="rect">
             <a:avLst/>
@@ -15133,63 +14737,63 @@
           <a:p>
             <a:pPr algn="l">
               <a:lnSpc>
-                <a:spcPts val="2023"/>
-              </a:lnSpc>
-              <a:spcBef>
-                <a:spcPts val="0"/>
-              </a:spcBef>
-              <a:spcAft>
-                <a:spcPts val="0"/>
-              </a:spcAft>
-              <a:buNone/>
-              <a:defRPr sz="1700" b="0">
-                <a:solidFill>
-                  <a:srgbClr val="303437"/>
-                </a:solidFill>
-                <a:latin typeface="Noto Sans"/>
-              </a:defRPr>
-            </a:pPr>
-            <a:r>
-              <a:rPr sz="1700" b="0" lang="ja-JP" altLang="en-US">
-                <a:solidFill>
-                  <a:srgbClr val="303437"/>
-                </a:solidFill>
-                <a:latin typeface="Noto Sans"/>
-                <a:ea typeface="Noto Sans CJK JP"/>
-                <a:cs typeface="Noto Sans"/>
-              </a:rPr>
-              <a:t>文1：花呗を利用開始した携帯電話の番号が使えなくなりました。番号を変えた今、元の番号をどう取り戻せますか。</a:t>
+                <a:spcPts val="2261"/>
+              </a:lnSpc>
+              <a:spcBef>
+                <a:spcPts val="0"/>
+              </a:spcBef>
+              <a:spcAft>
+                <a:spcPts val="0"/>
+              </a:spcAft>
+              <a:buNone/>
+              <a:defRPr sz="1900" b="0">
+                <a:solidFill>
+                  <a:srgbClr val="303437"/>
+                </a:solidFill>
+                <a:latin typeface="Noto Sans"/>
+              </a:defRPr>
+            </a:pPr>
+            <a:r>
+              <a:rPr sz="1900" b="0" lang="ja-JP" altLang="en-US">
+                <a:solidFill>
+                  <a:srgbClr val="303437"/>
+                </a:solidFill>
+                <a:latin typeface="Noto Sans"/>
+                <a:ea typeface="Noto Sans CJK JP"/>
+                <a:cs typeface="Noto Sans"/>
+              </a:rPr>
+              <a:t>文1：借呗の利用許可を取り消した後、もう一度、借呗の利用を許可できますか。</a:t>
             </a:r>
           </a:p>
           <a:p>
             <a:pPr algn="l">
               <a:lnSpc>
-                <a:spcPts val="2023"/>
-              </a:lnSpc>
-              <a:spcBef>
-                <a:spcPts val="0"/>
-              </a:spcBef>
-              <a:spcAft>
-                <a:spcPts val="0"/>
-              </a:spcAft>
-              <a:buNone/>
-              <a:defRPr sz="1700" b="0">
-                <a:solidFill>
-                  <a:srgbClr val="303437"/>
-                </a:solidFill>
-                <a:latin typeface="Noto Sans"/>
-              </a:defRPr>
-            </a:pPr>
-            <a:r>
-              <a:rPr sz="1700" b="0" lang="ja-JP" altLang="en-US">
-                <a:solidFill>
-                  <a:srgbClr val="303437"/>
-                </a:solidFill>
-                <a:latin typeface="Noto Sans"/>
-                <a:ea typeface="Noto Sans CJK JP"/>
-                <a:cs typeface="Noto Sans"/>
-              </a:rPr>
-              <a:t>文2：以前の電話番号で支付宝を利用開始しましたが、その番号はもう使っていません。今、花呗を利用開始しようとすると、使わなくなった番号が必要になります。解決できますか。</a:t>
+                <a:spcPts val="2261"/>
+              </a:lnSpc>
+              <a:spcBef>
+                <a:spcPts val="0"/>
+              </a:spcBef>
+              <a:spcAft>
+                <a:spcPts val="0"/>
+              </a:spcAft>
+              <a:buNone/>
+              <a:defRPr sz="1900" b="0">
+                <a:solidFill>
+                  <a:srgbClr val="303437"/>
+                </a:solidFill>
+                <a:latin typeface="Noto Sans"/>
+              </a:defRPr>
+            </a:pPr>
+            <a:r>
+              <a:rPr sz="1900" b="0" lang="ja-JP" altLang="en-US">
+                <a:solidFill>
+                  <a:srgbClr val="303437"/>
+                </a:solidFill>
+                <a:latin typeface="Noto Sans"/>
+                <a:ea typeface="Noto Sans CJK JP"/>
+                <a:cs typeface="Noto Sans"/>
+              </a:rPr>
+              <a:t>文2：借呗の利用許可をうっかり無効にしました。もう一度許可できますか。</a:t>
             </a:r>
           </a:p>
         </p:txBody>
@@ -15202,7 +14806,7 @@
         </p:nvSpPr>
         <p:spPr>
           <a:xfrm>
-            <a:off x="585216" y="4130719"/>
+            <a:off x="585216" y="3792052"/>
             <a:ext cx="7955279" cy="393192"/>
           </a:xfrm>
           <a:prstGeom prst="rect">
@@ -15529,7 +15133,7 @@
                 <a:ea typeface="Noto Sans CJK JP"/>
                 <a:cs typeface="Noto Sans"/>
               </a:rPr>
-              <a:t>CLEVAでの利用と入手方法</a:t>
+              <a:t>入手方法と利用条件</a:t>
             </a:r>
           </a:p>
         </p:txBody>
@@ -15643,7 +15247,7 @@
                 <a:ea typeface="Noto Sans CJK JP"/>
                 <a:cs typeface="Noto Sans"/>
               </a:rPr>
-              <a:t>実例7：誤って解除した利用許可</a:t>
+              <a:t>実例8：請求前の表示と、支払期限</a:t>
             </a:r>
           </a:p>
         </p:txBody>
@@ -15873,7 +15477,7 @@
                 <a:ea typeface="Noto Sans CJK JP"/>
                 <a:cs typeface="Noto Sans"/>
               </a:rPr>
-              <a:t>文1：借呗授权取消了还能再次授权借呗吗</a:t>
+              <a:t>文1：花呗提示未出账，还款是什么时候还</a:t>
             </a:r>
           </a:p>
           <a:p>
@@ -15904,7 +15508,7 @@
                 <a:ea typeface="Noto Sans CJK JP"/>
                 <a:cs typeface="Noto Sans"/>
               </a:rPr>
-              <a:t>文2：借呗授权不小心关闭还能在授权吗</a:t>
+              <a:t>文2：今天用花呗买了 什么时候还款</a:t>
             </a:r>
           </a:p>
         </p:txBody>
@@ -15918,7 +15522,7 @@
         <p:spPr>
           <a:xfrm>
             <a:off x="4160520" y="1783080"/>
-            <a:ext cx="4389120" cy="1862666"/>
+            <a:ext cx="4389120" cy="1574800"/>
           </a:xfrm>
           <a:prstGeom prst="rect">
             <a:avLst/>
@@ -15978,7 +15582,7 @@
                 <a:ea typeface="Noto Sans CJK JP"/>
                 <a:cs typeface="Noto Sans"/>
               </a:rPr>
-              <a:t>文1：借呗の利用許可を取り消した後、もう一度、借呗の利用を許可できますか。</a:t>
+              <a:t>文1：花呗に「まだ請求が出ていない」と表示されます。返済はいつすればよいですか。</a:t>
             </a:r>
           </a:p>
           <a:p>
@@ -16009,7 +15613,7 @@
                 <a:ea typeface="Noto Sans CJK JP"/>
                 <a:cs typeface="Noto Sans"/>
               </a:rPr>
-              <a:t>文2：借呗の利用許可をうっかり無効にしました。もう一度許可できますか。</a:t>
+              <a:t>文2：今日、花呗で買い物をしました。いつ返済すればよいですか。</a:t>
             </a:r>
           </a:p>
         </p:txBody>
@@ -16022,7 +15626,7 @@
         </p:nvSpPr>
         <p:spPr>
           <a:xfrm>
-            <a:off x="585216" y="3792052"/>
+            <a:off x="585216" y="3504185"/>
             <a:ext cx="7955279" cy="393192"/>
           </a:xfrm>
           <a:prstGeom prst="rect">
@@ -16206,7 +15810,7 @@
                 <a:ea typeface="Noto Sans CJK JP"/>
                 <a:cs typeface="Noto Sans"/>
               </a:rPr>
-              <a:t>実例8：請求前の表示と、支払期限</a:t>
+              <a:t>実例9：返金された後も、返済が必要か</a:t>
             </a:r>
           </a:p>
         </p:txBody>
@@ -16436,7 +16040,7 @@
                 <a:ea typeface="Noto Sans CJK JP"/>
                 <a:cs typeface="Noto Sans"/>
               </a:rPr>
-              <a:t>文1：花呗提示未出账，还款是什么时候还</a:t>
+              <a:t>文1：订单退款成功了，为什么仍然要还花呗</a:t>
             </a:r>
           </a:p>
           <a:p>
@@ -16467,7 +16071,7 @@
                 <a:ea typeface="Noto Sans CJK JP"/>
                 <a:cs typeface="Noto Sans"/>
               </a:rPr>
-              <a:t>文2：今天用花呗买了 什么时候还款</a:t>
+              <a:t>文2：退款到了花呗，为什么还要还款</a:t>
             </a:r>
           </a:p>
         </p:txBody>
@@ -16541,7 +16145,7 @@
                 <a:ea typeface="Noto Sans CJK JP"/>
                 <a:cs typeface="Noto Sans"/>
               </a:rPr>
-              <a:t>文1：花呗に「まだ請求が出ていない」と表示されます。返済はいつすればよいですか。</a:t>
+              <a:t>文1：注文の返金は完了したのに、なぜまだ花呗に返済しなければならないのですか。</a:t>
             </a:r>
           </a:p>
           <a:p>
@@ -16572,7 +16176,7 @@
                 <a:ea typeface="Noto Sans CJK JP"/>
                 <a:cs typeface="Noto Sans"/>
               </a:rPr>
-              <a:t>文2：今日、花呗で買い物をしました。いつ返済すればよいですか。</a:t>
+              <a:t>文2：返金が花呗に戻ったのに、なぜまだ返済が必要なのですか。</a:t>
             </a:r>
           </a:p>
         </p:txBody>
@@ -16769,7 +16373,7 @@
                 <a:ea typeface="Noto Sans CJK JP"/>
                 <a:cs typeface="Noto Sans"/>
               </a:rPr>
-              <a:t>実例9：返金された後も、返済が必要か</a:t>
+              <a:t>実例10：本人確認と、開設できる数</a:t>
             </a:r>
           </a:p>
         </p:txBody>
@@ -16999,7 +16603,7 @@
                 <a:ea typeface="Noto Sans CJK JP"/>
                 <a:cs typeface="Noto Sans"/>
               </a:rPr>
-              <a:t>文1：订单退款成功了，为什么仍然要还花呗</a:t>
+              <a:t>文1：一个身份证能办几个花呗</a:t>
             </a:r>
           </a:p>
           <a:p>
@@ -17030,7 +16634,7 @@
                 <a:ea typeface="Noto Sans CJK JP"/>
                 <a:cs typeface="Noto Sans"/>
               </a:rPr>
-              <a:t>文2：退款到了花呗，为什么还要还款</a:t>
+              <a:t>文2：花呗身份验证为何不亮</a:t>
             </a:r>
           </a:p>
         </p:txBody>
@@ -17044,7 +16648,7 @@
         <p:spPr>
           <a:xfrm>
             <a:off x="4160520" y="1783080"/>
-            <a:ext cx="4389120" cy="1574800"/>
+            <a:ext cx="4389120" cy="1286933"/>
           </a:xfrm>
           <a:prstGeom prst="rect">
             <a:avLst/>
@@ -17104,7 +16708,7 @@
                 <a:ea typeface="Noto Sans CJK JP"/>
                 <a:cs typeface="Noto Sans"/>
               </a:rPr>
-              <a:t>文1：注文の返金は完了したのに、なぜまだ花呗に返済しなければならないのですか。</a:t>
+              <a:t>文1：1枚の身分証で、花呗はいくつ開設できますか。</a:t>
             </a:r>
           </a:p>
           <a:p>
@@ -17135,7 +16739,7 @@
                 <a:ea typeface="Noto Sans CJK JP"/>
                 <a:cs typeface="Noto Sans"/>
               </a:rPr>
-              <a:t>文2：返金が花呗に戻ったのに、なぜまだ返済が必要なのですか。</a:t>
+              <a:t>文2：なぜ花呗の本人確認の表示が点灯しないのですか。</a:t>
             </a:r>
           </a:p>
         </p:txBody>
@@ -17148,7 +16752,7 @@
         </p:nvSpPr>
         <p:spPr>
           <a:xfrm>
-            <a:off x="585216" y="3504185"/>
+            <a:off x="585216" y="3216319"/>
             <a:ext cx="7955279" cy="393192"/>
           </a:xfrm>
           <a:prstGeom prst="rect">
@@ -17189,7 +16793,7 @@
                 <a:ea typeface="Noto Sans CJK JP"/>
                 <a:cs typeface="Noto Sans"/>
               </a:rPr>
-              <a:t>正解：意味が似ている（1）</a:t>
+              <a:t>正解：意味が異なる（0）</a:t>
             </a:r>
           </a:p>
         </p:txBody>
@@ -17332,7 +16936,7 @@
                 <a:ea typeface="Noto Sans CJK JP"/>
                 <a:cs typeface="Noto Sans"/>
               </a:rPr>
-              <a:t>実例10：本人確認と、開設できる数</a:t>
+              <a:t>実例11：返済日の勘違いと、日付の変更</a:t>
             </a:r>
           </a:p>
         </p:txBody>
@@ -17562,7 +17166,7 @@
                 <a:ea typeface="Noto Sans CJK JP"/>
                 <a:cs typeface="Noto Sans"/>
               </a:rPr>
-              <a:t>文1：一个身份证能办几个花呗</a:t>
+              <a:t>文1：记错借呗的还款日期 这几天没去注意 怎么办</a:t>
             </a:r>
           </a:p>
           <a:p>
@@ -17593,7 +17197,7 @@
                 <a:ea typeface="Noto Sans CJK JP"/>
                 <a:cs typeface="Noto Sans"/>
               </a:rPr>
-              <a:t>文2：花呗身份验证为何不亮</a:t>
+              <a:t>文2：支付借呗怎么修改还款日期</a:t>
             </a:r>
           </a:p>
         </p:txBody>
@@ -17607,7 +17211,7 @@
         <p:spPr>
           <a:xfrm>
             <a:off x="4160520" y="1783080"/>
-            <a:ext cx="4389120" cy="1286933"/>
+            <a:ext cx="4389120" cy="1862666"/>
           </a:xfrm>
           <a:prstGeom prst="rect">
             <a:avLst/>
@@ -17667,7 +17271,7 @@
                 <a:ea typeface="Noto Sans CJK JP"/>
                 <a:cs typeface="Noto Sans"/>
               </a:rPr>
-              <a:t>文1：1枚の身分証で、花呗はいくつ開設できますか。</a:t>
+              <a:t>文1：借呗の返済日を勘違いしていました。この数日は気にしていなかったのですが、どうすればよいですか。</a:t>
             </a:r>
           </a:p>
           <a:p>
@@ -17698,7 +17302,7 @@
                 <a:ea typeface="Noto Sans CJK JP"/>
                 <a:cs typeface="Noto Sans"/>
               </a:rPr>
-              <a:t>文2：なぜ花呗の本人確認の表示が点灯しないのですか。</a:t>
+              <a:t>文2：借呗への返済日をどう変更すればよいですか。</a:t>
             </a:r>
           </a:p>
         </p:txBody>
@@ -17711,7 +17315,7 @@
         </p:nvSpPr>
         <p:spPr>
           <a:xfrm>
-            <a:off x="585216" y="3216319"/>
+            <a:off x="585216" y="3792052"/>
             <a:ext cx="7955279" cy="393192"/>
           </a:xfrm>
           <a:prstGeom prst="rect">
@@ -17895,7 +17499,7 @@
                 <a:ea typeface="Noto Sans CJK JP"/>
                 <a:cs typeface="Noto Sans"/>
               </a:rPr>
-              <a:t>実例11：返済日の勘違いと、日付の変更</a:t>
+              <a:t>実例12：伏せ字を含む請求月と、過去の明細</a:t>
             </a:r>
           </a:p>
         </p:txBody>
@@ -18065,7 +17669,7 @@
         <p:spPr>
           <a:xfrm>
             <a:off x="548640" y="1783080"/>
-            <a:ext cx="3383280" cy="1286933"/>
+            <a:ext cx="3383280" cy="1278466"/>
           </a:xfrm>
           <a:prstGeom prst="rect">
             <a:avLst/>
@@ -18125,7 +17729,7 @@
                 <a:ea typeface="Noto Sans CJK JP"/>
                 <a:cs typeface="Noto Sans"/>
               </a:rPr>
-              <a:t>文1：记错借呗的还款日期 这几天没去注意 怎么办</a:t>
+              <a:t>文1：***月份的花呗为什么出现在***月份的账单里</a:t>
             </a:r>
           </a:p>
           <a:p>
@@ -18156,7 +17760,7 @@
                 <a:ea typeface="Noto Sans CJK JP"/>
                 <a:cs typeface="Noto Sans"/>
               </a:rPr>
-              <a:t>文2：支付借呗怎么修改还款日期</a:t>
+              <a:t>文2：花呗的往期账单怎么查</a:t>
             </a:r>
           </a:p>
         </p:txBody>
@@ -18170,7 +17774,7 @@
         <p:spPr>
           <a:xfrm>
             <a:off x="4160520" y="1783080"/>
-            <a:ext cx="4389120" cy="1862666"/>
+            <a:ext cx="4389120" cy="1574800"/>
           </a:xfrm>
           <a:prstGeom prst="rect">
             <a:avLst/>
@@ -18230,7 +17834,7 @@
                 <a:ea typeface="Noto Sans CJK JP"/>
                 <a:cs typeface="Noto Sans"/>
               </a:rPr>
-              <a:t>文1：借呗の返済日を勘違いしていました。この数日は気にしていなかったのですが、どうすればよいですか。</a:t>
+              <a:t>文1：なぜ***月の花呗の利用分が、***月の請求明細に出てくるのですか。</a:t>
             </a:r>
           </a:p>
           <a:p>
@@ -18261,7 +17865,7 @@
                 <a:ea typeface="Noto Sans CJK JP"/>
                 <a:cs typeface="Noto Sans"/>
               </a:rPr>
-              <a:t>文2：借呗への返済日をどう変更すればよいですか。</a:t>
+              <a:t>文2：花呗の過去の請求明細は、どう確認できますか。</a:t>
             </a:r>
           </a:p>
         </p:txBody>
@@ -18274,7 +17878,7 @@
         </p:nvSpPr>
         <p:spPr>
           <a:xfrm>
-            <a:off x="585216" y="3792052"/>
+            <a:off x="585216" y="3504185"/>
             <a:ext cx="7955279" cy="393192"/>
           </a:xfrm>
           <a:prstGeom prst="rect">
@@ -18458,7 +18062,7 @@
                 <a:ea typeface="Noto Sans CJK JP"/>
                 <a:cs typeface="Noto Sans"/>
               </a:rPr>
-              <a:t>実例12：伏せ字を含む請求月と、過去の明細</a:t>
+              <a:t>実例13：高速鉄道の乗車券と、支払サービス</a:t>
             </a:r>
           </a:p>
         </p:txBody>
@@ -18628,7 +18232,7 @@
         <p:spPr>
           <a:xfrm>
             <a:off x="548640" y="1783080"/>
-            <a:ext cx="3383280" cy="1278466"/>
+            <a:ext cx="3383280" cy="1286933"/>
           </a:xfrm>
           <a:prstGeom prst="rect">
             <a:avLst/>
@@ -18688,7 +18292,7 @@
                 <a:ea typeface="Noto Sans CJK JP"/>
                 <a:cs typeface="Noto Sans"/>
               </a:rPr>
-              <a:t>文1：***月份的花呗为什么出现在***月份的账单里</a:t>
+              <a:t>文1：花呗支持高铁票支付吗</a:t>
             </a:r>
           </a:p>
           <a:p>
@@ -18719,7 +18323,7 @@
                 <a:ea typeface="Noto Sans CJK JP"/>
                 <a:cs typeface="Noto Sans"/>
               </a:rPr>
-              <a:t>文2：花呗的往期账单怎么查</a:t>
+              <a:t>文2：为什么友付宝不支持花呗付款</a:t>
             </a:r>
           </a:p>
         </p:txBody>
@@ -18733,7 +18337,7 @@
         <p:spPr>
           <a:xfrm>
             <a:off x="4160520" y="1783080"/>
-            <a:ext cx="4389120" cy="1574800"/>
+            <a:ext cx="4389120" cy="1286933"/>
           </a:xfrm>
           <a:prstGeom prst="rect">
             <a:avLst/>
@@ -18793,7 +18397,7 @@
                 <a:ea typeface="Noto Sans CJK JP"/>
                 <a:cs typeface="Noto Sans"/>
               </a:rPr>
-              <a:t>文1：なぜ***月の花呗の利用分が、***月の請求明細に出てくるのですか。</a:t>
+              <a:t>文1：花呗は高速鉄道の乗車券の支払いに対応していますか。</a:t>
             </a:r>
           </a:p>
           <a:p>
@@ -18824,7 +18428,7 @@
                 <a:ea typeface="Noto Sans CJK JP"/>
                 <a:cs typeface="Noto Sans"/>
               </a:rPr>
-              <a:t>文2：花呗の過去の請求明細は、どう確認できますか。</a:t>
+              <a:t>文2：なぜ友付宝は花呗での支払いに対応していないのですか。</a:t>
             </a:r>
           </a:p>
         </p:txBody>
@@ -18837,7 +18441,7 @@
         </p:nvSpPr>
         <p:spPr>
           <a:xfrm>
-            <a:off x="585216" y="3504185"/>
+            <a:off x="585216" y="3216319"/>
             <a:ext cx="7955279" cy="393192"/>
           </a:xfrm>
           <a:prstGeom prst="rect">
@@ -18990,38 +18594,38 @@
         </p:nvSpPr>
         <p:spPr>
           <a:xfrm>
-            <a:off x="468172" y="650138"/>
-            <a:ext cx="8206740" cy="616305"/>
-          </a:xfrm>
-        </p:spPr>
-        <p:txBody>
-          <a:bodyPr wrap="square" lIns="0" rIns="0" tIns="0" bIns="0">
+            <a:off x="548640" y="2506875"/>
+            <a:ext cx="8046720" cy="585216"/>
+          </a:xfrm>
+        </p:spPr>
+        <p:txBody>
+          <a:bodyPr wrap="square" lIns="0" rIns="0" tIns="0" bIns="0" anchor="ctr">
             <a:noAutofit/>
           </a:bodyPr>
           <a:lstStyle/>
           <a:p>
-            <a:pPr algn="l">
+            <a:pPr algn="ctr">
               <a:lnSpc>
                 <a:spcPct val="110000"/>
               </a:lnSpc>
               <a:buNone/>
-              <a:defRPr sz="2800" b="0">
-                <a:solidFill>
-                  <a:srgbClr val="303437"/>
-                </a:solidFill>
-                <a:latin typeface="Noto Sans"/>
-              </a:defRPr>
-            </a:pPr>
-            <a:r>
-              <a:rPr sz="2800" b="1" lang="ja-JP" altLang="en-US">
-                <a:solidFill>
-                  <a:srgbClr val="303437"/>
-                </a:solidFill>
-                <a:latin typeface="Noto Sans"/>
-                <a:ea typeface="Noto Sans CJK JP"/>
-                <a:cs typeface="Noto Sans"/>
-              </a:rPr>
-              <a:t>実例13：高速鉄道の乗車券と、支払サービス</a:t>
+              <a:defRPr sz="3600" b="0">
+                <a:solidFill>
+                  <a:srgbClr val="303437"/>
+                </a:solidFill>
+                <a:latin typeface="Noto Sans"/>
+              </a:defRPr>
+            </a:pPr>
+            <a:r>
+              <a:rPr sz="3600" b="1" lang="ja-JP" altLang="en-US">
+                <a:solidFill>
+                  <a:srgbClr val="303437"/>
+                </a:solidFill>
+                <a:latin typeface="Noto Sans"/>
+                <a:ea typeface="Noto Sans CJK JP"/>
+                <a:cs typeface="Noto Sans"/>
+              </a:rPr>
+              <a:t>モデル比較と参考文献</a:t>
             </a:r>
           </a:p>
         </p:txBody>
@@ -19069,456 +18673,7 @@
                 <a:ea typeface="Noto Sans CJK JP"/>
                 <a:cs typeface="Noto Sans"/>
               </a:rPr>
-              <a:t>Appendix: 1. 追加の金融相談</a:t>
-            </a:r>
-          </a:p>
-        </p:txBody>
-      </p:sp>
-      <p:sp>
-        <p:nvSpPr>
-          <p:cNvPr id="4" name="TextBox 3"/>
-          <p:cNvSpPr txBox="1"/>
-          <p:nvPr/>
-        </p:nvSpPr>
-        <p:spPr>
-          <a:xfrm>
-            <a:off x="548640" y="1554480"/>
-            <a:ext cx="3383280" cy="228600"/>
-          </a:xfrm>
-          <a:prstGeom prst="rect">
-            <a:avLst/>
-          </a:prstGeom>
-          <a:noFill/>
-        </p:spPr>
-        <p:txBody>
-          <a:bodyPr wrap="square" lIns="0" rIns="0" tIns="0" bIns="0">
-            <a:noAutofit/>
-          </a:bodyPr>
-          <a:lstStyle/>
-          <a:p>
-            <a:pPr algn="l">
-              <a:lnSpc>
-                <a:spcPts val="1404"/>
-              </a:lnSpc>
-              <a:spcBef>
-                <a:spcPts val="0"/>
-              </a:spcBef>
-              <a:spcAft>
-                <a:spcPts val="0"/>
-              </a:spcAft>
-              <a:buNone/>
-              <a:defRPr sz="1200" b="0">
-                <a:solidFill>
-                  <a:srgbClr val="303437"/>
-                </a:solidFill>
-                <a:latin typeface="Noto Sans"/>
-              </a:defRPr>
-            </a:pPr>
-            <a:r>
-              <a:rPr sz="1200" b="0" lang="ja-JP" altLang="en-US">
-                <a:solidFill>
-                  <a:srgbClr val="626669"/>
-                </a:solidFill>
-                <a:latin typeface="Noto Sans"/>
-                <a:ea typeface="Noto Sans CJK JP"/>
-                <a:cs typeface="Noto Sans"/>
-              </a:rPr>
-              <a:t>中国語原文（2文とも全文）</a:t>
-            </a:r>
-          </a:p>
-        </p:txBody>
-      </p:sp>
-      <p:sp>
-        <p:nvSpPr>
-          <p:cNvPr id="5" name="TextBox 4"/>
-          <p:cNvSpPr txBox="1"/>
-          <p:nvPr/>
-        </p:nvSpPr>
-        <p:spPr>
-          <a:xfrm>
-            <a:off x="4160520" y="1554480"/>
-            <a:ext cx="4389120" cy="228600"/>
-          </a:xfrm>
-          <a:prstGeom prst="rect">
-            <a:avLst/>
-          </a:prstGeom>
-          <a:noFill/>
-        </p:spPr>
-        <p:txBody>
-          <a:bodyPr wrap="square" lIns="0" rIns="0" tIns="0" bIns="0">
-            <a:noAutofit/>
-          </a:bodyPr>
-          <a:lstStyle/>
-          <a:p>
-            <a:pPr algn="l">
-              <a:lnSpc>
-                <a:spcPts val="1404"/>
-              </a:lnSpc>
-              <a:spcBef>
-                <a:spcPts val="0"/>
-              </a:spcBef>
-              <a:spcAft>
-                <a:spcPts val="0"/>
-              </a:spcAft>
-              <a:buNone/>
-              <a:defRPr sz="1200" b="0">
-                <a:solidFill>
-                  <a:srgbClr val="303437"/>
-                </a:solidFill>
-                <a:latin typeface="Noto Sans"/>
-              </a:defRPr>
-            </a:pPr>
-            <a:r>
-              <a:rPr sz="1200" b="0" lang="ja-JP" altLang="en-US">
-                <a:solidFill>
-                  <a:srgbClr val="626669"/>
-                </a:solidFill>
-                <a:latin typeface="Noto Sans"/>
-                <a:ea typeface="Noto Sans CJK JP"/>
-                <a:cs typeface="Noto Sans"/>
-              </a:rPr>
-              <a:t>日本語訳</a:t>
-            </a:r>
-          </a:p>
-        </p:txBody>
-      </p:sp>
-      <p:sp>
-        <p:nvSpPr>
-          <p:cNvPr id="6" name="quote-frame"/>
-          <p:cNvSpPr/>
-          <p:nvPr/>
-        </p:nvSpPr>
-        <p:spPr>
-          <a:xfrm>
-            <a:off x="548640" y="1783080"/>
-            <a:ext cx="3383280" cy="1286933"/>
-          </a:xfrm>
-          <a:prstGeom prst="rect">
-            <a:avLst/>
-          </a:prstGeom>
-          <a:solidFill>
-            <a:srgbClr val="EBEDEB"/>
-          </a:solidFill>
-          <a:ln>
-            <a:noFill/>
-          </a:ln>
-          <a:effectLst/>
-        </p:spPr>
-        <p:style>
-          <a:lnRef idx="1">
-            <a:schemeClr val="accent1"/>
-          </a:lnRef>
-          <a:fillRef idx="3">
-            <a:schemeClr val="accent1"/>
-          </a:fillRef>
-          <a:effectRef idx="0">
-            <a:schemeClr val="accent1"/>
-          </a:effectRef>
-          <a:fontRef idx="minor">
-            <a:schemeClr val="lt1"/>
-          </a:fontRef>
-        </p:style>
-        <p:txBody>
-          <a:bodyPr rtlCol="0" anchor="t" wrap="square" lIns="177800" rIns="177800" tIns="68580" bIns="127000">
-            <a:noAutofit/>
-          </a:bodyPr>
-          <a:lstStyle/>
-          <a:p>
-            <a:pPr algn="l">
-              <a:lnSpc>
-                <a:spcPts val="2261"/>
-              </a:lnSpc>
-              <a:spcBef>
-                <a:spcPts val="0"/>
-              </a:spcBef>
-              <a:spcAft>
-                <a:spcPts val="0"/>
-              </a:spcAft>
-              <a:buNone/>
-              <a:defRPr sz="1900" b="0">
-                <a:solidFill>
-                  <a:srgbClr val="303437"/>
-                </a:solidFill>
-                <a:latin typeface="Noto Sans"/>
-              </a:defRPr>
-            </a:pPr>
-            <a:r>
-              <a:rPr sz="1900" b="0" lang="ja-JP" altLang="en-US">
-                <a:solidFill>
-                  <a:srgbClr val="303437"/>
-                </a:solidFill>
-                <a:latin typeface="Noto Sans"/>
-                <a:ea typeface="Noto Sans CJK JP"/>
-                <a:cs typeface="Noto Sans"/>
-              </a:rPr>
-              <a:t>文1：花呗支持高铁票支付吗</a:t>
-            </a:r>
-          </a:p>
-          <a:p>
-            <a:pPr algn="l">
-              <a:lnSpc>
-                <a:spcPts val="2261"/>
-              </a:lnSpc>
-              <a:spcBef>
-                <a:spcPts val="0"/>
-              </a:spcBef>
-              <a:spcAft>
-                <a:spcPts val="0"/>
-              </a:spcAft>
-              <a:buNone/>
-              <a:defRPr sz="1900" b="0">
-                <a:solidFill>
-                  <a:srgbClr val="303437"/>
-                </a:solidFill>
-                <a:latin typeface="Noto Sans"/>
-              </a:defRPr>
-            </a:pPr>
-            <a:r>
-              <a:rPr sz="1900" b="0" lang="ja-JP" altLang="en-US">
-                <a:solidFill>
-                  <a:srgbClr val="303437"/>
-                </a:solidFill>
-                <a:latin typeface="Noto Sans"/>
-                <a:ea typeface="Noto Sans CJK JP"/>
-                <a:cs typeface="Noto Sans"/>
-              </a:rPr>
-              <a:t>文2：为什么友付宝不支持花呗付款</a:t>
-            </a:r>
-          </a:p>
-        </p:txBody>
-      </p:sp>
-      <p:sp>
-        <p:nvSpPr>
-          <p:cNvPr id="7" name="quote-frame"/>
-          <p:cNvSpPr/>
-          <p:nvPr/>
-        </p:nvSpPr>
-        <p:spPr>
-          <a:xfrm>
-            <a:off x="4160520" y="1783080"/>
-            <a:ext cx="4389120" cy="1286933"/>
-          </a:xfrm>
-          <a:prstGeom prst="rect">
-            <a:avLst/>
-          </a:prstGeom>
-          <a:solidFill>
-            <a:srgbClr val="EBEDEB"/>
-          </a:solidFill>
-          <a:ln>
-            <a:noFill/>
-          </a:ln>
-          <a:effectLst/>
-        </p:spPr>
-        <p:style>
-          <a:lnRef idx="1">
-            <a:schemeClr val="accent1"/>
-          </a:lnRef>
-          <a:fillRef idx="3">
-            <a:schemeClr val="accent1"/>
-          </a:fillRef>
-          <a:effectRef idx="0">
-            <a:schemeClr val="accent1"/>
-          </a:effectRef>
-          <a:fontRef idx="minor">
-            <a:schemeClr val="lt1"/>
-          </a:fontRef>
-        </p:style>
-        <p:txBody>
-          <a:bodyPr rtlCol="0" anchor="t" wrap="square" lIns="177800" rIns="177800" tIns="68580" bIns="127000">
-            <a:noAutofit/>
-          </a:bodyPr>
-          <a:lstStyle/>
-          <a:p>
-            <a:pPr algn="l">
-              <a:lnSpc>
-                <a:spcPts val="2261"/>
-              </a:lnSpc>
-              <a:spcBef>
-                <a:spcPts val="0"/>
-              </a:spcBef>
-              <a:spcAft>
-                <a:spcPts val="0"/>
-              </a:spcAft>
-              <a:buNone/>
-              <a:defRPr sz="1900" b="0">
-                <a:solidFill>
-                  <a:srgbClr val="303437"/>
-                </a:solidFill>
-                <a:latin typeface="Noto Sans"/>
-              </a:defRPr>
-            </a:pPr>
-            <a:r>
-              <a:rPr sz="1900" b="0" lang="ja-JP" altLang="en-US">
-                <a:solidFill>
-                  <a:srgbClr val="303437"/>
-                </a:solidFill>
-                <a:latin typeface="Noto Sans"/>
-                <a:ea typeface="Noto Sans CJK JP"/>
-                <a:cs typeface="Noto Sans"/>
-              </a:rPr>
-              <a:t>文1：花呗は高速鉄道の乗車券の支払いに対応していますか。</a:t>
-            </a:r>
-          </a:p>
-          <a:p>
-            <a:pPr algn="l">
-              <a:lnSpc>
-                <a:spcPts val="2261"/>
-              </a:lnSpc>
-              <a:spcBef>
-                <a:spcPts val="0"/>
-              </a:spcBef>
-              <a:spcAft>
-                <a:spcPts val="0"/>
-              </a:spcAft>
-              <a:buNone/>
-              <a:defRPr sz="1900" b="0">
-                <a:solidFill>
-                  <a:srgbClr val="303437"/>
-                </a:solidFill>
-                <a:latin typeface="Noto Sans"/>
-              </a:defRPr>
-            </a:pPr>
-            <a:r>
-              <a:rPr sz="1900" b="0" lang="ja-JP" altLang="en-US">
-                <a:solidFill>
-                  <a:srgbClr val="303437"/>
-                </a:solidFill>
-                <a:latin typeface="Noto Sans"/>
-                <a:ea typeface="Noto Sans CJK JP"/>
-                <a:cs typeface="Noto Sans"/>
-              </a:rPr>
-              <a:t>文2：なぜ友付宝は花呗での支払いに対応していないのですか。</a:t>
-            </a:r>
-          </a:p>
-        </p:txBody>
-      </p:sp>
-      <p:sp>
-        <p:nvSpPr>
-          <p:cNvPr id="8" name="answer"/>
-          <p:cNvSpPr txBox="1"/>
-          <p:nvPr/>
-        </p:nvSpPr>
-        <p:spPr>
-          <a:xfrm>
-            <a:off x="585216" y="3216319"/>
-            <a:ext cx="7955279" cy="393192"/>
-          </a:xfrm>
-          <a:prstGeom prst="rect">
-            <a:avLst/>
-          </a:prstGeom>
-          <a:noFill/>
-        </p:spPr>
-        <p:txBody>
-          <a:bodyPr wrap="square" lIns="0" rIns="0" tIns="0" bIns="0">
-            <a:noAutofit/>
-          </a:bodyPr>
-          <a:lstStyle/>
-          <a:p>
-            <a:pPr algn="l">
-              <a:lnSpc>
-                <a:spcPts val="2457"/>
-              </a:lnSpc>
-              <a:spcBef>
-                <a:spcPts val="0"/>
-              </a:spcBef>
-              <a:spcAft>
-                <a:spcPts val="0"/>
-              </a:spcAft>
-              <a:buNone/>
-              <a:defRPr sz="2100" b="0">
-                <a:solidFill>
-                  <a:srgbClr val="303437"/>
-                </a:solidFill>
-                <a:latin typeface="Noto Sans"/>
-              </a:defRPr>
-            </a:pPr>
-            <a:r>
-              <a:rPr sz="2100" b="1" lang="ja-JP" altLang="en-US">
-                <a:solidFill>
-                  <a:srgbClr val="B13731"/>
-                </a:solidFill>
-                <a:latin typeface="Noto Sans"/>
-                <a:ea typeface="Noto Sans CJK JP"/>
-                <a:cs typeface="Noto Sans"/>
-              </a:rPr>
-              <a:t>正解：意味が異なる（0）</a:t>
-            </a:r>
-          </a:p>
-        </p:txBody>
-      </p:sp>
-      <p:sp>
-        <p:nvSpPr>
-          <p:cNvPr id="9" name="sources"/>
-          <p:cNvSpPr txBox="1"/>
-          <p:nvPr/>
-        </p:nvSpPr>
-        <p:spPr>
-          <a:xfrm>
-            <a:off x="502920" y="4700016"/>
-            <a:ext cx="8183879" cy="530352"/>
-          </a:xfrm>
-          <a:prstGeom prst="rect">
-            <a:avLst/>
-          </a:prstGeom>
-          <a:noFill/>
-        </p:spPr>
-        <p:txBody>
-          <a:bodyPr wrap="square" lIns="0" rIns="0" tIns="0" bIns="0">
-            <a:noAutofit/>
-          </a:bodyPr>
-          <a:lstStyle/>
-          <a:p>
-            <a:pPr algn="l">
-              <a:lnSpc>
-                <a:spcPts val="940"/>
-              </a:lnSpc>
-              <a:spcBef>
-                <a:spcPts val="0"/>
-              </a:spcBef>
-              <a:spcAft>
-                <a:spcPts val="140"/>
-              </a:spcAft>
-              <a:buNone/>
-              <a:defRPr sz="810" b="0">
-                <a:solidFill>
-                  <a:srgbClr val="303437"/>
-                </a:solidFill>
-                <a:latin typeface="Noto Sans"/>
-              </a:defRPr>
-            </a:pPr>
-            <a:r>
-              <a:rPr sz="810" b="0" lang="ja-JP" altLang="en-US">
-                <a:solidFill>
-                  <a:srgbClr val="626669"/>
-                </a:solidFill>
-                <a:latin typeface="Noto Sans"/>
-                <a:ea typeface="Noto Sans CJK JP"/>
-                <a:cs typeface="Noto Sans"/>
-              </a:rPr>
-              <a:t>[1] Ant Financial / CLUE team (n.d.). AFQMC public data archive.</a:t>
-            </a:r>
-            <a:r>
-              <a:rPr sz="810" b="0" lang="ja-JP" altLang="en-US">
-                <a:solidFill>
-                  <a:srgbClr val="626669"/>
-                </a:solidFill>
-                <a:latin typeface="Noto Sans"/>
-                <a:ea typeface="Noto Sans CJK JP"/>
-                <a:cs typeface="Noto Sans"/>
-              </a:rPr>
-              <a:t>  </a:t>
-            </a:r>
-            <a:r>
-              <a:rPr sz="810" b="0" lang="ja-JP" altLang="en-US">
-                <a:solidFill>
-                  <a:srgbClr val="626669"/>
-                </a:solidFill>
-                <a:latin typeface="Noto Sans"/>
-                <a:ea typeface="Noto Sans CJK JP"/>
-                <a:cs typeface="Noto Sans"/>
-                <a:hlinkClick r:id="rId2"/>
-              </a:rPr>
-              <a:t>https://storage.googleapis.com/cluebenchmark/tasks/afqmc_public.zip</a:t>
+              <a:t>Appendix: 2. モデル比較と参考文献</a:t>
             </a:r>
           </a:p>
         </p:txBody>
@@ -19532,120 +18687,6 @@
 </file>
 
 <file path=ppt/slides/slide37.xml><?xml version="1.0" encoding="utf-8"?>
-<p:sld xmlns:a="http://schemas.openxmlformats.org/drawingml/2006/main" xmlns:p="http://schemas.openxmlformats.org/presentationml/2006/main" xmlns:r="http://schemas.openxmlformats.org/officeDocument/2006/relationships">
-  <p:cSld>
-    <p:spTree>
-      <p:nvGrpSpPr>
-        <p:cNvPr id="1" name=""/>
-        <p:cNvGrpSpPr/>
-        <p:nvPr/>
-      </p:nvGrpSpPr>
-      <p:grpSpPr/>
-      <p:sp>
-        <p:nvSpPr>
-          <p:cNvPr id="2" name="Title 1"/>
-          <p:cNvSpPr>
-            <a:spLocks noGrp="1"/>
-          </p:cNvSpPr>
-          <p:nvPr>
-            <p:ph type="title"/>
-          </p:nvPr>
-        </p:nvSpPr>
-        <p:spPr>
-          <a:xfrm>
-            <a:off x="548640" y="2506875"/>
-            <a:ext cx="8046720" cy="585216"/>
-          </a:xfrm>
-        </p:spPr>
-        <p:txBody>
-          <a:bodyPr wrap="square" lIns="0" rIns="0" tIns="0" bIns="0" anchor="ctr">
-            <a:noAutofit/>
-          </a:bodyPr>
-          <a:lstStyle/>
-          <a:p>
-            <a:pPr algn="ctr">
-              <a:lnSpc>
-                <a:spcPct val="110000"/>
-              </a:lnSpc>
-              <a:buNone/>
-              <a:defRPr sz="3600" b="0">
-                <a:solidFill>
-                  <a:srgbClr val="303437"/>
-                </a:solidFill>
-                <a:latin typeface="Noto Sans"/>
-              </a:defRPr>
-            </a:pPr>
-            <a:r>
-              <a:rPr sz="3600" b="1" lang="ja-JP" altLang="en-US">
-                <a:solidFill>
-                  <a:srgbClr val="303437"/>
-                </a:solidFill>
-                <a:latin typeface="Noto Sans"/>
-                <a:ea typeface="Noto Sans CJK JP"/>
-                <a:cs typeface="Noto Sans"/>
-              </a:rPr>
-              <a:t>モデル比較と参考文献</a:t>
-            </a:r>
-          </a:p>
-        </p:txBody>
-      </p:sp>
-      <p:sp>
-        <p:nvSpPr>
-          <p:cNvPr id="3" name="Title 2"/>
-          <p:cNvSpPr>
-            <a:spLocks noGrp="1"/>
-          </p:cNvSpPr>
-          <p:nvPr>
-            <p:ph type="title" idx="2"/>
-          </p:nvPr>
-        </p:nvSpPr>
-        <p:spPr>
-          <a:xfrm>
-            <a:off x="75895" y="0"/>
-            <a:ext cx="8115300" cy="480060"/>
-          </a:xfrm>
-        </p:spPr>
-        <p:txBody>
-          <a:bodyPr wrap="square" lIns="0" rIns="0" tIns="0" bIns="0" anchor="ctr">
-            <a:noAutofit/>
-          </a:bodyPr>
-          <a:lstStyle/>
-          <a:p>
-            <a:pPr algn="l">
-              <a:lnSpc>
-                <a:spcPct val="110000"/>
-              </a:lnSpc>
-              <a:buNone/>
-              <a:defRPr sz="1400" b="0">
-                <a:solidFill>
-                  <a:srgbClr val="303437"/>
-                </a:solidFill>
-                <a:latin typeface="Noto Sans"/>
-              </a:defRPr>
-            </a:pPr>
-            <a:r>
-              <a:rPr sz="1400" b="1" lang="ja-JP" altLang="en-US">
-                <a:solidFill>
-                  <a:srgbClr val="FFFEF8"/>
-                </a:solidFill>
-                <a:latin typeface="Noto Sans"/>
-                <a:ea typeface="Noto Sans CJK JP"/>
-                <a:cs typeface="Noto Sans"/>
-              </a:rPr>
-              <a:t>Appendix: 2. モデル比較と参考文献</a:t>
-            </a:r>
-          </a:p>
-        </p:txBody>
-      </p:sp>
-    </p:spTree>
-  </p:cSld>
-  <p:clrMapOvr>
-    <a:masterClrMapping/>
-  </p:clrMapOvr>
-</p:sld>
-</file>
-
-<file path=ppt/slides/slide38.xml><?xml version="1.0" encoding="utf-8"?>
 <p:sld xmlns:a="http://schemas.openxmlformats.org/drawingml/2006/main" xmlns:p="http://schemas.openxmlformats.org/presentationml/2006/main" xmlns:r="http://schemas.openxmlformats.org/officeDocument/2006/relationships">
   <p:cSld>
     <p:spTree>
@@ -20652,6 +19693,416 @@
 </p:sld>
 </file>
 
+<file path=ppt/slides/slide38.xml><?xml version="1.0" encoding="utf-8"?>
+<p:sld xmlns:a="http://schemas.openxmlformats.org/drawingml/2006/main" xmlns:p="http://schemas.openxmlformats.org/presentationml/2006/main" xmlns:r="http://schemas.openxmlformats.org/officeDocument/2006/relationships">
+  <p:cSld>
+    <p:spTree>
+      <p:nvGrpSpPr>
+        <p:cNvPr id="1" name=""/>
+        <p:cNvGrpSpPr/>
+        <p:nvPr/>
+      </p:nvGrpSpPr>
+      <p:grpSpPr/>
+      <p:sp>
+        <p:nvSpPr>
+          <p:cNvPr id="2" name="Title 1"/>
+          <p:cNvSpPr>
+            <a:spLocks noGrp="1"/>
+          </p:cNvSpPr>
+          <p:nvPr>
+            <p:ph type="title"/>
+          </p:nvPr>
+        </p:nvSpPr>
+        <p:spPr>
+          <a:xfrm>
+            <a:off x="468172" y="650138"/>
+            <a:ext cx="8206740" cy="616305"/>
+          </a:xfrm>
+        </p:spPr>
+        <p:txBody>
+          <a:bodyPr wrap="square" lIns="0" rIns="0" tIns="0" bIns="0">
+            <a:noAutofit/>
+          </a:bodyPr>
+          <a:lstStyle/>
+          <a:p>
+            <a:pPr algn="l">
+              <a:lnSpc>
+                <a:spcPct val="110000"/>
+              </a:lnSpc>
+              <a:buNone/>
+              <a:defRPr sz="2800" b="0">
+                <a:solidFill>
+                  <a:srgbClr val="303437"/>
+                </a:solidFill>
+                <a:latin typeface="Noto Sans"/>
+              </a:defRPr>
+            </a:pPr>
+            <a:r>
+              <a:rPr sz="2800" b="1" lang="ja-JP" altLang="en-US">
+                <a:solidFill>
+                  <a:srgbClr val="303437"/>
+                </a:solidFill>
+                <a:latin typeface="Noto Sans"/>
+                <a:ea typeface="Noto Sans CJK JP"/>
+                <a:cs typeface="Noto Sans"/>
+              </a:rPr>
+              <a:t>参考文献</a:t>
+            </a:r>
+          </a:p>
+        </p:txBody>
+      </p:sp>
+      <p:sp>
+        <p:nvSpPr>
+          <p:cNvPr id="3" name="Title 2"/>
+          <p:cNvSpPr>
+            <a:spLocks noGrp="1"/>
+          </p:cNvSpPr>
+          <p:nvPr>
+            <p:ph type="title" idx="2"/>
+          </p:nvPr>
+        </p:nvSpPr>
+        <p:spPr>
+          <a:xfrm>
+            <a:off x="75895" y="0"/>
+            <a:ext cx="8115300" cy="480060"/>
+          </a:xfrm>
+        </p:spPr>
+        <p:txBody>
+          <a:bodyPr wrap="square" lIns="0" rIns="0" tIns="0" bIns="0" anchor="ctr">
+            <a:noAutofit/>
+          </a:bodyPr>
+          <a:lstStyle/>
+          <a:p>
+            <a:pPr algn="l">
+              <a:lnSpc>
+                <a:spcPct val="110000"/>
+              </a:lnSpc>
+              <a:buNone/>
+              <a:defRPr sz="1400" b="0">
+                <a:solidFill>
+                  <a:srgbClr val="303437"/>
+                </a:solidFill>
+                <a:latin typeface="Noto Sans"/>
+              </a:defRPr>
+            </a:pPr>
+            <a:r>
+              <a:rPr sz="1400" b="1" lang="ja-JP" altLang="en-US">
+                <a:solidFill>
+                  <a:srgbClr val="FFFEF8"/>
+                </a:solidFill>
+                <a:latin typeface="Noto Sans"/>
+                <a:ea typeface="Noto Sans CJK JP"/>
+                <a:cs typeface="Noto Sans"/>
+              </a:rPr>
+              <a:t>Appendix: 2. モデル比較と参考文献</a:t>
+            </a:r>
+          </a:p>
+        </p:txBody>
+      </p:sp>
+      <p:sp>
+        <p:nvSpPr>
+          <p:cNvPr id="4" name="文献 1: CLUE: A Chinese Language Understanding Evaluation Benchmark"/>
+          <p:cNvSpPr txBox="1"/>
+          <p:nvPr/>
+        </p:nvSpPr>
+        <p:spPr>
+          <a:xfrm>
+            <a:off x="548640" y="1463040"/>
+            <a:ext cx="8046720" cy="1991084"/>
+          </a:xfrm>
+          <a:prstGeom prst="rect">
+            <a:avLst/>
+          </a:prstGeom>
+          <a:noFill/>
+        </p:spPr>
+        <p:txBody>
+          <a:bodyPr wrap="square" lIns="0" rIns="0" tIns="0" bIns="0">
+            <a:noAutofit/>
+          </a:bodyPr>
+          <a:lstStyle/>
+          <a:p>
+            <a:pPr algn="l">
+              <a:lnSpc>
+                <a:spcPct val="114000"/>
+              </a:lnSpc>
+              <a:spcBef>
+                <a:spcPts val="0"/>
+              </a:spcBef>
+              <a:spcAft>
+                <a:spcPts val="400"/>
+              </a:spcAft>
+              <a:buNone/>
+              <a:defRPr sz="2000" b="0">
+                <a:solidFill>
+                  <a:srgbClr val="303437"/>
+                </a:solidFill>
+                <a:latin typeface="Noto Sans"/>
+              </a:defRPr>
+            </a:pPr>
+            <a:r>
+              <a:rPr sz="2000" b="1" lang="ja-JP" altLang="en-US">
+                <a:solidFill>
+                  <a:srgbClr val="303437"/>
+                </a:solidFill>
+                <a:latin typeface="Noto Sans"/>
+                <a:ea typeface="Noto Sans CJK JP"/>
+                <a:cs typeface="Noto Sans"/>
+              </a:rPr>
+              <a:t>CLUE: A Chinese Language Understanding Evaluation Benchmark</a:t>
+            </a:r>
+          </a:p>
+          <a:p>
+            <a:pPr algn="l">
+              <a:lnSpc>
+                <a:spcPct val="114000"/>
+              </a:lnSpc>
+              <a:spcBef>
+                <a:spcPts val="0"/>
+              </a:spcBef>
+              <a:spcAft>
+                <a:spcPts val="500"/>
+              </a:spcAft>
+              <a:buNone/>
+              <a:defRPr sz="1350" b="0">
+                <a:solidFill>
+                  <a:srgbClr val="303437"/>
+                </a:solidFill>
+                <a:latin typeface="Noto Sans"/>
+              </a:defRPr>
+            </a:pPr>
+            <a:r>
+              <a:rPr sz="1350" b="0" lang="ja-JP" altLang="en-US">
+                <a:solidFill>
+                  <a:srgbClr val="626669"/>
+                </a:solidFill>
+                <a:latin typeface="Noto Sans"/>
+                <a:ea typeface="Noto Sans CJK JP"/>
+                <a:cs typeface="Noto Sans"/>
+              </a:rPr>
+              <a:t>Liang Xu et al. · 2020 · COLING, pp4762–4772</a:t>
+            </a:r>
+          </a:p>
+          <a:p>
+            <a:pPr algn="l">
+              <a:lnSpc>
+                <a:spcPct val="114000"/>
+              </a:lnSpc>
+              <a:spcBef>
+                <a:spcPts val="0"/>
+              </a:spcBef>
+              <a:spcAft>
+                <a:spcPts val="400"/>
+              </a:spcAft>
+              <a:buNone/>
+              <a:defRPr sz="1850" b="0">
+                <a:solidFill>
+                  <a:srgbClr val="303437"/>
+                </a:solidFill>
+                <a:latin typeface="Noto Sans"/>
+              </a:defRPr>
+            </a:pPr>
+            <a:r>
+              <a:rPr sz="1850" b="0" lang="ja-JP" altLang="en-US">
+                <a:solidFill>
+                  <a:srgbClr val="303437"/>
+                </a:solidFill>
+                <a:latin typeface="Noto Sans"/>
+                <a:ea typeface="Noto Sans CJK JP"/>
+                <a:cs typeface="Noto Sans"/>
+              </a:rPr>
+              <a:t>AFQMCなど中国語理解の課題をまとめ、教師ありモデルの成績と人による評価を報告する。</a:t>
+            </a:r>
+          </a:p>
+          <a:p>
+            <a:pPr algn="l">
+              <a:lnSpc>
+                <a:spcPct val="114000"/>
+              </a:lnSpc>
+              <a:spcBef>
+                <a:spcPts val="0"/>
+              </a:spcBef>
+              <a:spcAft>
+                <a:spcPts val="0"/>
+              </a:spcAft>
+              <a:buNone/>
+              <a:defRPr sz="1150" b="0">
+                <a:solidFill>
+                  <a:srgbClr val="303437"/>
+                </a:solidFill>
+                <a:latin typeface="Noto Sans"/>
+              </a:defRPr>
+            </a:pPr>
+            <a:r>
+              <a:rPr sz="1150" b="0" lang="ja-JP" altLang="en-US">
+                <a:solidFill>
+                  <a:srgbClr val="626669"/>
+                </a:solidFill>
+                <a:latin typeface="Noto Sans"/>
+                <a:ea typeface="Noto Sans CJK JP"/>
+                <a:cs typeface="Noto Sans"/>
+                <a:hlinkClick r:id="rId2"/>
+              </a:rPr>
+              <a:t>https://aclanthology.org/2020.coling-main.419/</a:t>
+            </a:r>
+          </a:p>
+        </p:txBody>
+      </p:sp>
+      <p:sp>
+        <p:nvSpPr>
+          <p:cNvPr id="5" name="文献 2: CLUE: official repository and AFQMC description"/>
+          <p:cNvSpPr txBox="1"/>
+          <p:nvPr/>
+        </p:nvSpPr>
+        <p:spPr>
+          <a:xfrm>
+            <a:off x="548640" y="3689096"/>
+            <a:ext cx="8046720" cy="1322035"/>
+          </a:xfrm>
+          <a:prstGeom prst="rect">
+            <a:avLst/>
+          </a:prstGeom>
+          <a:noFill/>
+        </p:spPr>
+        <p:txBody>
+          <a:bodyPr wrap="square" lIns="0" rIns="0" tIns="0" bIns="0">
+            <a:noAutofit/>
+          </a:bodyPr>
+          <a:lstStyle/>
+          <a:p>
+            <a:pPr algn="l">
+              <a:lnSpc>
+                <a:spcPct val="114000"/>
+              </a:lnSpc>
+              <a:spcBef>
+                <a:spcPts val="0"/>
+              </a:spcBef>
+              <a:spcAft>
+                <a:spcPts val="400"/>
+              </a:spcAft>
+              <a:buNone/>
+              <a:defRPr sz="2000" b="0">
+                <a:solidFill>
+                  <a:srgbClr val="303437"/>
+                </a:solidFill>
+                <a:latin typeface="Noto Sans"/>
+              </a:defRPr>
+            </a:pPr>
+            <a:r>
+              <a:rPr sz="2000" b="1" lang="ja-JP" altLang="en-US">
+                <a:solidFill>
+                  <a:srgbClr val="303437"/>
+                </a:solidFill>
+                <a:latin typeface="Noto Sans"/>
+                <a:ea typeface="Noto Sans CJK JP"/>
+                <a:cs typeface="Noto Sans"/>
+              </a:rPr>
+              <a:t>CLUE: official repository and AFQMC description</a:t>
+            </a:r>
+          </a:p>
+          <a:p>
+            <a:pPr algn="l">
+              <a:lnSpc>
+                <a:spcPct val="114000"/>
+              </a:lnSpc>
+              <a:spcBef>
+                <a:spcPts val="0"/>
+              </a:spcBef>
+              <a:spcAft>
+                <a:spcPts val="500"/>
+              </a:spcAft>
+              <a:buNone/>
+              <a:defRPr sz="1350" b="0">
+                <a:solidFill>
+                  <a:srgbClr val="303437"/>
+                </a:solidFill>
+                <a:latin typeface="Noto Sans"/>
+              </a:defRPr>
+            </a:pPr>
+            <a:r>
+              <a:rPr sz="1350" b="0" lang="ja-JP" altLang="en-US">
+                <a:solidFill>
+                  <a:srgbClr val="626669"/>
+                </a:solidFill>
+                <a:latin typeface="Noto Sans"/>
+                <a:ea typeface="Noto Sans CJK JP"/>
+                <a:cs typeface="Noto Sans"/>
+              </a:rPr>
+              <a:t>CLUE team · n.d. · GitHub。参照2026-10-19。</a:t>
+            </a:r>
+          </a:p>
+          <a:p>
+            <a:pPr algn="l">
+              <a:lnSpc>
+                <a:spcPct val="114000"/>
+              </a:lnSpc>
+              <a:spcBef>
+                <a:spcPts val="0"/>
+              </a:spcBef>
+              <a:spcAft>
+                <a:spcPts val="400"/>
+              </a:spcAft>
+              <a:buNone/>
+              <a:defRPr sz="1850" b="0">
+                <a:solidFill>
+                  <a:srgbClr val="303437"/>
+                </a:solidFill>
+                <a:latin typeface="Noto Sans"/>
+              </a:defRPr>
+            </a:pPr>
+            <a:r>
+              <a:rPr sz="1850" b="0" lang="ja-JP" altLang="en-US">
+                <a:solidFill>
+                  <a:srgbClr val="303437"/>
+                </a:solidFill>
+                <a:latin typeface="Noto Sans"/>
+                <a:ea typeface="Noto Sans CJK JP"/>
+                <a:cs typeface="Noto Sans"/>
+              </a:rPr>
+              <a:t>AFQMCの正式名称、二値ラベル、公開分割とデータの入手先を示す。</a:t>
+            </a:r>
+          </a:p>
+          <a:p>
+            <a:pPr algn="l">
+              <a:lnSpc>
+                <a:spcPct val="114000"/>
+              </a:lnSpc>
+              <a:spcBef>
+                <a:spcPts val="0"/>
+              </a:spcBef>
+              <a:spcAft>
+                <a:spcPts val="0"/>
+              </a:spcAft>
+              <a:buNone/>
+              <a:defRPr sz="1150" b="0">
+                <a:solidFill>
+                  <a:srgbClr val="303437"/>
+                </a:solidFill>
+                <a:latin typeface="Noto Sans"/>
+              </a:defRPr>
+            </a:pPr>
+            <a:r>
+              <a:rPr sz="1150" b="0" lang="ja-JP" altLang="en-US">
+                <a:solidFill>
+                  <a:srgbClr val="626669"/>
+                </a:solidFill>
+                <a:latin typeface="Noto Sans"/>
+                <a:ea typeface="Noto Sans CJK JP"/>
+                <a:cs typeface="Noto Sans"/>
+                <a:hlinkClick r:id="rId3"/>
+              </a:rPr>
+              <a:t>https://github.com/CLUEbenchmark/CLUE</a:t>
+            </a:r>
+          </a:p>
+        </p:txBody>
+      </p:sp>
+    </p:spTree>
+  </p:cSld>
+  <p:clrMapOvr>
+    <a:masterClrMapping/>
+  </p:clrMapOvr>
+</p:sld>
+</file>
+
 <file path=ppt/slides/slide39.xml><?xml version="1.0" encoding="utf-8"?>
 <p:sld xmlns:a="http://schemas.openxmlformats.org/drawingml/2006/main" xmlns:p="http://schemas.openxmlformats.org/presentationml/2006/main" xmlns:r="http://schemas.openxmlformats.org/officeDocument/2006/relationships">
   <p:cSld>
@@ -20760,14 +20211,14 @@
       </p:sp>
       <p:sp>
         <p:nvSpPr>
-          <p:cNvPr id="4" name="文献 1: CLUE: A Chinese Language Understanding Evaluation Benchmark"/>
+          <p:cNvPr id="4" name="文献 1: AFQMC public data archive"/>
           <p:cNvSpPr txBox="1"/>
           <p:nvPr/>
         </p:nvSpPr>
         <p:spPr>
           <a:xfrm>
             <a:off x="548640" y="1463040"/>
-            <a:ext cx="8046720" cy="1991084"/>
+            <a:ext cx="8046720" cy="1643688"/>
           </a:xfrm>
           <a:prstGeom prst="rect">
             <a:avLst/>
@@ -20807,7 +20258,7 @@
                 <a:ea typeface="Noto Sans CJK JP"/>
                 <a:cs typeface="Noto Sans"/>
               </a:rPr>
-              <a:t>CLUE: A Chinese Language Understanding Evaluation Benchmark</a:t>
+              <a:t>AFQMC public data archive</a:t>
             </a:r>
           </a:p>
           <a:p>
@@ -20838,7 +20289,7 @@
                 <a:ea typeface="Noto Sans CJK JP"/>
                 <a:cs typeface="Noto Sans"/>
               </a:rPr>
-              <a:t>Liang Xu et al. · 2020 · COLING, pp4762–4772</a:t>
+              <a:t>Ant Financial / CLUE team · n.d. · 公式公開データ。参照2026-10-19。</a:t>
             </a:r>
           </a:p>
           <a:p>
@@ -20869,7 +20320,7 @@
                 <a:ea typeface="Noto Sans CJK JP"/>
                 <a:cs typeface="Noto Sans"/>
               </a:rPr>
-              <a:t>AFQMCなど中国語理解の課題をまとめ、教師ありモデルの成績と人による評価を報告する。</a:t>
+              <a:t>中国語の質問ペアと学習・開発用の正解ラベル、テスト用の質問ペアを配布する。</a:t>
             </a:r>
           </a:p>
           <a:p>
@@ -20901,21 +20352,21 @@
                 <a:cs typeface="Noto Sans"/>
                 <a:hlinkClick r:id="rId2"/>
               </a:rPr>
-              <a:t>https://aclanthology.org/2020.coling-main.419/</a:t>
-            </a:r>
-          </a:p>
-        </p:txBody>
-      </p:sp>
-      <p:sp>
-        <p:nvSpPr>
-          <p:cNvPr id="5" name="文献 2: CLUE: official repository and AFQMC description"/>
+              <a:t>https://storage.googleapis.com/cluebenchmark/tasks/afqmc_public.zip</a:t>
+            </a:r>
+          </a:p>
+        </p:txBody>
+      </p:sp>
+      <p:sp>
+        <p:nvSpPr>
+          <p:cNvPr id="5" name="文献 2: Ant Group — H Share IPO Prospectus"/>
           <p:cNvSpPr txBox="1"/>
           <p:nvPr/>
         </p:nvSpPr>
         <p:spPr>
           <a:xfrm>
-            <a:off x="548640" y="3689096"/>
-            <a:ext cx="8046720" cy="1322035"/>
+            <a:off x="548640" y="3399536"/>
+            <a:ext cx="8046720" cy="1643637"/>
           </a:xfrm>
           <a:prstGeom prst="rect">
             <a:avLst/>
@@ -20955,7 +20406,7 @@
                 <a:ea typeface="Noto Sans CJK JP"/>
                 <a:cs typeface="Noto Sans"/>
               </a:rPr>
-              <a:t>CLUE: official repository and AFQMC description</a:t>
+              <a:t>Ant Group — H Share IPO Prospectus</a:t>
             </a:r>
           </a:p>
           <a:p>
@@ -20986,7 +20437,7 @@
                 <a:ea typeface="Noto Sans CJK JP"/>
                 <a:cs typeface="Noto Sans"/>
               </a:rPr>
-              <a:t>CLUE team · n.d. · GitHub</a:t>
+              <a:t>Ant Group Co., Ltd. · 2020 · Hong Kong Stock Exchange</a:t>
             </a:r>
           </a:p>
           <a:p>
@@ -21017,7 +20468,7 @@
                 <a:ea typeface="Noto Sans CJK JP"/>
                 <a:cs typeface="Noto Sans"/>
               </a:rPr>
-              <a:t>AFQMCの正式名称、二値ラベル、公開分割とデータの入手先を示す。</a:t>
+              <a:t>金融サービスの事業説明。花呗・借呗の消費者向け信用と、支付宝の決済機能を記載する。</a:t>
             </a:r>
           </a:p>
           <a:p>
@@ -21049,7 +20500,7 @@
                 <a:cs typeface="Noto Sans"/>
                 <a:hlinkClick r:id="rId3"/>
               </a:rPr>
-              <a:t>https://github.com/CLUEbenchmark/CLUE</a:t>
+              <a:t>https://www1.hkexnews.hk/listedco/listconews/sehk/2020/1026/2020102600165.pdf</a:t>
             </a:r>
           </a:p>
         </p:txBody>
@@ -21164,826 +20615,6 @@
                 <a:cs typeface="Noto Sans"/>
               </a:rPr>
               <a:t>1. 二つの金融相談を比べる</a:t>
-            </a:r>
-          </a:p>
-        </p:txBody>
-      </p:sp>
-    </p:spTree>
-  </p:cSld>
-  <p:clrMapOvr>
-    <a:masterClrMapping/>
-  </p:clrMapOvr>
-</p:sld>
-</file>
-
-<file path=ppt/slides/slide40.xml><?xml version="1.0" encoding="utf-8"?>
-<p:sld xmlns:a="http://schemas.openxmlformats.org/drawingml/2006/main" xmlns:p="http://schemas.openxmlformats.org/presentationml/2006/main" xmlns:r="http://schemas.openxmlformats.org/officeDocument/2006/relationships">
-  <p:cSld>
-    <p:spTree>
-      <p:nvGrpSpPr>
-        <p:cNvPr id="1" name=""/>
-        <p:cNvGrpSpPr/>
-        <p:nvPr/>
-      </p:nvGrpSpPr>
-      <p:grpSpPr/>
-      <p:sp>
-        <p:nvSpPr>
-          <p:cNvPr id="2" name="Title 1"/>
-          <p:cNvSpPr>
-            <a:spLocks noGrp="1"/>
-          </p:cNvSpPr>
-          <p:nvPr>
-            <p:ph type="title"/>
-          </p:nvPr>
-        </p:nvSpPr>
-        <p:spPr>
-          <a:xfrm>
-            <a:off x="468172" y="650138"/>
-            <a:ext cx="8206740" cy="616305"/>
-          </a:xfrm>
-        </p:spPr>
-        <p:txBody>
-          <a:bodyPr wrap="square" lIns="0" rIns="0" tIns="0" bIns="0">
-            <a:noAutofit/>
-          </a:bodyPr>
-          <a:lstStyle/>
-          <a:p>
-            <a:pPr algn="l">
-              <a:lnSpc>
-                <a:spcPct val="110000"/>
-              </a:lnSpc>
-              <a:buNone/>
-              <a:defRPr sz="2800" b="0">
-                <a:solidFill>
-                  <a:srgbClr val="303437"/>
-                </a:solidFill>
-                <a:latin typeface="Noto Sans"/>
-              </a:defRPr>
-            </a:pPr>
-            <a:r>
-              <a:rPr sz="2800" b="1" lang="ja-JP" altLang="en-US">
-                <a:solidFill>
-                  <a:srgbClr val="303437"/>
-                </a:solidFill>
-                <a:latin typeface="Noto Sans"/>
-                <a:ea typeface="Noto Sans CJK JP"/>
-                <a:cs typeface="Noto Sans"/>
-              </a:rPr>
-              <a:t>参考文献</a:t>
-            </a:r>
-          </a:p>
-        </p:txBody>
-      </p:sp>
-      <p:sp>
-        <p:nvSpPr>
-          <p:cNvPr id="3" name="Title 2"/>
-          <p:cNvSpPr>
-            <a:spLocks noGrp="1"/>
-          </p:cNvSpPr>
-          <p:nvPr>
-            <p:ph type="title" idx="2"/>
-          </p:nvPr>
-        </p:nvSpPr>
-        <p:spPr>
-          <a:xfrm>
-            <a:off x="75895" y="0"/>
-            <a:ext cx="8115300" cy="480060"/>
-          </a:xfrm>
-        </p:spPr>
-        <p:txBody>
-          <a:bodyPr wrap="square" lIns="0" rIns="0" tIns="0" bIns="0" anchor="ctr">
-            <a:noAutofit/>
-          </a:bodyPr>
-          <a:lstStyle/>
-          <a:p>
-            <a:pPr algn="l">
-              <a:lnSpc>
-                <a:spcPct val="110000"/>
-              </a:lnSpc>
-              <a:buNone/>
-              <a:defRPr sz="1400" b="0">
-                <a:solidFill>
-                  <a:srgbClr val="303437"/>
-                </a:solidFill>
-                <a:latin typeface="Noto Sans"/>
-              </a:defRPr>
-            </a:pPr>
-            <a:r>
-              <a:rPr sz="1400" b="1" lang="ja-JP" altLang="en-US">
-                <a:solidFill>
-                  <a:srgbClr val="FFFEF8"/>
-                </a:solidFill>
-                <a:latin typeface="Noto Sans"/>
-                <a:ea typeface="Noto Sans CJK JP"/>
-                <a:cs typeface="Noto Sans"/>
-              </a:rPr>
-              <a:t>Appendix: 2. モデル比較と参考文献</a:t>
-            </a:r>
-          </a:p>
-        </p:txBody>
-      </p:sp>
-      <p:sp>
-        <p:nvSpPr>
-          <p:cNvPr id="4" name="文献 1: AFQMC public data archive"/>
-          <p:cNvSpPr txBox="1"/>
-          <p:nvPr/>
-        </p:nvSpPr>
-        <p:spPr>
-          <a:xfrm>
-            <a:off x="548640" y="1463040"/>
-            <a:ext cx="8046720" cy="1643688"/>
-          </a:xfrm>
-          <a:prstGeom prst="rect">
-            <a:avLst/>
-          </a:prstGeom>
-          <a:noFill/>
-        </p:spPr>
-        <p:txBody>
-          <a:bodyPr wrap="square" lIns="0" rIns="0" tIns="0" bIns="0">
-            <a:noAutofit/>
-          </a:bodyPr>
-          <a:lstStyle/>
-          <a:p>
-            <a:pPr algn="l">
-              <a:lnSpc>
-                <a:spcPct val="114000"/>
-              </a:lnSpc>
-              <a:spcBef>
-                <a:spcPts val="0"/>
-              </a:spcBef>
-              <a:spcAft>
-                <a:spcPts val="400"/>
-              </a:spcAft>
-              <a:buNone/>
-              <a:defRPr sz="2000" b="0">
-                <a:solidFill>
-                  <a:srgbClr val="303437"/>
-                </a:solidFill>
-                <a:latin typeface="Noto Sans"/>
-              </a:defRPr>
-            </a:pPr>
-            <a:r>
-              <a:rPr sz="2000" b="1" lang="ja-JP" altLang="en-US">
-                <a:solidFill>
-                  <a:srgbClr val="303437"/>
-                </a:solidFill>
-                <a:latin typeface="Noto Sans"/>
-                <a:ea typeface="Noto Sans CJK JP"/>
-                <a:cs typeface="Noto Sans"/>
-              </a:rPr>
-              <a:t>AFQMC public data archive</a:t>
-            </a:r>
-          </a:p>
-          <a:p>
-            <a:pPr algn="l">
-              <a:lnSpc>
-                <a:spcPct val="114000"/>
-              </a:lnSpc>
-              <a:spcBef>
-                <a:spcPts val="0"/>
-              </a:spcBef>
-              <a:spcAft>
-                <a:spcPts val="500"/>
-              </a:spcAft>
-              <a:buNone/>
-              <a:defRPr sz="1350" b="0">
-                <a:solidFill>
-                  <a:srgbClr val="303437"/>
-                </a:solidFill>
-                <a:latin typeface="Noto Sans"/>
-              </a:defRPr>
-            </a:pPr>
-            <a:r>
-              <a:rPr sz="1350" b="0" lang="ja-JP" altLang="en-US">
-                <a:solidFill>
-                  <a:srgbClr val="626669"/>
-                </a:solidFill>
-                <a:latin typeface="Noto Sans"/>
-                <a:ea typeface="Noto Sans CJK JP"/>
-                <a:cs typeface="Noto Sans"/>
-              </a:rPr>
-              <a:t>Ant Financial / CLUE team · n.d. · 公式公開データ</a:t>
-            </a:r>
-          </a:p>
-          <a:p>
-            <a:pPr algn="l">
-              <a:lnSpc>
-                <a:spcPct val="114000"/>
-              </a:lnSpc>
-              <a:spcBef>
-                <a:spcPts val="0"/>
-              </a:spcBef>
-              <a:spcAft>
-                <a:spcPts val="400"/>
-              </a:spcAft>
-              <a:buNone/>
-              <a:defRPr sz="1850" b="0">
-                <a:solidFill>
-                  <a:srgbClr val="303437"/>
-                </a:solidFill>
-                <a:latin typeface="Noto Sans"/>
-              </a:defRPr>
-            </a:pPr>
-            <a:r>
-              <a:rPr sz="1850" b="0" lang="ja-JP" altLang="en-US">
-                <a:solidFill>
-                  <a:srgbClr val="303437"/>
-                </a:solidFill>
-                <a:latin typeface="Noto Sans"/>
-                <a:ea typeface="Noto Sans CJK JP"/>
-                <a:cs typeface="Noto Sans"/>
-              </a:rPr>
-              <a:t>中国語の質問ペアと学習・開発用の正解ラベル、テスト用の質問ペアを配布する。</a:t>
-            </a:r>
-          </a:p>
-          <a:p>
-            <a:pPr algn="l">
-              <a:lnSpc>
-                <a:spcPct val="114000"/>
-              </a:lnSpc>
-              <a:spcBef>
-                <a:spcPts val="0"/>
-              </a:spcBef>
-              <a:spcAft>
-                <a:spcPts val="0"/>
-              </a:spcAft>
-              <a:buNone/>
-              <a:defRPr sz="1150" b="0">
-                <a:solidFill>
-                  <a:srgbClr val="303437"/>
-                </a:solidFill>
-                <a:latin typeface="Noto Sans"/>
-              </a:defRPr>
-            </a:pPr>
-            <a:r>
-              <a:rPr sz="1150" b="0" lang="ja-JP" altLang="en-US">
-                <a:solidFill>
-                  <a:srgbClr val="626669"/>
-                </a:solidFill>
-                <a:latin typeface="Noto Sans"/>
-                <a:ea typeface="Noto Sans CJK JP"/>
-                <a:cs typeface="Noto Sans"/>
-                <a:hlinkClick r:id="rId2"/>
-              </a:rPr>
-              <a:t>https://storage.googleapis.com/cluebenchmark/tasks/afqmc_public.zip</a:t>
-            </a:r>
-          </a:p>
-        </p:txBody>
-      </p:sp>
-      <p:sp>
-        <p:nvSpPr>
-          <p:cNvPr id="5" name="文献 2: Ant Group — H Share IPO Prospectus"/>
-          <p:cNvSpPr txBox="1"/>
-          <p:nvPr/>
-        </p:nvSpPr>
-        <p:spPr>
-          <a:xfrm>
-            <a:off x="548640" y="3399536"/>
-            <a:ext cx="8046720" cy="1643637"/>
-          </a:xfrm>
-          <a:prstGeom prst="rect">
-            <a:avLst/>
-          </a:prstGeom>
-          <a:noFill/>
-        </p:spPr>
-        <p:txBody>
-          <a:bodyPr wrap="square" lIns="0" rIns="0" tIns="0" bIns="0">
-            <a:noAutofit/>
-          </a:bodyPr>
-          <a:lstStyle/>
-          <a:p>
-            <a:pPr algn="l">
-              <a:lnSpc>
-                <a:spcPct val="114000"/>
-              </a:lnSpc>
-              <a:spcBef>
-                <a:spcPts val="0"/>
-              </a:spcBef>
-              <a:spcAft>
-                <a:spcPts val="400"/>
-              </a:spcAft>
-              <a:buNone/>
-              <a:defRPr sz="2000" b="0">
-                <a:solidFill>
-                  <a:srgbClr val="303437"/>
-                </a:solidFill>
-                <a:latin typeface="Noto Sans"/>
-              </a:defRPr>
-            </a:pPr>
-            <a:r>
-              <a:rPr sz="2000" b="1" lang="ja-JP" altLang="en-US">
-                <a:solidFill>
-                  <a:srgbClr val="303437"/>
-                </a:solidFill>
-                <a:latin typeface="Noto Sans"/>
-                <a:ea typeface="Noto Sans CJK JP"/>
-                <a:cs typeface="Noto Sans"/>
-              </a:rPr>
-              <a:t>Ant Group — H Share IPO Prospectus</a:t>
-            </a:r>
-          </a:p>
-          <a:p>
-            <a:pPr algn="l">
-              <a:lnSpc>
-                <a:spcPct val="114000"/>
-              </a:lnSpc>
-              <a:spcBef>
-                <a:spcPts val="0"/>
-              </a:spcBef>
-              <a:spcAft>
-                <a:spcPts val="500"/>
-              </a:spcAft>
-              <a:buNone/>
-              <a:defRPr sz="1350" b="0">
-                <a:solidFill>
-                  <a:srgbClr val="303437"/>
-                </a:solidFill>
-                <a:latin typeface="Noto Sans"/>
-              </a:defRPr>
-            </a:pPr>
-            <a:r>
-              <a:rPr sz="1350" b="0" lang="ja-JP" altLang="en-US">
-                <a:solidFill>
-                  <a:srgbClr val="626669"/>
-                </a:solidFill>
-                <a:latin typeface="Noto Sans"/>
-                <a:ea typeface="Noto Sans CJK JP"/>
-                <a:cs typeface="Noto Sans"/>
-              </a:rPr>
-              <a:t>Ant Group Co., Ltd. · 2020 · Hong Kong Stock Exchange</a:t>
-            </a:r>
-          </a:p>
-          <a:p>
-            <a:pPr algn="l">
-              <a:lnSpc>
-                <a:spcPct val="114000"/>
-              </a:lnSpc>
-              <a:spcBef>
-                <a:spcPts val="0"/>
-              </a:spcBef>
-              <a:spcAft>
-                <a:spcPts val="400"/>
-              </a:spcAft>
-              <a:buNone/>
-              <a:defRPr sz="1850" b="0">
-                <a:solidFill>
-                  <a:srgbClr val="303437"/>
-                </a:solidFill>
-                <a:latin typeface="Noto Sans"/>
-              </a:defRPr>
-            </a:pPr>
-            <a:r>
-              <a:rPr sz="1850" b="0" lang="ja-JP" altLang="en-US">
-                <a:solidFill>
-                  <a:srgbClr val="303437"/>
-                </a:solidFill>
-                <a:latin typeface="Noto Sans"/>
-                <a:ea typeface="Noto Sans CJK JP"/>
-                <a:cs typeface="Noto Sans"/>
-              </a:rPr>
-              <a:t>金融サービスの事業説明。花呗・借呗の消費者向け信用と、支付宝の決済機能を記載する。</a:t>
-            </a:r>
-          </a:p>
-          <a:p>
-            <a:pPr algn="l">
-              <a:lnSpc>
-                <a:spcPct val="114000"/>
-              </a:lnSpc>
-              <a:spcBef>
-                <a:spcPts val="0"/>
-              </a:spcBef>
-              <a:spcAft>
-                <a:spcPts val="0"/>
-              </a:spcAft>
-              <a:buNone/>
-              <a:defRPr sz="1150" b="0">
-                <a:solidFill>
-                  <a:srgbClr val="303437"/>
-                </a:solidFill>
-                <a:latin typeface="Noto Sans"/>
-              </a:defRPr>
-            </a:pPr>
-            <a:r>
-              <a:rPr sz="1150" b="0" lang="ja-JP" altLang="en-US">
-                <a:solidFill>
-                  <a:srgbClr val="626669"/>
-                </a:solidFill>
-                <a:latin typeface="Noto Sans"/>
-                <a:ea typeface="Noto Sans CJK JP"/>
-                <a:cs typeface="Noto Sans"/>
-                <a:hlinkClick r:id="rId3"/>
-              </a:rPr>
-              <a:t>https://www1.hkexnews.hk/listedco/listconews/sehk/2020/1026/2020102600165.pdf</a:t>
-            </a:r>
-          </a:p>
-        </p:txBody>
-      </p:sp>
-    </p:spTree>
-  </p:cSld>
-  <p:clrMapOvr>
-    <a:masterClrMapping/>
-  </p:clrMapOvr>
-</p:sld>
-</file>
-
-<file path=ppt/slides/slide41.xml><?xml version="1.0" encoding="utf-8"?>
-<p:sld xmlns:a="http://schemas.openxmlformats.org/drawingml/2006/main" xmlns:p="http://schemas.openxmlformats.org/presentationml/2006/main" xmlns:r="http://schemas.openxmlformats.org/officeDocument/2006/relationships">
-  <p:cSld>
-    <p:spTree>
-      <p:nvGrpSpPr>
-        <p:cNvPr id="1" name=""/>
-        <p:cNvGrpSpPr/>
-        <p:nvPr/>
-      </p:nvGrpSpPr>
-      <p:grpSpPr/>
-      <p:sp>
-        <p:nvSpPr>
-          <p:cNvPr id="2" name="Title 1"/>
-          <p:cNvSpPr>
-            <a:spLocks noGrp="1"/>
-          </p:cNvSpPr>
-          <p:nvPr>
-            <p:ph type="title"/>
-          </p:nvPr>
-        </p:nvSpPr>
-        <p:spPr>
-          <a:xfrm>
-            <a:off x="468172" y="650138"/>
-            <a:ext cx="8206740" cy="616305"/>
-          </a:xfrm>
-        </p:spPr>
-        <p:txBody>
-          <a:bodyPr wrap="square" lIns="0" rIns="0" tIns="0" bIns="0">
-            <a:noAutofit/>
-          </a:bodyPr>
-          <a:lstStyle/>
-          <a:p>
-            <a:pPr algn="l">
-              <a:lnSpc>
-                <a:spcPct val="110000"/>
-              </a:lnSpc>
-              <a:buNone/>
-              <a:defRPr sz="2800" b="0">
-                <a:solidFill>
-                  <a:srgbClr val="303437"/>
-                </a:solidFill>
-                <a:latin typeface="Noto Sans"/>
-              </a:defRPr>
-            </a:pPr>
-            <a:r>
-              <a:rPr sz="2800" b="1" lang="ja-JP" altLang="en-US">
-                <a:solidFill>
-                  <a:srgbClr val="303437"/>
-                </a:solidFill>
-                <a:latin typeface="Noto Sans"/>
-                <a:ea typeface="Noto Sans CJK JP"/>
-                <a:cs typeface="Noto Sans"/>
-              </a:rPr>
-              <a:t>参考文献</a:t>
-            </a:r>
-          </a:p>
-        </p:txBody>
-      </p:sp>
-      <p:sp>
-        <p:nvSpPr>
-          <p:cNvPr id="3" name="Title 2"/>
-          <p:cNvSpPr>
-            <a:spLocks noGrp="1"/>
-          </p:cNvSpPr>
-          <p:nvPr>
-            <p:ph type="title" idx="2"/>
-          </p:nvPr>
-        </p:nvSpPr>
-        <p:spPr>
-          <a:xfrm>
-            <a:off x="75895" y="0"/>
-            <a:ext cx="8115300" cy="480060"/>
-          </a:xfrm>
-        </p:spPr>
-        <p:txBody>
-          <a:bodyPr wrap="square" lIns="0" rIns="0" tIns="0" bIns="0" anchor="ctr">
-            <a:noAutofit/>
-          </a:bodyPr>
-          <a:lstStyle/>
-          <a:p>
-            <a:pPr algn="l">
-              <a:lnSpc>
-                <a:spcPct val="110000"/>
-              </a:lnSpc>
-              <a:buNone/>
-              <a:defRPr sz="1400" b="0">
-                <a:solidFill>
-                  <a:srgbClr val="303437"/>
-                </a:solidFill>
-                <a:latin typeface="Noto Sans"/>
-              </a:defRPr>
-            </a:pPr>
-            <a:r>
-              <a:rPr sz="1400" b="1" lang="ja-JP" altLang="en-US">
-                <a:solidFill>
-                  <a:srgbClr val="FFFEF8"/>
-                </a:solidFill>
-                <a:latin typeface="Noto Sans"/>
-                <a:ea typeface="Noto Sans CJK JP"/>
-                <a:cs typeface="Noto Sans"/>
-              </a:rPr>
-              <a:t>Appendix: 2. モデル比較と参考文献</a:t>
-            </a:r>
-          </a:p>
-        </p:txBody>
-      </p:sp>
-      <p:sp>
-        <p:nvSpPr>
-          <p:cNvPr id="4" name="文献 1: CLEVA: Chinese Language Models EVAluation Platform"/>
-          <p:cNvSpPr txBox="1"/>
-          <p:nvPr/>
-        </p:nvSpPr>
-        <p:spPr>
-          <a:xfrm>
-            <a:off x="548640" y="1463040"/>
-            <a:ext cx="8046720" cy="1643688"/>
-          </a:xfrm>
-          <a:prstGeom prst="rect">
-            <a:avLst/>
-          </a:prstGeom>
-          <a:noFill/>
-        </p:spPr>
-        <p:txBody>
-          <a:bodyPr wrap="square" lIns="0" rIns="0" tIns="0" bIns="0">
-            <a:noAutofit/>
-          </a:bodyPr>
-          <a:lstStyle/>
-          <a:p>
-            <a:pPr algn="l">
-              <a:lnSpc>
-                <a:spcPct val="114000"/>
-              </a:lnSpc>
-              <a:spcBef>
-                <a:spcPts val="0"/>
-              </a:spcBef>
-              <a:spcAft>
-                <a:spcPts val="400"/>
-              </a:spcAft>
-              <a:buNone/>
-              <a:defRPr sz="2000" b="0">
-                <a:solidFill>
-                  <a:srgbClr val="303437"/>
-                </a:solidFill>
-                <a:latin typeface="Noto Sans"/>
-              </a:defRPr>
-            </a:pPr>
-            <a:r>
-              <a:rPr sz="2000" b="1" lang="ja-JP" altLang="en-US">
-                <a:solidFill>
-                  <a:srgbClr val="303437"/>
-                </a:solidFill>
-                <a:latin typeface="Noto Sans"/>
-                <a:ea typeface="Noto Sans CJK JP"/>
-                <a:cs typeface="Noto Sans"/>
-              </a:rPr>
-              <a:t>CLEVA: Chinese Language Models EVAluation Platform</a:t>
-            </a:r>
-          </a:p>
-          <a:p>
-            <a:pPr algn="l">
-              <a:lnSpc>
-                <a:spcPct val="114000"/>
-              </a:lnSpc>
-              <a:spcBef>
-                <a:spcPts val="0"/>
-              </a:spcBef>
-              <a:spcAft>
-                <a:spcPts val="500"/>
-              </a:spcAft>
-              <a:buNone/>
-              <a:defRPr sz="1350" b="0">
-                <a:solidFill>
-                  <a:srgbClr val="303437"/>
-                </a:solidFill>
-                <a:latin typeface="Noto Sans"/>
-              </a:defRPr>
-            </a:pPr>
-            <a:r>
-              <a:rPr sz="1350" b="0" lang="ja-JP" altLang="en-US">
-                <a:solidFill>
-                  <a:srgbClr val="626669"/>
-                </a:solidFill>
-                <a:latin typeface="Noto Sans"/>
-                <a:ea typeface="Noto Sans CJK JP"/>
-                <a:cs typeface="Noto Sans"/>
-              </a:rPr>
-              <a:t>Li et al. · 2023 · EMNLP System Demonstrations</a:t>
-            </a:r>
-          </a:p>
-          <a:p>
-            <a:pPr algn="l">
-              <a:lnSpc>
-                <a:spcPct val="114000"/>
-              </a:lnSpc>
-              <a:spcBef>
-                <a:spcPts val="0"/>
-              </a:spcBef>
-              <a:spcAft>
-                <a:spcPts val="400"/>
-              </a:spcAft>
-              <a:buNone/>
-              <a:defRPr sz="1850" b="0">
-                <a:solidFill>
-                  <a:srgbClr val="303437"/>
-                </a:solidFill>
-                <a:latin typeface="Noto Sans"/>
-              </a:defRPr>
-            </a:pPr>
-            <a:r>
-              <a:rPr sz="1850" b="0" lang="ja-JP" altLang="en-US">
-                <a:solidFill>
-                  <a:srgbClr val="303437"/>
-                </a:solidFill>
-                <a:latin typeface="Noto Sans"/>
-                <a:ea typeface="Noto Sans CJK JP"/>
-                <a:cs typeface="Noto Sans"/>
-              </a:rPr>
-              <a:t>中国語モデルを多様な課題で評価する枠組み。金融質問を含む質問ペアの意味照合も扱う。</a:t>
-            </a:r>
-          </a:p>
-          <a:p>
-            <a:pPr algn="l">
-              <a:lnSpc>
-                <a:spcPct val="114000"/>
-              </a:lnSpc>
-              <a:spcBef>
-                <a:spcPts val="0"/>
-              </a:spcBef>
-              <a:spcAft>
-                <a:spcPts val="0"/>
-              </a:spcAft>
-              <a:buNone/>
-              <a:defRPr sz="1150" b="0">
-                <a:solidFill>
-                  <a:srgbClr val="303437"/>
-                </a:solidFill>
-                <a:latin typeface="Noto Sans"/>
-              </a:defRPr>
-            </a:pPr>
-            <a:r>
-              <a:rPr sz="1150" b="0" lang="ja-JP" altLang="en-US">
-                <a:solidFill>
-                  <a:srgbClr val="626669"/>
-                </a:solidFill>
-                <a:latin typeface="Noto Sans"/>
-                <a:ea typeface="Noto Sans CJK JP"/>
-                <a:cs typeface="Noto Sans"/>
-                <a:hlinkClick r:id="rId2"/>
-              </a:rPr>
-              <a:t>https://aclanthology.org/2023.emnlp-demo.17/</a:t>
-            </a:r>
-          </a:p>
-        </p:txBody>
-      </p:sp>
-      <p:sp>
-        <p:nvSpPr>
-          <p:cNvPr id="5" name="文献 2: CLEVAParaphraseIdentificationScenario"/>
-          <p:cNvSpPr txBox="1"/>
-          <p:nvPr/>
-        </p:nvSpPr>
-        <p:spPr>
-          <a:xfrm>
-            <a:off x="548640" y="3399536"/>
-            <a:ext cx="8046720" cy="1643637"/>
-          </a:xfrm>
-          <a:prstGeom prst="rect">
-            <a:avLst/>
-          </a:prstGeom>
-          <a:noFill/>
-        </p:spPr>
-        <p:txBody>
-          <a:bodyPr wrap="square" lIns="0" rIns="0" tIns="0" bIns="0">
-            <a:noAutofit/>
-          </a:bodyPr>
-          <a:lstStyle/>
-          <a:p>
-            <a:pPr algn="l">
-              <a:lnSpc>
-                <a:spcPct val="114000"/>
-              </a:lnSpc>
-              <a:spcBef>
-                <a:spcPts val="0"/>
-              </a:spcBef>
-              <a:spcAft>
-                <a:spcPts val="400"/>
-              </a:spcAft>
-              <a:buNone/>
-              <a:defRPr sz="2000" b="0">
-                <a:solidFill>
-                  <a:srgbClr val="303437"/>
-                </a:solidFill>
-                <a:latin typeface="Noto Sans"/>
-              </a:defRPr>
-            </a:pPr>
-            <a:r>
-              <a:rPr sz="2000" b="1" lang="ja-JP" altLang="en-US">
-                <a:solidFill>
-                  <a:srgbClr val="303437"/>
-                </a:solidFill>
-                <a:latin typeface="Noto Sans"/>
-                <a:ea typeface="Noto Sans CJK JP"/>
-                <a:cs typeface="Noto Sans"/>
-              </a:rPr>
-              <a:t>CLEVAParaphraseIdentificationScenario</a:t>
-            </a:r>
-          </a:p>
-          <a:p>
-            <a:pPr algn="l">
-              <a:lnSpc>
-                <a:spcPct val="114000"/>
-              </a:lnSpc>
-              <a:spcBef>
-                <a:spcPts val="0"/>
-              </a:spcBef>
-              <a:spcAft>
-                <a:spcPts val="500"/>
-              </a:spcAft>
-              <a:buNone/>
-              <a:defRPr sz="1350" b="0">
-                <a:solidFill>
-                  <a:srgbClr val="303437"/>
-                </a:solidFill>
-                <a:latin typeface="Noto Sans"/>
-              </a:defRPr>
-            </a:pPr>
-            <a:r>
-              <a:rPr sz="1350" b="0" lang="ja-JP" altLang="en-US">
-                <a:solidFill>
-                  <a:srgbClr val="626669"/>
-                </a:solidFill>
-                <a:latin typeface="Noto Sans"/>
-                <a:ea typeface="Noto Sans CJK JP"/>
-                <a:cs typeface="Noto Sans"/>
-              </a:rPr>
-              <a:t>Stanford CRFM · n.d. · HELM</a:t>
-            </a:r>
-          </a:p>
-          <a:p>
-            <a:pPr algn="l">
-              <a:lnSpc>
-                <a:spcPct val="114000"/>
-              </a:lnSpc>
-              <a:spcBef>
-                <a:spcPts val="0"/>
-              </a:spcBef>
-              <a:spcAft>
-                <a:spcPts val="400"/>
-              </a:spcAft>
-              <a:buNone/>
-              <a:defRPr sz="1850" b="0">
-                <a:solidFill>
-                  <a:srgbClr val="303437"/>
-                </a:solidFill>
-                <a:latin typeface="Noto Sans"/>
-              </a:defRPr>
-            </a:pPr>
-            <a:r>
-              <a:rPr sz="1850" b="0" lang="ja-JP" altLang="en-US">
-                <a:solidFill>
-                  <a:srgbClr val="303437"/>
-                </a:solidFill>
-                <a:latin typeface="Noto Sans"/>
-                <a:ea typeface="Noto Sans CJK JP"/>
-                <a:cs typeface="Noto Sans"/>
-              </a:rPr>
-              <a:t>金融サービスへの二つの質問が同じ意味かを問う、選択式の設問例を示す実装。</a:t>
-            </a:r>
-          </a:p>
-          <a:p>
-            <a:pPr algn="l">
-              <a:lnSpc>
-                <a:spcPct val="114000"/>
-              </a:lnSpc>
-              <a:spcBef>
-                <a:spcPts val="0"/>
-              </a:spcBef>
-              <a:spcAft>
-                <a:spcPts val="0"/>
-              </a:spcAft>
-              <a:buNone/>
-              <a:defRPr sz="1150" b="0">
-                <a:solidFill>
-                  <a:srgbClr val="303437"/>
-                </a:solidFill>
-                <a:latin typeface="Noto Sans"/>
-              </a:defRPr>
-            </a:pPr>
-            <a:r>
-              <a:rPr sz="1150" b="0" lang="ja-JP" altLang="en-US">
-                <a:solidFill>
-                  <a:srgbClr val="626669"/>
-                </a:solidFill>
-                <a:latin typeface="Noto Sans"/>
-                <a:ea typeface="Noto Sans CJK JP"/>
-                <a:cs typeface="Noto Sans"/>
-                <a:hlinkClick r:id="rId3"/>
-              </a:rPr>
-              <a:t>https://github.com/stanford-crfm/helm/blob/v0.4.0/src/helm/benchmark/scenarios/cleva_scenario.py</a:t>
             </a:r>
           </a:p>
         </p:txBody>
